--- a/docs/defense_presentation.pptx
+++ b/docs/defense_presentation.pptx
@@ -37,9 +37,10 @@
     <p:sldId id="285" r:id="rId31"/>
     <p:sldId id="286" r:id="rId32"/>
     <p:sldId id="287" r:id="rId33"/>
+    <p:sldId id="288" r:id="rId34"/>
   </p:sldIdLst>
   <p:notesMasterIdLst>
-    <p:notesMasterId r:id="rId34"/>
+    <p:notesMasterId r:id="rId35"/>
   </p:notesMasterIdLst>
   <p:sldSz cx="12192000" cy="6858000"/>
   <p:notesSz cx="6858000" cy="12192000"/>
@@ -138,7 +139,7 @@
   <p:extLst>
     <p:ext uri="{521415D9-36F7-43E2-AB2F-B90AF26B5E84}">
       <p14:sectionLst xmlns:p14="http://schemas.microsoft.com/office/powerpoint/2010/main">
-        <p14:section name="Opening" id="{fa60aa91-57d8-becc-fc0f-c1c8bcc7e906}">
+        <p14:section name="Opening" id="{ca318a64-cfe5-852b-fa42-ca28a578c300}">
           <p14:sldIdLst>
             <p14:sldId id="256"/>
             <p14:sldId id="257"/>
@@ -147,7 +148,7 @@
             <p14:sldId id="260"/>
           </p14:sldIdLst>
         </p14:section>
-        <p14:section name="Framework" id="{75e5ebe0-4951-cd48-f36c-defe41167968}">
+        <p14:section name="Framework" id="{1816760a-2dd6-b71a-8d5e-bd9847b29a44}">
           <p14:sldIdLst>
             <p14:sldId id="261"/>
             <p14:sldId id="262"/>
@@ -157,20 +158,20 @@
             <p14:sldId id="266"/>
           </p14:sldIdLst>
         </p14:section>
-        <p14:section name="Stages" id="{cf8fed6f-0e10-3b35-5505-85ea9f379e1d}">
+        <p14:section name="Stages" id="{d0ee1f7d-1b3f-e0cd-aeab-58974bb3d1be}">
           <p14:sldIdLst>
             <p14:sldId id="267"/>
             <p14:sldId id="268"/>
             <p14:sldId id="269"/>
           </p14:sldIdLst>
         </p14:section>
-        <p14:section name="Protocol" id="{ebb92ac2-df4e-1328-f41c-07c1d1378a7b}">
+        <p14:section name="Protocol" id="{7ff007cf-3489-df1d-2c22-c1ad78ea8b3a}">
           <p14:sldIdLst>
             <p14:sldId id="270"/>
             <p14:sldId id="271"/>
           </p14:sldIdLst>
         </p14:section>
-        <p14:section name="Results" id="{b65eb017-462a-ce97-e130-b202e0f28e11}">
+        <p14:section name="Results" id="{8ae84e90-da7a-6319-c121-4f9c4033d80c}">
           <p14:sldIdLst>
             <p14:sldId id="272"/>
             <p14:sldId id="273"/>
@@ -182,20 +183,21 @@
             <p14:sldId id="279"/>
             <p14:sldId id="280"/>
             <p14:sldId id="281"/>
+            <p14:sldId id="282"/>
           </p14:sldIdLst>
         </p14:section>
-        <p14:section name="Meaning" id="{7a59979d-5222-1205-b5b2-ce66753cb088}">
+        <p14:section name="Meaning" id="{58da729c-1736-8dda-4a86-f27615479276}">
           <p14:sldIdLst>
-            <p14:sldId id="282"/>
             <p14:sldId id="283"/>
             <p14:sldId id="284"/>
+            <p14:sldId id="285"/>
           </p14:sldIdLst>
         </p14:section>
-        <p14:section name="Close" id="{e62948e7-5c6b-0d90-cda2-6e0d51c1e33c}">
+        <p14:section name="Close" id="{047e23ec-f08a-2599-bbdf-b449f97e959d}">
           <p14:sldIdLst>
-            <p14:sldId id="285"/>
             <p14:sldId id="286"/>
             <p14:sldId id="287"/>
+            <p14:sldId id="288"/>
           </p14:sldIdLst>
         </p14:section>
       </p14:sectionLst>
@@ -354,31 +356,31 @@
                   <c:v>0.998</c:v>
                 </c:pt>
                 <c:pt idx="2">
-                  <c:v>0.99794</c:v>
+                  <c:v>0.99795</c:v>
                 </c:pt>
                 <c:pt idx="3">
-                  <c:v>0.99789</c:v>
+                  <c:v>0.99791</c:v>
                 </c:pt>
                 <c:pt idx="4">
-                  <c:v>0.9978</c:v>
+                  <c:v>0.99781</c:v>
                 </c:pt>
                 <c:pt idx="5">
-                  <c:v>0.9977</c:v>
+                  <c:v>0.99772</c:v>
                 </c:pt>
                 <c:pt idx="6">
+                  <c:v>0.99767</c:v>
+                </c:pt>
+                <c:pt idx="7">
                   <c:v>0.99766</c:v>
                 </c:pt>
-                <c:pt idx="7">
-                  <c:v>0.99765</c:v>
-                </c:pt>
                 <c:pt idx="8">
-                  <c:v>0.99765</c:v>
+                  <c:v>0.99766</c:v>
                 </c:pt>
                 <c:pt idx="9">
-                  <c:v>0.99765</c:v>
+                  <c:v>0.99766</c:v>
                 </c:pt>
                 <c:pt idx="10">
-                  <c:v>0.99766</c:v>
+                  <c:v>0.99767</c:v>
                 </c:pt>
                 <c:pt idx="11">
                   <c:v>0.99769</c:v>
@@ -387,10 +389,10 @@
                   <c:v>0.99778</c:v>
                 </c:pt>
                 <c:pt idx="13">
-                  <c:v>0.99858</c:v>
+                  <c:v>0.99857</c:v>
                 </c:pt>
                 <c:pt idx="14">
-                  <c:v>0.99895</c:v>
+                  <c:v>0.99886</c:v>
                 </c:pt>
               </c:numCache>
             </c:numRef>
@@ -655,13 +657,13 @@
                 <c:formatCode>General</c:formatCode>
                 <c:ptCount val="3"/>
                 <c:pt idx="0">
-                  <c:v>0.99883</c:v>
+                  <c:v>0.99873</c:v>
                 </c:pt>
                 <c:pt idx="1">
-                  <c:v>0.99765</c:v>
+                  <c:v>0.99766</c:v>
                 </c:pt>
                 <c:pt idx="2">
-                  <c:v>0.99889</c:v>
+                  <c:v>0.9988</c:v>
                 </c:pt>
               </c:numCache>
             </c:numRef>
@@ -738,13 +740,13 @@
                 <c:formatCode>General</c:formatCode>
                 <c:ptCount val="3"/>
                 <c:pt idx="0">
-                  <c:v>0.99892</c:v>
+                  <c:v>0.99882</c:v>
                 </c:pt>
                 <c:pt idx="1">
-                  <c:v>0.99795</c:v>
+                  <c:v>0.99794</c:v>
                 </c:pt>
                 <c:pt idx="2">
-                  <c:v>0.99879</c:v>
+                  <c:v>0.9987</c:v>
                 </c:pt>
               </c:numCache>
             </c:numRef>
@@ -1095,16 +1097,16 @@
                     <c:v>Uniform average</c:v>
                   </c:pt>
                   <c:pt idx="5">
+                    <c:v>B365C</c:v>
+                  </c:pt>
+                  <c:pt idx="6">
+                    <c:v>BWC</c:v>
+                  </c:pt>
+                  <c:pt idx="7">
                     <c:v>VC_BV</c:v>
                   </c:pt>
-                  <c:pt idx="6">
+                  <c:pt idx="8">
                     <c:v>WH</c:v>
-                  </c:pt>
-                  <c:pt idx="7">
-                    <c:v>PS</c:v>
-                  </c:pt>
-                  <c:pt idx="8">
-                    <c:v>IW</c:v>
                   </c:pt>
                 </c:lvl>
               </c:multiLvlStrCache>
@@ -1123,25 +1125,25 @@
                   <c:v>0.99693</c:v>
                 </c:pt>
                 <c:pt idx="2">
+                  <c:v>0.99772</c:v>
+                </c:pt>
+                <c:pt idx="3">
                   <c:v>0.99773</c:v>
                 </c:pt>
-                <c:pt idx="3">
-                  <c:v>0.99774</c:v>
-                </c:pt>
                 <c:pt idx="4">
-                  <c:v>0.99813</c:v>
+                  <c:v>0.99814</c:v>
                 </c:pt>
                 <c:pt idx="5">
+                  <c:v>0.9991</c:v>
+                </c:pt>
+                <c:pt idx="6">
+                  <c:v>0.99917</c:v>
+                </c:pt>
+                <c:pt idx="7">
                   <c:v>1.00026</c:v>
                 </c:pt>
-                <c:pt idx="6">
+                <c:pt idx="8">
                   <c:v>1.00048</c:v>
-                </c:pt>
-                <c:pt idx="7">
-                  <c:v>1.00055</c:v>
-                </c:pt>
-                <c:pt idx="8">
-                  <c:v>1.00061</c:v>
                 </c:pt>
               </c:numCache>
             </c:numRef>
@@ -1383,13 +1385,13 @@
                   <c:v>1.00076</c:v>
                 </c:pt>
                 <c:pt idx="1">
-                  <c:v>1.00088</c:v>
+                  <c:v>1.00078</c:v>
                 </c:pt>
                 <c:pt idx="2">
-                  <c:v>1.00088</c:v>
+                  <c:v>1.00078</c:v>
                 </c:pt>
                 <c:pt idx="3">
-                  <c:v>1.0008</c:v>
+                  <c:v>1.00077</c:v>
                 </c:pt>
               </c:numCache>
             </c:numRef>
@@ -1469,13 +1471,13 @@
                 <c:formatCode>General</c:formatCode>
                 <c:ptCount val="4"/>
                 <c:pt idx="0">
-                  <c:v>0.99745</c:v>
+                  <c:v>0.99746</c:v>
                 </c:pt>
                 <c:pt idx="1">
-                  <c:v>0.99842</c:v>
+                  <c:v>0.99839</c:v>
                 </c:pt>
                 <c:pt idx="2">
-                  <c:v>0.99843</c:v>
+                  <c:v>0.99841</c:v>
                 </c:pt>
                 <c:pt idx="3">
                   <c:v>0.99886</c:v>
@@ -1558,7 +1560,7 @@
                 <c:formatCode>General</c:formatCode>
                 <c:ptCount val="4"/>
                 <c:pt idx="0">
-                  <c:v>0.99722</c:v>
+                  <c:v>0.99723</c:v>
                 </c:pt>
                 <c:pt idx="1">
                   <c:v>0.99762</c:v>
@@ -1886,19 +1888,19 @@
                 <c:formatCode>General</c:formatCode>
                 <c:ptCount val="5"/>
                 <c:pt idx="0">
-                  <c:v>0.0004386258771955</c:v>
+                  <c:v>0.0004455286072115</c:v>
                 </c:pt>
                 <c:pt idx="1">
-                  <c:v>0.0007151847052722</c:v>
+                  <c:v>0.0006720359451092</c:v>
                 </c:pt>
                 <c:pt idx="2">
-                  <c:v>0.0019983758222999</c:v>
+                  <c:v>0.0020182809653802</c:v>
                 </c:pt>
                 <c:pt idx="3">
-                  <c:v>0.0045231329698202</c:v>
+                  <c:v>0.0042176873941862</c:v>
                 </c:pt>
                 <c:pt idx="4">
-                  <c:v>0.0115806553449734</c:v>
+                  <c:v>0.0117989748500138</c:v>
                 </c:pt>
               </c:numCache>
             </c:numRef>
@@ -2189,7 +2191,7 @@
             <c:bubble3D val="0"/>
             <c:spPr>
               <a:solidFill>
-                <a:srgbClr val="94A3B8"/>
+                <a:srgbClr val="C1121F"/>
               </a:solidFill>
               <a:effectLst/>
             </c:spPr>
@@ -2249,28 +2251,28 @@
                 <c:formatCode>General</c:formatCode>
                 <c:ptCount val="9"/>
                 <c:pt idx="0">
-                  <c:v>1.586</c:v>
+                  <c:v>1.596</c:v>
                 </c:pt>
                 <c:pt idx="1">
                   <c:v>0.897</c:v>
                 </c:pt>
                 <c:pt idx="2">
-                  <c:v>0.258</c:v>
+                  <c:v>0.204</c:v>
                 </c:pt>
                 <c:pt idx="3">
-                  <c:v>0.14</c:v>
+                  <c:v>0.146</c:v>
                 </c:pt>
                 <c:pt idx="4">
-                  <c:v>0.037</c:v>
+                  <c:v>0.1</c:v>
                 </c:pt>
                 <c:pt idx="5">
-                  <c:v>-0.125</c:v>
+                  <c:v>-0.155</c:v>
                 </c:pt>
                 <c:pt idx="6">
-                  <c:v>-0.237</c:v>
+                  <c:v>-0.292</c:v>
                 </c:pt>
                 <c:pt idx="7">
-                  <c:v>-0.585</c:v>
+                  <c:v>-0.602</c:v>
                 </c:pt>
                 <c:pt idx="8">
                   <c:v>-3.699</c:v>
@@ -3906,7 +3908,7 @@
           <a:p>
             <a:r>
               <a:rPr lang="en-US" dirty="0"/>
-              <a:t>Lower is better. Note the caveat: at a 70% coverage floor only one closing bookmaker survives, so this is mostly a comparison against opening prices.</a:t>
+              <a:t>Lower is better. Note the caveat: at the 60% coverage floor only three closing prices qualify (PSC, B365C, BWC), so this is not the whole closing market.</a:t>
             </a:r>
             <a:endParaRPr lang="en-US" dirty="0"/>
           </a:p>
@@ -4170,7 +4172,7 @@
           <a:p>
             <a:r>
               <a:rPr lang="en-US" dirty="0"/>
-              <a:t>Do not oversell. The Betfair line is the one an examiner will press on, so state it first.</a:t>
+              <a:t>Do not oversell. The Betfair line is the one an examiner will press on, so state it first. The next slide shows that, when Pinnacle also quotes, the two cannot be told apart.</a:t>
             </a:r>
             <a:endParaRPr lang="en-US" dirty="0"/>
           </a:p>
@@ -4258,7 +4260,7 @@
           <a:p>
             <a:r>
               <a:rPr lang="en-US" dirty="0"/>
-              <a:t>Bankrolls across rows are not comparable: the bet counts differ by an order of magnitude.</a:t>
+              <a:t>Two questions answered at once: the findings do not depend on the sleeping-experts reduction, and Betfair is not shown to be better than Pinnacle. Calibrated log-loss, lower is better; step re-selected on each dataset's 75% prefix.</a:t>
             </a:r>
             <a:endParaRPr lang="en-US" dirty="0"/>
           </a:p>
@@ -4346,7 +4348,7 @@
           <a:p>
             <a:r>
               <a:rPr lang="en-US" dirty="0"/>
-              <a:t>The methodological high point. Any comparison against a uniform baseline should now carry this control.</a:t>
+              <a:t>Bankrolls across rows are not comparable: the bet counts differ by an order of magnitude.</a:t>
             </a:r>
             <a:endParaRPr lang="en-US" dirty="0"/>
           </a:p>
@@ -4434,7 +4436,7 @@
           <a:p>
             <a:r>
               <a:rPr lang="en-US" dirty="0"/>
-              <a:t>Do not rush this slide. The negative results are a real part of the contribution.</a:t>
+              <a:t>The methodological high point. Any comparison against a uniform baseline should now carry this control.</a:t>
             </a:r>
             <a:endParaRPr lang="en-US" dirty="0"/>
           </a:p>
@@ -4522,7 +4524,7 @@
           <a:p>
             <a:r>
               <a:rPr lang="en-US" dirty="0"/>
-              <a:t/>
+              <a:t>Do not rush this slide. The negative results are a real part of the contribution.</a:t>
             </a:r>
             <a:endParaRPr lang="en-US" dirty="0"/>
           </a:p>
@@ -4610,7 +4612,7 @@
           <a:p>
             <a:r>
               <a:rPr lang="en-US" dirty="0"/>
-              <a:t>Keep this measured and evidential. Every line is one of our own results.</a:t>
+              <a:t/>
             </a:r>
             <a:endParaRPr lang="en-US" dirty="0"/>
           </a:p>
@@ -4698,7 +4700,7 @@
           <a:p>
             <a:r>
               <a:rPr lang="en-US" dirty="0"/>
-              <a:t>State the limit of the evidence explicitly; it is the honest version and it is stronger.</a:t>
+              <a:t>Keep this measured and evidential. Every line is one of our own results.</a:t>
             </a:r>
             <a:endParaRPr lang="en-US" dirty="0"/>
           </a:p>
@@ -4874,7 +4876,7 @@
           <a:p>
             <a:r>
               <a:rPr lang="en-US" dirty="0"/>
-              <a:t>Five points, roughly fifteen seconds each. Do not add anything new here.</a:t>
+              <a:t>State the limit of the evidence explicitly; it is the honest version and it is stronger.</a:t>
             </a:r>
             <a:endParaRPr lang="en-US" dirty="0"/>
           </a:p>
@@ -4962,7 +4964,7 @@
           <a:p>
             <a:r>
               <a:rPr lang="en-US" dirty="0"/>
-              <a:t>The live feed is the one that answers the thesis's own main limitation.</a:t>
+              <a:t>Five points, roughly fifteen seconds each. Do not add anything new here.</a:t>
             </a:r>
             <a:endParaRPr lang="en-US" dirty="0"/>
           </a:p>
@@ -5050,7 +5052,7 @@
           <a:p>
             <a:r>
               <a:rPr lang="en-US" dirty="0"/>
-              <a:t>Stop talking. Let them ask.</a:t>
+              <a:t>The live feed is the one that answers the thesis's own main limitation.</a:t>
             </a:r>
             <a:endParaRPr lang="en-US" dirty="0"/>
           </a:p>
@@ -5074,6 +5076,94 @@
             <a:fld id="{F7021451-1387-4CA6-816F-3879F97B5CBC}" type="slidenum">
               <a:rPr lang="en-US"/>
               <a:t>32</a:t>
+            </a:fld>
+            <a:endParaRPr lang="en-US"/>
+          </a:p>
+        </p:txBody>
+      </p:sp>
+    </p:spTree>
+    <p:extLst>
+      <p:ext uri="{BB962C8B-B14F-4D97-AF65-F5344CB8AC3E}">
+        <p14:creationId xmlns:p14="http://schemas.microsoft.com/office/powerpoint/2010/main" val="1024086991"/>
+      </p:ext>
+    </p:extLst>
+  </p:cSld>
+  <p:clrMapOvr>
+    <a:masterClrMapping/>
+  </p:clrMapOvr>
+</p:notes>
+</file>
+
+<file path=ppt/notesSlides/notesSlide33.xml><?xml version="1.0" encoding="utf-8"?>
+<p:notes xmlns:a="http://schemas.openxmlformats.org/drawingml/2006/main" xmlns:r="http://schemas.openxmlformats.org/officeDocument/2006/relationships" xmlns:p="http://schemas.openxmlformats.org/presentationml/2006/main">
+  <p:cSld>
+    <p:spTree>
+      <p:nvGrpSpPr>
+        <p:cNvPr id="1" name=""/>
+        <p:cNvGrpSpPr/>
+        <p:nvPr/>
+      </p:nvGrpSpPr>
+      <p:grpSpPr>
+        <a:xfrm>
+          <a:off x="0" y="0"/>
+          <a:ext cx="0" cy="0"/>
+          <a:chOff x="0" y="0"/>
+          <a:chExt cx="0" cy="0"/>
+        </a:xfrm>
+      </p:grpSpPr>
+      <p:sp>
+        <p:nvSpPr>
+          <p:cNvPr id="2" name="Slide Image Placeholder 1"/>
+          <p:cNvSpPr>
+            <a:spLocks noGrp="1" noRot="1" noChangeAspect="1"/>
+          </p:cNvSpPr>
+          <p:nvPr>
+            <p:ph type="sldImg"/>
+          </p:nvPr>
+        </p:nvSpPr>
+        <p:spPr/>
+      </p:sp>
+      <p:sp>
+        <p:nvSpPr>
+          <p:cNvPr id="3" name="Notes Placeholder 2"/>
+          <p:cNvSpPr>
+            <a:spLocks noGrp="1"/>
+          </p:cNvSpPr>
+          <p:nvPr>
+            <p:ph type="body" idx="1"/>
+          </p:nvPr>
+        </p:nvSpPr>
+        <p:spPr/>
+        <p:txBody>
+          <a:bodyPr/>
+          <a:lstStyle/>
+          <a:p>
+            <a:r>
+              <a:rPr lang="en-US" dirty="0"/>
+              <a:t>Stop talking. Let them ask.</a:t>
+            </a:r>
+            <a:endParaRPr lang="en-US" dirty="0"/>
+          </a:p>
+        </p:txBody>
+      </p:sp>
+      <p:sp>
+        <p:nvSpPr>
+          <p:cNvPr id="4" name="Slide Number Placeholder 3"/>
+          <p:cNvSpPr>
+            <a:spLocks noGrp="1"/>
+          </p:cNvSpPr>
+          <p:nvPr>
+            <p:ph type="sldNum" sz="quarter" idx="10"/>
+          </p:nvPr>
+        </p:nvSpPr>
+        <p:spPr/>
+        <p:txBody>
+          <a:bodyPr/>
+          <a:lstStyle/>
+          <a:p>
+            <a:fld id="{F7021451-1387-4CA6-816F-3879F97B5CBC}" type="slidenum">
+              <a:rPr lang="en-US"/>
+              <a:t>33</a:t>
             </a:fld>
             <a:endParaRPr lang="en-US"/>
           </a:p>
@@ -9707,7 +9797,7 @@
                   <a:schemeClr val="accent3"/>
                 </a:solidFill>
               </a:rPr>
-              <a:t>−0.000096,  p = 0.001</a:t>
+              <a:t>−0.000102,  p &lt; 0.001</a:t>
             </a:r>
             <a:endParaRPr lang="en-US" sz="1700" dirty="0"/>
           </a:p>
@@ -10085,7 +10175,7 @@
                   <a:schemeClr val="tx1"/>
                 </a:solidFill>
               </a:rPr>
-              <a:t>beats the uniform average by 0.00141 (p &lt; 0.001)</a:t>
+              <a:t>beats the uniform average by 0.00140 (p &lt; 0.001)</a:t>
             </a:r>
             <a:endParaRPr lang="en-US" sz="1350" dirty="0"/>
           </a:p>
@@ -10418,7 +10508,7 @@
                   <a:schemeClr val="tx1"/>
                 </a:solidFill>
               </a:rPr>
-              <a:t>On a HOMOGENEOUS panel, Hedge and FTRL LOSE to it, in 8 tests out of 8.</a:t>
+              <a:t>On the HOMOGENEOUS closing panel, Hedge and FTRL LOSE to it, in 4 tests out of 4; on the opening one all three tie.</a:t>
             </a:r>
             <a:endParaRPr lang="en-US" sz="1400" dirty="0"/>
           </a:p>
@@ -10454,7 +10544,7 @@
                   <a:schemeClr val="accent5"/>
                 </a:solidFill>
               </a:rPr>
-              <a:t>13 good closing experts and 13 systematically worse opening ones is a quality difference to learn. Remove it and adaptation is pure cost.</a:t>
+              <a:t>13 good closing experts and 13 systematically worse opening ones is a quality difference to learn. Remove it and adaptation buys nothing.</a:t>
             </a:r>
             <a:endParaRPr lang="en-US" sz="1350" dirty="0"/>
           </a:p>
@@ -10677,7 +10767,7 @@
                   <a:schemeClr val="tx1"/>
                 </a:solidFill>
               </a:rPr>
-              <a:t>Microstructure predicted the closing advantage should concentrate where the line moved. It does: 0.00044 in the quiet fifth, 0.01158 in the noisy one.</a:t>
+              <a:t>Microstructure predicted the closing advantage should concentrate where the line moved. It does: 0.00045 in the quiet fifth, 0.01180 in the noisy one.</a:t>
             </a:r>
             <a:endParaRPr lang="en-US" sz="1400" dirty="0"/>
           </a:p>
@@ -10713,7 +10803,7 @@
                   <a:schemeClr val="accent2"/>
                 </a:solidFill>
               </a:rPr>
-              <a:t>In Q1 it is not even significant (p = 0.052).</a:t>
+              <a:t>In Q1 it is only just significant (p = 0.048).</a:t>
             </a:r>
             <a:endParaRPr lang="en-US" sz="1400" dirty="0"/>
           </a:p>
@@ -10893,7 +10983,7 @@
                   <a:schemeClr val="tx1"/>
                 </a:solidFill>
               </a:rPr>
-              <a:t>Fitted through 31/12/2024, measured on 11,574 rounds of 2025-26.</a:t>
+              <a:t>Fitted through 31/12/2024, measured on 2025-26: 7,861 matches every series quoted.</a:t>
             </a:r>
             <a:endParaRPr lang="en-US" sz="1600" dirty="0"/>
           </a:p>
@@ -11028,7 +11118,7 @@
                   <a:schemeClr val="accent5"/>
                 </a:solidFill>
               </a:rPr>
-              <a:t>−0.0019 to −0.0065, all p ≤ 0.019</a:t>
+              <a:t>−0.0018 to −0.0029, all p ≤ 0.011</a:t>
             </a:r>
             <a:endParaRPr lang="en-US" sz="1350" dirty="0"/>
           </a:p>
@@ -11163,7 +11253,7 @@
                   <a:schemeClr val="accent5"/>
                 </a:solidFill>
               </a:rPr>
-              <a:t>B365C p=0.193 · BWC p=0.361 · BFEC p=0.052</a:t>
+              <a:t>B365C and BWC tie with every variant, p from 0.263 to 0.892 · PSC ties too, on its own rounds</a:t>
             </a:r>
             <a:endParaRPr lang="en-US" sz="1350" dirty="0"/>
           </a:p>
@@ -11298,7 +11388,7 @@
                   <a:schemeClr val="accent5"/>
                 </a:solidFill>
               </a:rPr>
-              <a:t>an exchange, not a bookmaker: a market price with no operator margin</a:t>
+              <a:t>+0.00078 to +0.00143, p ≤ 0.026 · an exchange, a market price with no operator margin, and Pinnacle has stopped quoting</a:t>
             </a:r>
             <a:endParaRPr lang="en-US" sz="1350" dirty="0"/>
           </a:p>
@@ -11442,42 +11532,62 @@
                   <a:schemeClr val="tx2"/>
                 </a:solidFill>
               </a:rPr>
-              <a:t>Better prediction does not mean profit</a:t>
+              <a:t>Common matches: nobody asleep, same conclusions</a:t>
             </a:r>
             <a:endParaRPr lang="en-US" sz="3000" dirty="0"/>
           </a:p>
         </p:txBody>
       </p:sp>
-      <p:graphicFrame>
-        <p:nvGraphicFramePr>
-          <p:cNvPr id="3" name="Chart 0" descr=""/>
-          <p:cNvGraphicFramePr/>
-          <p:nvPr/>
-        </p:nvGraphicFramePr>
-        <p:xfrm>
-          <a:off x="640080" y="1554480"/>
-          <a:ext cx="6675120" cy="3749040"/>
-        </p:xfrm>
-        <a:graphic xmlns:a="http://schemas.openxmlformats.org/drawingml/2006/main">
-          <a:graphicData uri="http://schemas.openxmlformats.org/drawingml/2006/chart">
-            <c:chart xmlns:c="http://schemas.openxmlformats.org/drawingml/2006/chart" r:id="rId1"/>
-          </a:graphicData>
-        </a:graphic>
-      </p:graphicFrame>
-      <p:sp>
-        <p:nvSpPr>
-          <p:cNvPr id="4" name="vb-note"/>
+      <p:sp>
+        <p:nvSpPr>
+          <p:cNvPr id="3" name="Text 1"/>
+          <p:cNvSpPr txBox="1"/>
+          <p:nvPr/>
+        </p:nvSpPr>
+        <p:spPr>
+          <a:xfrm>
+            <a:off x="640080" y="1325880"/>
+            <a:ext cx="10881360" cy="365760"/>
+          </a:xfrm>
+          <a:prstGeom prst="rect">
+            <a:avLst/>
+          </a:prstGeom>
+          <a:noFill/>
+          <a:ln/>
+        </p:spPr>
+        <p:txBody>
+          <a:bodyPr wrap="square" rtlCol="0" anchor="ctr"/>
+          <a:lstStyle/>
+          <a:p>
+            <a:pPr indent="0" marL="0">
+              <a:buNone/>
+            </a:pPr>
+            <a:r>
+              <a:rPr lang="en-US" sz="1500" dirty="0">
+                <a:solidFill>
+                  <a:schemeClr val="tx1"/>
+                </a:solidFill>
+              </a:rPr>
+              <a:t>Only the matches every chosen series quoted: the algorithms are the classical ones, and every series is scored on the same matches.</a:t>
+            </a:r>
+            <a:endParaRPr lang="en-US" sz="1500" dirty="0"/>
+          </a:p>
+        </p:txBody>
+      </p:sp>
+      <p:sp>
+        <p:nvSpPr>
+          <p:cNvPr id="4" name="cm-0"/>
           <p:cNvSpPr/>
           <p:nvPr/>
         </p:nvSpPr>
         <p:spPr>
           <a:xfrm>
-            <a:off x="7589520" y="1554480"/>
-            <a:ext cx="3931920" cy="3749040"/>
+            <a:off x="640080" y="1828800"/>
+            <a:ext cx="10881360" cy="1143000"/>
           </a:xfrm>
           <a:prstGeom prst="roundRect">
             <a:avLst>
-              <a:gd name="adj" fmla="val 1951"/>
+              <a:gd name="adj" fmla="val 6400"/>
             </a:avLst>
           </a:prstGeom>
           <a:solidFill>
@@ -11493,14 +11603,14 @@
       </p:sp>
       <p:sp>
         <p:nvSpPr>
-          <p:cNvPr id="5" name="Text 2"/>
+          <p:cNvPr id="5" name="Text 3"/>
           <p:cNvSpPr txBox="1"/>
           <p:nvPr/>
         </p:nvSpPr>
         <p:spPr>
           <a:xfrm>
-            <a:off x="7909560" y="1783080"/>
-            <a:ext cx="3291840" cy="365760"/>
+            <a:off x="960120" y="1965960"/>
+            <a:ext cx="5669280" cy="411480"/>
           </a:xfrm>
           <a:prstGeom prst="rect">
             <a:avLst/>
@@ -11516,27 +11626,27 @@
               <a:buNone/>
             </a:pPr>
             <a:r>
-              <a:rPr lang="en-US" sz="1800" b="1" dirty="0">
+              <a:rPr lang="en-US" sz="1700" b="1" dirty="0">
                 <a:solidFill>
                   <a:schemeClr val="tx2"/>
                 </a:solidFill>
               </a:rPr>
-              <a:t>Two profits, one loss</a:t>
-            </a:r>
-            <a:endParaRPr lang="en-US" sz="1800" dirty="0"/>
-          </a:p>
-        </p:txBody>
-      </p:sp>
-      <p:sp>
-        <p:nvSpPr>
-          <p:cNvPr id="6" name="Text 3"/>
+              <a:t>B · 12 series · 31,596 matches</a:t>
+            </a:r>
+            <a:endParaRPr lang="en-US" sz="1700" dirty="0"/>
+          </a:p>
+        </p:txBody>
+      </p:sp>
+      <p:sp>
+        <p:nvSpPr>
+          <p:cNvPr id="6" name="Text 4"/>
           <p:cNvSpPr txBox="1"/>
           <p:nvPr/>
         </p:nvSpPr>
         <p:spPr>
           <a:xfrm>
-            <a:off x="7909560" y="2194560"/>
-            <a:ext cx="3291840" cy="1828800"/>
+            <a:off x="6766560" y="1965960"/>
+            <a:ext cx="4480560" cy="411480"/>
           </a:xfrm>
           <a:prstGeom prst="rect">
             <a:avLst/>
@@ -11552,12 +11662,48 @@
               <a:buNone/>
             </a:pPr>
             <a:r>
+              <a:rPr lang="en-US" sz="1700" b="1" dirty="0">
+                <a:solidFill>
+                  <a:schemeClr val="accent1"/>
+                </a:solidFill>
+              </a:rPr>
+              <a:t>level with Pinnacle</a:t>
+            </a:r>
+            <a:endParaRPr lang="en-US" sz="1700" dirty="0"/>
+          </a:p>
+        </p:txBody>
+      </p:sp>
+      <p:sp>
+        <p:nvSpPr>
+          <p:cNvPr id="7" name="Text 5"/>
+          <p:cNvSpPr txBox="1"/>
+          <p:nvPr/>
+        </p:nvSpPr>
+        <p:spPr>
+          <a:xfrm>
+            <a:off x="960120" y="2450592"/>
+            <a:ext cx="10241280" cy="411480"/>
+          </a:xfrm>
+          <a:prstGeom prst="rect">
+            <a:avLst/>
+          </a:prstGeom>
+          <a:noFill/>
+          <a:ln/>
+        </p:spPr>
+        <p:txBody>
+          <a:bodyPr wrap="square" lIns="0" tIns="0" rIns="0" bIns="0" rtlCol="0" anchor="ctr"/>
+          <a:lstStyle/>
+          <a:p>
+            <a:pPr indent="0" marL="0">
+              <a:buNone/>
+            </a:pPr>
+            <a:r>
               <a:rPr lang="en-US" sz="1350" dirty="0">
                 <a:solidFill>
-                  <a:schemeClr val="tx1"/>
-                </a:solidFill>
-              </a:rPr>
-              <a:t>Significant gains against WHC (p&lt;0.001) and IW (p=0.008), both recreational-facing houses. A significant LOSS against PSC, the best forecaster in the panel, i.e. exactly the opponent an inferior model should lose to.</a:t>
+                  <a:schemeClr val="accent5"/>
+                </a:solidFill>
+              </a:rPr>
+              <a:t>FTRL 0.99895 · OGD 0.99910 · PSC 0.99893, every gap p ≥ 0.099 · uniform 1.00048, beaten</a:t>
             </a:r>
             <a:endParaRPr lang="en-US" sz="1350" dirty="0"/>
           </a:p>
@@ -11565,14 +11711,41 @@
       </p:sp>
       <p:sp>
         <p:nvSpPr>
-          <p:cNvPr id="7" name="Text 4"/>
+          <p:cNvPr id="8" name="cm-1"/>
+          <p:cNvSpPr/>
+          <p:nvPr/>
+        </p:nvSpPr>
+        <p:spPr>
+          <a:xfrm>
+            <a:off x="640080" y="3154680"/>
+            <a:ext cx="10881360" cy="1143000"/>
+          </a:xfrm>
+          <a:prstGeom prst="roundRect">
+            <a:avLst>
+              <a:gd name="adj" fmla="val 6400"/>
+            </a:avLst>
+          </a:prstGeom>
+          <a:solidFill>
+            <a:srgbClr val="F2F5F9"/>
+          </a:solidFill>
+          <a:ln w="12700">
+            <a:solidFill>
+              <a:srgbClr val="E2E8F0"/>
+            </a:solidFill>
+            <a:prstDash val="solid"/>
+          </a:ln>
+        </p:spPr>
+      </p:sp>
+      <p:sp>
+        <p:nvSpPr>
+          <p:cNvPr id="9" name="Text 7"/>
           <p:cNvSpPr txBox="1"/>
           <p:nvPr/>
         </p:nvSpPr>
         <p:spPr>
           <a:xfrm>
-            <a:off x="7909560" y="4114800"/>
-            <a:ext cx="3291840" cy="1005840"/>
+            <a:off x="960120" y="3291840"/>
+            <a:ext cx="5669280" cy="411480"/>
           </a:xfrm>
           <a:prstGeom prst="rect">
             <a:avLst/>
@@ -11588,12 +11761,84 @@
               <a:buNone/>
             </a:pPr>
             <a:r>
-              <a:rPr lang="en-US" sz="1350" i="1" dirty="0">
+              <a:rPr lang="en-US" sz="1700" b="1" dirty="0">
+                <a:solidFill>
+                  <a:schemeClr val="tx2"/>
+                </a:solidFill>
+              </a:rPr>
+              <a:t>B′ · the same matches, no Pinnacle</a:t>
+            </a:r>
+            <a:endParaRPr lang="en-US" sz="1700" dirty="0"/>
+          </a:p>
+        </p:txBody>
+      </p:sp>
+      <p:sp>
+        <p:nvSpPr>
+          <p:cNvPr id="10" name="Text 8"/>
+          <p:cNvSpPr txBox="1"/>
+          <p:nvPr/>
+        </p:nvSpPr>
+        <p:spPr>
+          <a:xfrm>
+            <a:off x="6766560" y="3291840"/>
+            <a:ext cx="4480560" cy="411480"/>
+          </a:xfrm>
+          <a:prstGeom prst="rect">
+            <a:avLst/>
+          </a:prstGeom>
+          <a:noFill/>
+          <a:ln/>
+        </p:spPr>
+        <p:txBody>
+          <a:bodyPr wrap="square" lIns="0" tIns="0" rIns="0" bIns="0" rtlCol="0" anchor="ctr"/>
+          <a:lstStyle/>
+          <a:p>
+            <a:pPr indent="0" marL="0">
+              <a:buNone/>
+            </a:pPr>
+            <a:r>
+              <a:rPr lang="en-US" sz="1700" b="1" dirty="0">
+                <a:solidFill>
+                  <a:schemeClr val="accent1"/>
+                </a:solidFill>
+              </a:rPr>
+              <a:t>level with the best closing</a:t>
+            </a:r>
+            <a:endParaRPr lang="en-US" sz="1700" dirty="0"/>
+          </a:p>
+        </p:txBody>
+      </p:sp>
+      <p:sp>
+        <p:nvSpPr>
+          <p:cNvPr id="11" name="Text 9"/>
+          <p:cNvSpPr txBox="1"/>
+          <p:nvPr/>
+        </p:nvSpPr>
+        <p:spPr>
+          <a:xfrm>
+            <a:off x="960120" y="3776472"/>
+            <a:ext cx="10241280" cy="411480"/>
+          </a:xfrm>
+          <a:prstGeom prst="rect">
+            <a:avLst/>
+          </a:prstGeom>
+          <a:noFill/>
+          <a:ln/>
+        </p:spPr>
+        <p:txBody>
+          <a:bodyPr wrap="square" lIns="0" tIns="0" rIns="0" bIns="0" rtlCol="0" anchor="ctr"/>
+          <a:lstStyle/>
+          <a:p>
+            <a:pPr indent="0" marL="0">
+              <a:buNone/>
+            </a:pPr>
+            <a:r>
+              <a:rPr lang="en-US" sz="1350" dirty="0">
                 <a:solidFill>
                   <a:schemeClr val="accent5"/>
                 </a:solidFill>
               </a:rPr>
-              <a:t>The quality gained is smaller than the margin charged. The test works in both directions.</a:t>
+              <a:t>FTRL 0.99940 · VC_BVC 0.99949, p 0.151 to 0.618 · the plain average loses to VC_BVC (p &lt; 0.001)</a:t>
             </a:r>
             <a:endParaRPr lang="en-US" sz="1350" dirty="0"/>
           </a:p>
@@ -11601,14 +11846,149 @@
       </p:sp>
       <p:sp>
         <p:nvSpPr>
-          <p:cNvPr id="8" name="Text 5"/>
+          <p:cNvPr id="12" name="cm-2"/>
+          <p:cNvSpPr/>
+          <p:nvPr/>
+        </p:nvSpPr>
+        <p:spPr>
+          <a:xfrm>
+            <a:off x="640080" y="4480560"/>
+            <a:ext cx="10881360" cy="1143000"/>
+          </a:xfrm>
+          <a:prstGeom prst="roundRect">
+            <a:avLst>
+              <a:gd name="adj" fmla="val 6400"/>
+            </a:avLst>
+          </a:prstGeom>
+          <a:solidFill>
+            <a:srgbClr val="F2F5F9"/>
+          </a:solidFill>
+          <a:ln w="12700">
+            <a:solidFill>
+              <a:srgbClr val="E2E8F0"/>
+            </a:solidFill>
+            <a:prstDash val="solid"/>
+          </a:ln>
+        </p:spPr>
+      </p:sp>
+      <p:sp>
+        <p:nvSpPr>
+          <p:cNvPr id="13" name="Text 11"/>
           <p:cNvSpPr txBox="1"/>
           <p:nvPr/>
         </p:nvSpPr>
         <p:spPr>
           <a:xfrm>
-            <a:off x="640080" y="5440680"/>
-            <a:ext cx="6675120" cy="320040"/>
+            <a:off x="960120" y="4617720"/>
+            <a:ext cx="5669280" cy="411480"/>
+          </a:xfrm>
+          <a:prstGeom prst="rect">
+            <a:avLst/>
+          </a:prstGeom>
+          <a:noFill/>
+          <a:ln/>
+        </p:spPr>
+        <p:txBody>
+          <a:bodyPr wrap="square" lIns="0" tIns="0" rIns="0" bIns="0" rtlCol="0" anchor="ctr"/>
+          <a:lstStyle/>
+          <a:p>
+            <a:pPr indent="0" marL="0">
+              <a:buNone/>
+            </a:pPr>
+            <a:r>
+              <a:rPr lang="en-US" sz="1700" b="1" dirty="0">
+                <a:solidFill>
+                  <a:schemeClr val="tx2"/>
+                </a:solidFill>
+              </a:rPr>
+              <a:t>C · 10 series with Betfair · 6,941 matches</a:t>
+            </a:r>
+            <a:endParaRPr lang="en-US" sz="1700" dirty="0"/>
+          </a:p>
+        </p:txBody>
+      </p:sp>
+      <p:sp>
+        <p:nvSpPr>
+          <p:cNvPr id="14" name="Text 12"/>
+          <p:cNvSpPr txBox="1"/>
+          <p:nvPr/>
+        </p:nvSpPr>
+        <p:spPr>
+          <a:xfrm>
+            <a:off x="6766560" y="4617720"/>
+            <a:ext cx="4480560" cy="411480"/>
+          </a:xfrm>
+          <a:prstGeom prst="rect">
+            <a:avLst/>
+          </a:prstGeom>
+          <a:noFill/>
+          <a:ln/>
+        </p:spPr>
+        <p:txBody>
+          <a:bodyPr wrap="square" lIns="0" tIns="0" rIns="0" bIns="0" rtlCol="0" anchor="ctr"/>
+          <a:lstStyle/>
+          <a:p>
+            <a:pPr indent="0" marL="0">
+              <a:buNone/>
+            </a:pPr>
+            <a:r>
+              <a:rPr lang="en-US" sz="1700" b="1" dirty="0">
+                <a:solidFill>
+                  <a:schemeClr val="accent3"/>
+                </a:solidFill>
+              </a:rPr>
+              <a:t>Pinnacle ≈ Betfair</a:t>
+            </a:r>
+            <a:endParaRPr lang="en-US" sz="1700" dirty="0"/>
+          </a:p>
+        </p:txBody>
+      </p:sp>
+      <p:sp>
+        <p:nvSpPr>
+          <p:cNvPr id="15" name="Text 13"/>
+          <p:cNvSpPr txBox="1"/>
+          <p:nvPr/>
+        </p:nvSpPr>
+        <p:spPr>
+          <a:xfrm>
+            <a:off x="960120" y="5102352"/>
+            <a:ext cx="10241280" cy="411480"/>
+          </a:xfrm>
+          <a:prstGeom prst="rect">
+            <a:avLst/>
+          </a:prstGeom>
+          <a:noFill/>
+          <a:ln/>
+        </p:spPr>
+        <p:txBody>
+          <a:bodyPr wrap="square" lIns="0" tIns="0" rIns="0" bIns="0" rtlCol="0" anchor="ctr"/>
+          <a:lstStyle/>
+          <a:p>
+            <a:pPr indent="0" marL="0">
+              <a:buNone/>
+            </a:pPr>
+            <a:r>
+              <a:rPr lang="en-US" sz="1350" dirty="0">
+                <a:solidFill>
+                  <a:schemeClr val="accent5"/>
+                </a:solidFill>
+              </a:rPr>
+              <a:t>PSC 0.99775 · BFEC 0.99820, p = 0.122 · Betfair's 2025-26 lead coincides with Pinnacle's absence</a:t>
+            </a:r>
+            <a:endParaRPr lang="en-US" sz="1350" dirty="0"/>
+          </a:p>
+        </p:txBody>
+      </p:sp>
+      <p:sp>
+        <p:nvSpPr>
+          <p:cNvPr id="16" name="Text 14"/>
+          <p:cNvSpPr txBox="1"/>
+          <p:nvPr/>
+        </p:nvSpPr>
+        <p:spPr>
+          <a:xfrm>
+            <a:off x="640080" y="5852160"/>
+            <a:ext cx="10881360" cy="640080"/>
           </a:xfrm>
           <a:prstGeom prst="rect">
             <a:avLst/>
@@ -11624,14 +12004,14 @@
               <a:buNone/>
             </a:pPr>
             <a:r>
-              <a:rPr lang="en-US" sz="1200" i="1" dirty="0">
-                <a:solidFill>
-                  <a:schemeClr val="accent5"/>
-                </a:solidFill>
-              </a:rPr>
-              <a:t>0 = break even · +1 = a ten-fold bankroll · green = significant profit · red = significant loss</a:t>
-            </a:r>
-            <a:endParaRPr lang="en-US" sz="1200" dirty="0"/>
+              <a:rPr lang="en-US" sz="1500" b="1" dirty="0">
+                <a:solidFill>
+                  <a:schemeClr val="tx2"/>
+                </a:solidFill>
+              </a:rPr>
+              <a:t>The optimal step is a property of the panel: with nobody asleep, Hedge and FTRL select steps 30 to 1000 times the textbook one, not smaller.</a:t>
+            </a:r>
+            <a:endParaRPr lang="en-US" sz="1500" dirty="0"/>
           </a:p>
         </p:txBody>
       </p:sp>
@@ -11715,8 +12095,8 @@
         </p:nvSpPr>
         <p:spPr>
           <a:xfrm>
-            <a:off x="914400" y="1737360"/>
-            <a:ext cx="10332720" cy="2194560"/>
+            <a:off x="640080" y="411480"/>
+            <a:ext cx="10881360" cy="777240"/>
           </a:xfrm>
           <a:prstGeom prst="rect">
             <a:avLst/>
@@ -11732,52 +12112,246 @@
               <a:buNone/>
             </a:pPr>
             <a:r>
-              <a:rPr lang="en-US" sz="3400" b="1" dirty="0">
-                <a:solidFill>
-                  <a:schemeClr val="bg1"/>
-                </a:solidFill>
-              </a:rPr>
-              <a:t>41% of the margin over the uniform average is not learning</a:t>
-            </a:r>
-            <a:endParaRPr lang="en-US" sz="3400" dirty="0"/>
-          </a:p>
-        </p:txBody>
-      </p:sp>
-      <p:sp>
-        <p:nvSpPr>
-          <p:cNvPr id="3" name="Text 0"/>
+              <a:rPr lang="en-US" sz="3000" b="1" dirty="0">
+                <a:solidFill>
+                  <a:schemeClr val="tx2"/>
+                </a:solidFill>
+              </a:rPr>
+              <a:t>Better prediction does not mean profit</a:t>
+            </a:r>
+            <a:endParaRPr lang="en-US" sz="3000" dirty="0"/>
+          </a:p>
+        </p:txBody>
+      </p:sp>
+      <p:graphicFrame>
+        <p:nvGraphicFramePr>
+          <p:cNvPr id="3" name="Chart 0" descr=""/>
+          <p:cNvGraphicFramePr/>
+          <p:nvPr/>
+        </p:nvGraphicFramePr>
+        <p:xfrm>
+          <a:off x="640080" y="1554480"/>
+          <a:ext cx="6675120" cy="3749040"/>
+        </p:xfrm>
+        <a:graphic xmlns:a="http://schemas.openxmlformats.org/drawingml/2006/main">
+          <a:graphicData uri="http://schemas.openxmlformats.org/drawingml/2006/chart">
+            <c:chart xmlns:c="http://schemas.openxmlformats.org/drawingml/2006/chart" r:id="rId1"/>
+          </a:graphicData>
+        </a:graphic>
+      </p:graphicFrame>
+      <p:sp>
+        <p:nvSpPr>
+          <p:cNvPr id="4" name="vb-note"/>
           <p:cNvSpPr/>
+          <p:nvPr/>
+        </p:nvSpPr>
+        <p:spPr>
+          <a:xfrm>
+            <a:off x="7589520" y="1554480"/>
+            <a:ext cx="3931920" cy="3749040"/>
+          </a:xfrm>
+          <a:prstGeom prst="roundRect">
+            <a:avLst>
+              <a:gd name="adj" fmla="val 1951"/>
+            </a:avLst>
+          </a:prstGeom>
+          <a:solidFill>
+            <a:srgbClr val="F2F5F9"/>
+          </a:solidFill>
+          <a:ln w="12700">
+            <a:solidFill>
+              <a:srgbClr val="E2E8F0"/>
+            </a:solidFill>
+            <a:prstDash val="solid"/>
+          </a:ln>
+        </p:spPr>
+      </p:sp>
+      <p:sp>
+        <p:nvSpPr>
+          <p:cNvPr id="5" name="Text 2"/>
+          <p:cNvSpPr txBox="1"/>
+          <p:nvPr/>
+        </p:nvSpPr>
+        <p:spPr>
+          <a:xfrm>
+            <a:off x="7909560" y="1783080"/>
+            <a:ext cx="3291840" cy="365760"/>
+          </a:xfrm>
+          <a:prstGeom prst="rect">
+            <a:avLst/>
+          </a:prstGeom>
+          <a:noFill/>
+          <a:ln/>
+        </p:spPr>
+        <p:txBody>
+          <a:bodyPr wrap="square" lIns="0" tIns="0" rIns="0" bIns="0" rtlCol="0" anchor="ctr"/>
+          <a:lstStyle/>
+          <a:p>
+            <a:pPr indent="0" marL="0">
+              <a:buNone/>
+            </a:pPr>
+            <a:r>
+              <a:rPr lang="en-US" sz="1800" b="1" dirty="0">
+                <a:solidFill>
+                  <a:schemeClr val="tx2"/>
+                </a:solidFill>
+              </a:rPr>
+              <a:t>Two profits, two losses</a:t>
+            </a:r>
+            <a:endParaRPr lang="en-US" sz="1800" dirty="0"/>
+          </a:p>
+        </p:txBody>
+      </p:sp>
+      <p:sp>
+        <p:nvSpPr>
+          <p:cNvPr id="6" name="Text 3"/>
+          <p:cNvSpPr txBox="1"/>
+          <p:nvPr/>
+        </p:nvSpPr>
+        <p:spPr>
+          <a:xfrm>
+            <a:off x="7909560" y="2194560"/>
+            <a:ext cx="3291840" cy="1828800"/>
+          </a:xfrm>
+          <a:prstGeom prst="rect">
+            <a:avLst/>
+          </a:prstGeom>
+          <a:noFill/>
+          <a:ln/>
+        </p:spPr>
+        <p:txBody>
+          <a:bodyPr wrap="square" lIns="0" tIns="0" rIns="0" bIns="0" rtlCol="0" anchor="ctr"/>
+          <a:lstStyle/>
+          <a:p>
+            <a:pPr indent="0" marL="0">
+              <a:buNone/>
+            </a:pPr>
+            <a:r>
+              <a:rPr lang="en-US" sz="1350" dirty="0">
+                <a:solidFill>
+                  <a:schemeClr val="tx1"/>
+                </a:solidFill>
+              </a:rPr>
+              <a:t>Significant gains against WHC (p=0.001) and IW (p=0.008), both recreational-facing houses. Significant LOSSES against both Pinnacle prices (PS p=0.050, PSC p&lt;0.001), the best forecaster in the panel, i.e. exactly the opponent an inferior model should lose to.</a:t>
+            </a:r>
+            <a:endParaRPr lang="en-US" sz="1350" dirty="0"/>
+          </a:p>
+        </p:txBody>
+      </p:sp>
+      <p:sp>
+        <p:nvSpPr>
+          <p:cNvPr id="7" name="Text 4"/>
+          <p:cNvSpPr txBox="1"/>
+          <p:nvPr/>
+        </p:nvSpPr>
+        <p:spPr>
+          <a:xfrm>
+            <a:off x="7909560" y="4114800"/>
+            <a:ext cx="3291840" cy="1005840"/>
+          </a:xfrm>
+          <a:prstGeom prst="rect">
+            <a:avLst/>
+          </a:prstGeom>
+          <a:noFill/>
+          <a:ln/>
+        </p:spPr>
+        <p:txBody>
+          <a:bodyPr wrap="square" lIns="0" tIns="0" rIns="0" bIns="0" rtlCol="0" anchor="ctr"/>
+          <a:lstStyle/>
+          <a:p>
+            <a:pPr indent="0" marL="0">
+              <a:buNone/>
+            </a:pPr>
+            <a:r>
+              <a:rPr lang="en-US" sz="1350" i="1" dirty="0">
+                <a:solidFill>
+                  <a:schemeClr val="accent5"/>
+                </a:solidFill>
+              </a:rPr>
+              <a:t>The quality gained is smaller than the margin charged. The test works in both directions.</a:t>
+            </a:r>
+            <a:endParaRPr lang="en-US" sz="1350" dirty="0"/>
+          </a:p>
+        </p:txBody>
+      </p:sp>
+      <p:sp>
+        <p:nvSpPr>
+          <p:cNvPr id="8" name="Text 5"/>
+          <p:cNvSpPr txBox="1"/>
+          <p:nvPr/>
+        </p:nvSpPr>
+        <p:spPr>
+          <a:xfrm>
+            <a:off x="640080" y="5440680"/>
+            <a:ext cx="6675120" cy="320040"/>
+          </a:xfrm>
+          <a:prstGeom prst="rect">
+            <a:avLst/>
+          </a:prstGeom>
+          <a:noFill/>
+          <a:ln/>
+        </p:spPr>
+        <p:txBody>
+          <a:bodyPr wrap="square" rtlCol="0" anchor="ctr"/>
+          <a:lstStyle/>
+          <a:p>
+            <a:pPr indent="0" marL="0">
+              <a:buNone/>
+            </a:pPr>
+            <a:r>
+              <a:rPr lang="en-US" sz="1200" i="1" dirty="0">
+                <a:solidFill>
+                  <a:schemeClr val="accent5"/>
+                </a:solidFill>
+              </a:rPr>
+              <a:t>0 = break even · +1 = a ten-fold bankroll · green = significant profit · red = significant loss</a:t>
+            </a:r>
+            <a:endParaRPr lang="en-US" sz="1200" dirty="0"/>
+          </a:p>
+        </p:txBody>
+      </p:sp>
+      <p:sp>
+        <p:nvSpPr>
+          <p:cNvPr id="25" name="Slide Number Placeholder 0"/>
+          <p:cNvSpPr>
+            <a:spLocks noGrp="1"/>
+          </p:cNvSpPr>
           <p:nvPr>
-            <p:ph idx="101" type="body" hasCustomPrompt="1"/>
+            <p:ph type="sldNum" sz="quarter" idx="4294967295"/>
           </p:nvPr>
         </p:nvSpPr>
         <p:spPr>
           <a:xfrm>
-            <a:off x="914400" y="4114800"/>
-            <a:ext cx="10332720" cy="1645920"/>
-          </a:xfrm>
-          <a:prstGeom prst="rect">
-            <a:avLst/>
-          </a:prstGeom>
-          <a:noFill/>
-          <a:ln/>
-        </p:spPr>
-        <p:txBody>
-          <a:bodyPr wrap="square" rtlCol="0" anchor="t"/>
-          <a:lstStyle/>
-          <a:p>
-            <a:pPr algn="l" indent="0" marL="0">
-              <a:buNone/>
-            </a:pPr>
-            <a:r>
-              <a:rPr lang="en-US" sz="1700" dirty="0">
-                <a:solidFill>
-                  <a:srgbClr val="CBD5E1"/>
-                </a:solidFill>
-              </a:rPr>
-              <a:t>Under the Sleeping Experts reduction the weight vector moves even with a step of ZERO: the projection is re-done onto a simplex of different dimension whenever the awake set changes. A zero-step control separates the two. The number was real; the obvious reading of it was false, and this thesis made that reading before correcting it.</a:t>
-            </a:r>
-            <a:endParaRPr lang="en-US" sz="1700" dirty="0"/>
+            <a:off x="11521440" y="6355080"/>
+            <a:ext cx="800000" cy="300000"/>
+          </a:xfrm>
+          <a:prstGeom prst="rect">
+            <a:avLst/>
+          </a:prstGeom>
+          <a:extLst>
+            <a:ext uri="{C572A759-6A51-4108-AA02-DFA0A04FC94B}">
+              <ma14:wrappingTextBoxFlag xmlns:ma14="http://schemas.microsoft.com/office/mac/drawingml/2011/main" val="0"/>
+            </a:ext>
+          </a:extLst>
+        </p:spPr>
+        <p:txBody>
+          <a:bodyPr/>
+          <a:lstStyle>
+            <a:lvl1pPr>
+              <a:defRPr sz="1100">
+                <a:solidFill>
+                  <a:schemeClr val="accent6"/>
+                </a:solidFill>
+              </a:defRPr>
+            </a:lvl1pPr>
+          </a:lstStyle>
+          <a:p>
+            <a:pPr algn="l"/>
+            <a:fld id="{F7021451-1387-4CA6-816F-3879F97B5CBC}" type="slidenum">
+              <a:rPr b="0" lang="en-US"/>
+              <a:t>25</a:t>
+            </a:fld>
+            <a:endParaRPr lang="en-US"/>
           </a:p>
         </p:txBody>
       </p:sp>
@@ -11816,8 +12390,8 @@
         </p:nvSpPr>
         <p:spPr>
           <a:xfrm>
-            <a:off x="640080" y="411480"/>
-            <a:ext cx="10881360" cy="777240"/>
+            <a:off x="914400" y="1737360"/>
+            <a:ext cx="10332720" cy="2194560"/>
           </a:xfrm>
           <a:prstGeom prst="rect">
             <a:avLst/>
@@ -11833,923 +12407,52 @@
               <a:buNone/>
             </a:pPr>
             <a:r>
-              <a:rPr lang="en-US" sz="3000" b="1" dirty="0">
-                <a:solidFill>
-                  <a:schemeClr val="tx2"/>
-                </a:solidFill>
-              </a:rPr>
-              <a:t>Nine ideas tried and rejected</a:t>
-            </a:r>
-            <a:endParaRPr lang="en-US" sz="3000" dirty="0"/>
-          </a:p>
-        </p:txBody>
-      </p:sp>
-      <p:sp>
-        <p:nvSpPr>
-          <p:cNvPr id="3" name="neg-0"/>
+              <a:rPr lang="en-US" sz="3400" b="1" dirty="0">
+                <a:solidFill>
+                  <a:schemeClr val="bg1"/>
+                </a:solidFill>
+              </a:rPr>
+              <a:t>42% of the margin over the uniform average is not learning</a:t>
+            </a:r>
+            <a:endParaRPr lang="en-US" sz="3400" dirty="0"/>
+          </a:p>
+        </p:txBody>
+      </p:sp>
+      <p:sp>
+        <p:nvSpPr>
+          <p:cNvPr id="3" name="Text 0"/>
           <p:cNvSpPr/>
-          <p:nvPr/>
-        </p:nvSpPr>
-        <p:spPr>
-          <a:xfrm>
-            <a:off x="640080" y="1673352"/>
-            <a:ext cx="237744" cy="237744"/>
-          </a:xfrm>
-          <a:prstGeom prst="ellipse">
-            <a:avLst/>
-          </a:prstGeom>
-          <a:solidFill>
-            <a:schemeClr val="accent4"/>
-          </a:solidFill>
-          <a:ln/>
-        </p:spPr>
-      </p:sp>
-      <p:sp>
-        <p:nvSpPr>
-          <p:cNvPr id="4" name="Text 2"/>
-          <p:cNvSpPr txBox="1"/>
-          <p:nvPr/>
-        </p:nvSpPr>
-        <p:spPr>
-          <a:xfrm>
-            <a:off x="1024128" y="1600200"/>
-            <a:ext cx="3017520" cy="566928"/>
-          </a:xfrm>
-          <a:prstGeom prst="rect">
-            <a:avLst/>
-          </a:prstGeom>
-          <a:noFill/>
-          <a:ln/>
-        </p:spPr>
-        <p:txBody>
-          <a:bodyPr wrap="square" lIns="0" tIns="0" rIns="0" bIns="0" rtlCol="0" anchor="ctr"/>
-          <a:lstStyle/>
-          <a:p>
-            <a:pPr indent="0" marL="0">
-              <a:buNone/>
-            </a:pPr>
-            <a:r>
-              <a:rPr lang="en-US" sz="1500" b="1" dirty="0">
-                <a:solidFill>
-                  <a:schemeClr val="tx2"/>
-                </a:solidFill>
-              </a:rPr>
-              <a:t>Fixed-Share</a:t>
-            </a:r>
-            <a:endParaRPr lang="en-US" sz="1500" dirty="0"/>
-          </a:p>
-        </p:txBody>
-      </p:sp>
-      <p:sp>
-        <p:nvSpPr>
-          <p:cNvPr id="5" name="Text 3"/>
-          <p:cNvSpPr txBox="1"/>
-          <p:nvPr/>
-        </p:nvSpPr>
-        <p:spPr>
-          <a:xfrm>
-            <a:off x="1024128" y="2203704"/>
-            <a:ext cx="3017520" cy="777240"/>
-          </a:xfrm>
-          <a:prstGeom prst="rect">
-            <a:avLst/>
-          </a:prstGeom>
-          <a:noFill/>
-          <a:ln/>
-        </p:spPr>
-        <p:txBody>
-          <a:bodyPr wrap="square" lIns="0" tIns="0" rIns="0" bIns="0" rtlCol="0" anchor="ctr"/>
-          <a:lstStyle/>
-          <a:p>
-            <a:pPr indent="0" marL="0">
-              <a:buNone/>
-            </a:pPr>
-            <a:r>
-              <a:rPr lang="en-US" sz="1250" dirty="0">
-                <a:solidFill>
-                  <a:schemeClr val="accent5"/>
-                </a:solidFill>
-              </a:rPr>
-              <a:t>every α &gt; 0 loses; the step already does the forgetting</a:t>
-            </a:r>
-            <a:endParaRPr lang="en-US" sz="1250" dirty="0"/>
-          </a:p>
-        </p:txBody>
-      </p:sp>
-      <p:sp>
-        <p:nvSpPr>
-          <p:cNvPr id="6" name="neg-1"/>
-          <p:cNvSpPr/>
-          <p:nvPr/>
-        </p:nvSpPr>
-        <p:spPr>
-          <a:xfrm>
-            <a:off x="4297680" y="1673352"/>
-            <a:ext cx="237744" cy="237744"/>
-          </a:xfrm>
-          <a:prstGeom prst="ellipse">
-            <a:avLst/>
-          </a:prstGeom>
-          <a:solidFill>
-            <a:schemeClr val="accent4"/>
-          </a:solidFill>
-          <a:ln/>
-        </p:spPr>
-      </p:sp>
-      <p:sp>
-        <p:nvSpPr>
-          <p:cNvPr id="7" name="Text 5"/>
-          <p:cNvSpPr txBox="1"/>
-          <p:nvPr/>
-        </p:nvSpPr>
-        <p:spPr>
-          <a:xfrm>
-            <a:off x="4681728" y="1600200"/>
-            <a:ext cx="3017520" cy="566928"/>
-          </a:xfrm>
-          <a:prstGeom prst="rect">
-            <a:avLst/>
-          </a:prstGeom>
-          <a:noFill/>
-          <a:ln/>
-        </p:spPr>
-        <p:txBody>
-          <a:bodyPr wrap="square" lIns="0" tIns="0" rIns="0" bIns="0" rtlCol="0" anchor="ctr"/>
-          <a:lstStyle/>
-          <a:p>
-            <a:pPr indent="0" marL="0">
-              <a:buNone/>
-            </a:pPr>
-            <a:r>
-              <a:rPr lang="en-US" sz="1500" b="1" dirty="0">
-                <a:solidFill>
-                  <a:schemeClr val="tx2"/>
-                </a:solidFill>
-              </a:rPr>
-              <a:t>Per-expert step clock</a:t>
-            </a:r>
-            <a:endParaRPr lang="en-US" sz="1500" dirty="0"/>
-          </a:p>
-        </p:txBody>
-      </p:sp>
-      <p:sp>
-        <p:nvSpPr>
-          <p:cNvPr id="8" name="Text 6"/>
-          <p:cNvSpPr txBox="1"/>
-          <p:nvPr/>
-        </p:nvSpPr>
-        <p:spPr>
-          <a:xfrm>
-            <a:off x="4681728" y="2203704"/>
-            <a:ext cx="3017520" cy="777240"/>
-          </a:xfrm>
-          <a:prstGeom prst="rect">
-            <a:avLst/>
-          </a:prstGeom>
-          <a:noFill/>
-          <a:ln/>
-        </p:spPr>
-        <p:txBody>
-          <a:bodyPr wrap="square" lIns="0" tIns="0" rIns="0" bIns="0" rtlCol="0" anchor="ctr"/>
-          <a:lstStyle/>
-          <a:p>
-            <a:pPr indent="0" marL="0">
-              <a:buNone/>
-            </a:pPr>
-            <a:r>
-              <a:rPr lang="en-US" sz="1250" dirty="0">
-                <a:solidFill>
-                  <a:schemeClr val="accent5"/>
-                </a:solidFill>
-              </a:rPr>
-              <a:t>better on train, −0.00073 on the tail: textbook overfitting</a:t>
-            </a:r>
-            <a:endParaRPr lang="en-US" sz="1250" dirty="0"/>
-          </a:p>
-        </p:txBody>
-      </p:sp>
-      <p:sp>
-        <p:nvSpPr>
-          <p:cNvPr id="9" name="neg-2"/>
-          <p:cNvSpPr/>
-          <p:nvPr/>
-        </p:nvSpPr>
-        <p:spPr>
-          <a:xfrm>
-            <a:off x="7955280" y="1673352"/>
-            <a:ext cx="237744" cy="237744"/>
-          </a:xfrm>
-          <a:prstGeom prst="ellipse">
-            <a:avLst/>
-          </a:prstGeom>
-          <a:solidFill>
-            <a:schemeClr val="accent4"/>
-          </a:solidFill>
-          <a:ln/>
-        </p:spPr>
-      </p:sp>
-      <p:sp>
-        <p:nvSpPr>
-          <p:cNvPr id="10" name="Text 8"/>
-          <p:cNvSpPr txBox="1"/>
-          <p:nvPr/>
-        </p:nvSpPr>
-        <p:spPr>
-          <a:xfrm>
-            <a:off x="8339328" y="1600200"/>
-            <a:ext cx="3017520" cy="566928"/>
-          </a:xfrm>
-          <a:prstGeom prst="rect">
-            <a:avLst/>
-          </a:prstGeom>
-          <a:noFill/>
-          <a:ln/>
-        </p:spPr>
-        <p:txBody>
-          <a:bodyPr wrap="square" lIns="0" tIns="0" rIns="0" bIns="0" rtlCol="0" anchor="ctr"/>
-          <a:lstStyle/>
-          <a:p>
-            <a:pPr indent="0" marL="0">
-              <a:buNone/>
-            </a:pPr>
-            <a:r>
-              <a:rPr lang="en-US" sz="1500" b="1" dirty="0">
-                <a:solidFill>
-                  <a:schemeClr val="tx2"/>
-                </a:solidFill>
-              </a:rPr>
-              <a:t>Markov kernels on the weights</a:t>
-            </a:r>
-            <a:endParaRPr lang="en-US" sz="1500" dirty="0"/>
-          </a:p>
-        </p:txBody>
-      </p:sp>
-      <p:sp>
-        <p:nvSpPr>
-          <p:cNvPr id="11" name="Text 9"/>
-          <p:cNvSpPr txBox="1"/>
-          <p:nvPr/>
-        </p:nvSpPr>
-        <p:spPr>
-          <a:xfrm>
-            <a:off x="8339328" y="2203704"/>
-            <a:ext cx="3017520" cy="777240"/>
-          </a:xfrm>
-          <a:prstGeom prst="rect">
-            <a:avLst/>
-          </a:prstGeom>
-          <a:noFill/>
-          <a:ln/>
-        </p:spPr>
-        <p:txBody>
-          <a:bodyPr wrap="square" lIns="0" tIns="0" rIns="0" bIns="0" rtlCol="0" anchor="ctr"/>
-          <a:lstStyle/>
-          <a:p>
-            <a:pPr indent="0" marL="0">
-              <a:buNone/>
-            </a:pPr>
-            <a:r>
-              <a:rPr lang="en-US" sz="1250" dirty="0">
-                <a:solidFill>
-                  <a:schemeClr val="accent5"/>
-                </a:solidFill>
-              </a:rPr>
-              <a:t>every kernel selects α = 0 and ties exactly</a:t>
-            </a:r>
-            <a:endParaRPr lang="en-US" sz="1250" dirty="0"/>
-          </a:p>
-        </p:txBody>
-      </p:sp>
-      <p:sp>
-        <p:nvSpPr>
-          <p:cNvPr id="12" name="neg-3"/>
-          <p:cNvSpPr/>
-          <p:nvPr/>
-        </p:nvSpPr>
-        <p:spPr>
-          <a:xfrm>
-            <a:off x="640080" y="3136392"/>
-            <a:ext cx="237744" cy="237744"/>
-          </a:xfrm>
-          <a:prstGeom prst="ellipse">
-            <a:avLst/>
-          </a:prstGeom>
-          <a:solidFill>
-            <a:schemeClr val="accent4"/>
-          </a:solidFill>
-          <a:ln/>
-        </p:spPr>
-      </p:sp>
-      <p:sp>
-        <p:nvSpPr>
-          <p:cNvPr id="13" name="Text 11"/>
-          <p:cNvSpPr txBox="1"/>
-          <p:nvPr/>
-        </p:nvSpPr>
-        <p:spPr>
-          <a:xfrm>
-            <a:off x="1024128" y="3063240"/>
-            <a:ext cx="3017520" cy="566928"/>
-          </a:xfrm>
-          <a:prstGeom prst="rect">
-            <a:avLst/>
-          </a:prstGeom>
-          <a:noFill/>
-          <a:ln/>
-        </p:spPr>
-        <p:txBody>
-          <a:bodyPr wrap="square" lIns="0" tIns="0" rIns="0" bIns="0" rtlCol="0" anchor="ctr"/>
-          <a:lstStyle/>
-          <a:p>
-            <a:pPr indent="0" marL="0">
-              <a:buNone/>
-            </a:pPr>
-            <a:r>
-              <a:rPr lang="en-US" sz="1500" b="1" dirty="0">
-                <a:solidFill>
-                  <a:schemeClr val="tx2"/>
-                </a:solidFill>
-              </a:rPr>
-              <a:t>Latent market regimes</a:t>
-            </a:r>
-            <a:endParaRPr lang="en-US" sz="1500" dirty="0"/>
-          </a:p>
-        </p:txBody>
-      </p:sp>
-      <p:sp>
-        <p:nvSpPr>
-          <p:cNvPr id="14" name="Text 12"/>
-          <p:cNvSpPr txBox="1"/>
-          <p:nvPr/>
-        </p:nvSpPr>
-        <p:spPr>
-          <a:xfrm>
-            <a:off x="1024128" y="3666744"/>
-            <a:ext cx="3017520" cy="777240"/>
-          </a:xfrm>
-          <a:prstGeom prst="rect">
-            <a:avLst/>
-          </a:prstGeom>
-          <a:noFill/>
-          <a:ln/>
-        </p:spPr>
-        <p:txBody>
-          <a:bodyPr wrap="square" lIns="0" tIns="0" rIns="0" bIns="0" rtlCol="0" anchor="ctr"/>
-          <a:lstStyle/>
-          <a:p>
-            <a:pPr indent="0" marL="0">
-              <a:buNone/>
-            </a:pPr>
-            <a:r>
-              <a:rPr lang="en-US" sz="1250" dirty="0">
-                <a:solidFill>
-                  <a:schemeClr val="accent5"/>
-                </a:solidFill>
-              </a:rPr>
-              <a:t>τ = 0 selected, belief sd 0.0000: the chain provably does nothing</a:t>
-            </a:r>
-            <a:endParaRPr lang="en-US" sz="1250" dirty="0"/>
-          </a:p>
-        </p:txBody>
-      </p:sp>
-      <p:sp>
-        <p:nvSpPr>
-          <p:cNvPr id="15" name="neg-4"/>
-          <p:cNvSpPr/>
-          <p:nvPr/>
-        </p:nvSpPr>
-        <p:spPr>
-          <a:xfrm>
-            <a:off x="4297680" y="3136392"/>
-            <a:ext cx="237744" cy="237744"/>
-          </a:xfrm>
-          <a:prstGeom prst="ellipse">
-            <a:avLst/>
-          </a:prstGeom>
-          <a:solidFill>
-            <a:schemeClr val="accent4"/>
-          </a:solidFill>
-          <a:ln/>
-        </p:spPr>
-      </p:sp>
-      <p:sp>
-        <p:nvSpPr>
-          <p:cNvPr id="16" name="Text 14"/>
-          <p:cNvSpPr txBox="1"/>
-          <p:nvPr/>
-        </p:nvSpPr>
-        <p:spPr>
-          <a:xfrm>
-            <a:off x="4681728" y="3063240"/>
-            <a:ext cx="3017520" cy="566928"/>
-          </a:xfrm>
-          <a:prstGeom prst="rect">
-            <a:avLst/>
-          </a:prstGeom>
-          <a:noFill/>
-          <a:ln/>
-        </p:spPr>
-        <p:txBody>
-          <a:bodyPr wrap="square" lIns="0" tIns="0" rIns="0" bIns="0" rtlCol="0" anchor="ctr"/>
-          <a:lstStyle/>
-          <a:p>
-            <a:pPr indent="0" marL="0">
-              <a:buNone/>
-            </a:pPr>
-            <a:r>
-              <a:rPr lang="en-US" sz="1500" b="1" dirty="0">
-                <a:solidFill>
-                  <a:schemeClr val="tx2"/>
-                </a:solidFill>
-              </a:rPr>
-              <a:t>Bandit, one-point estimator</a:t>
-            </a:r>
-            <a:endParaRPr lang="en-US" sz="1500" dirty="0"/>
-          </a:p>
-        </p:txBody>
-      </p:sp>
-      <p:sp>
-        <p:nvSpPr>
-          <p:cNvPr id="17" name="Text 15"/>
-          <p:cNvSpPr txBox="1"/>
-          <p:nvPr/>
-        </p:nvSpPr>
-        <p:spPr>
-          <a:xfrm>
-            <a:off x="4681728" y="3666744"/>
-            <a:ext cx="3017520" cy="777240"/>
-          </a:xfrm>
-          <a:prstGeom prst="rect">
-            <a:avLst/>
-          </a:prstGeom>
-          <a:noFill/>
-          <a:ln/>
-        </p:spPr>
-        <p:txBody>
-          <a:bodyPr wrap="square" lIns="0" tIns="0" rIns="0" bIns="0" rtlCol="0" anchor="ctr"/>
-          <a:lstStyle/>
-          <a:p>
-            <a:pPr indent="0" marL="0">
-              <a:buNone/>
-            </a:pPr>
-            <a:r>
-              <a:rPr lang="en-US" sz="1250" dirty="0">
-                <a:solidFill>
-                  <a:schemeClr val="accent5"/>
-                </a:solidFill>
-              </a:rPr>
-              <a:t>alignment with the true gradient is +0.002; the horizon is too short</a:t>
-            </a:r>
-            <a:endParaRPr lang="en-US" sz="1250" dirty="0"/>
-          </a:p>
-        </p:txBody>
-      </p:sp>
-      <p:sp>
-        <p:nvSpPr>
-          <p:cNvPr id="18" name="neg-5"/>
-          <p:cNvSpPr/>
-          <p:nvPr/>
-        </p:nvSpPr>
-        <p:spPr>
-          <a:xfrm>
-            <a:off x="7955280" y="3136392"/>
-            <a:ext cx="237744" cy="237744"/>
-          </a:xfrm>
-          <a:prstGeom prst="ellipse">
-            <a:avLst/>
-          </a:prstGeom>
-          <a:solidFill>
-            <a:schemeClr val="accent4"/>
-          </a:solidFill>
-          <a:ln/>
-        </p:spPr>
-      </p:sp>
-      <p:sp>
-        <p:nvSpPr>
-          <p:cNvPr id="19" name="Text 17"/>
-          <p:cNvSpPr txBox="1"/>
-          <p:nvPr/>
-        </p:nvSpPr>
-        <p:spPr>
-          <a:xfrm>
-            <a:off x="8339328" y="3063240"/>
-            <a:ext cx="3017520" cy="566928"/>
-          </a:xfrm>
-          <a:prstGeom prst="rect">
-            <a:avLst/>
-          </a:prstGeom>
-          <a:noFill/>
-          <a:ln/>
-        </p:spPr>
-        <p:txBody>
-          <a:bodyPr wrap="square" lIns="0" tIns="0" rIns="0" bIns="0" rtlCol="0" anchor="ctr"/>
-          <a:lstStyle/>
-          <a:p>
-            <a:pPr indent="0" marL="0">
-              <a:buNone/>
-            </a:pPr>
-            <a:r>
-              <a:rPr lang="en-US" sz="1500" b="1" dirty="0">
-                <a:solidFill>
-                  <a:schemeClr val="tx2"/>
-                </a:solidFill>
-              </a:rPr>
-              <a:t>Bayesian / MCMC Kelly</a:t>
-            </a:r>
-            <a:endParaRPr lang="en-US" sz="1500" dirty="0"/>
-          </a:p>
-        </p:txBody>
-      </p:sp>
-      <p:sp>
-        <p:nvSpPr>
-          <p:cNvPr id="20" name="Text 18"/>
-          <p:cNvSpPr txBox="1"/>
-          <p:nvPr/>
-        </p:nvSpPr>
-        <p:spPr>
-          <a:xfrm>
-            <a:off x="8339328" y="3666744"/>
-            <a:ext cx="3017520" cy="777240"/>
-          </a:xfrm>
-          <a:prstGeom prst="rect">
-            <a:avLst/>
-          </a:prstGeom>
-          <a:noFill/>
-          <a:ln/>
-        </p:spPr>
-        <p:txBody>
-          <a:bodyPr wrap="square" lIns="0" tIns="0" rIns="0" bIns="0" rtlCol="0" anchor="ctr"/>
-          <a:lstStyle/>
-          <a:p>
-            <a:pPr indent="0" marL="0">
-              <a:buNone/>
-            </a:pPr>
-            <a:r>
-              <a:rPr lang="en-US" sz="1250" dirty="0">
-                <a:solidFill>
-                  <a:schemeClr val="accent5"/>
-                </a:solidFill>
-              </a:rPr>
-              <a:t>6 ties, 2 significant losses, zero wins</a:t>
-            </a:r>
-            <a:endParaRPr lang="en-US" sz="1250" dirty="0"/>
-          </a:p>
-        </p:txBody>
-      </p:sp>
-      <p:sp>
-        <p:nvSpPr>
-          <p:cNvPr id="21" name="neg-6"/>
-          <p:cNvSpPr/>
-          <p:nvPr/>
-        </p:nvSpPr>
-        <p:spPr>
-          <a:xfrm>
-            <a:off x="640080" y="4599432"/>
-            <a:ext cx="237744" cy="237744"/>
-          </a:xfrm>
-          <a:prstGeom prst="ellipse">
-            <a:avLst/>
-          </a:prstGeom>
-          <a:solidFill>
-            <a:schemeClr val="accent4"/>
-          </a:solidFill>
-          <a:ln/>
-        </p:spPr>
-      </p:sp>
-      <p:sp>
-        <p:nvSpPr>
-          <p:cNvPr id="22" name="Text 20"/>
-          <p:cNvSpPr txBox="1"/>
-          <p:nvPr/>
-        </p:nvSpPr>
-        <p:spPr>
-          <a:xfrm>
-            <a:off x="1024128" y="4526280"/>
-            <a:ext cx="3017520" cy="566928"/>
-          </a:xfrm>
-          <a:prstGeom prst="rect">
-            <a:avLst/>
-          </a:prstGeom>
-          <a:noFill/>
-          <a:ln/>
-        </p:spPr>
-        <p:txBody>
-          <a:bodyPr wrap="square" lIns="0" tIns="0" rIns="0" bIns="0" rtlCol="0" anchor="ctr"/>
-          <a:lstStyle/>
-          <a:p>
-            <a:pPr indent="0" marL="0">
-              <a:buNone/>
-            </a:pPr>
-            <a:r>
-              <a:rPr lang="en-US" sz="1500" b="1" dirty="0">
-                <a:solidFill>
-                  <a:schemeClr val="tx2"/>
-                </a:solidFill>
-              </a:rPr>
-              <a:t>Per-league specialisation</a:t>
-            </a:r>
-            <a:endParaRPr lang="en-US" sz="1500" dirty="0"/>
-          </a:p>
-        </p:txBody>
-      </p:sp>
-      <p:sp>
-        <p:nvSpPr>
-          <p:cNvPr id="23" name="Text 21"/>
-          <p:cNvSpPr txBox="1"/>
-          <p:nvPr/>
-        </p:nvSpPr>
-        <p:spPr>
-          <a:xfrm>
-            <a:off x="1024128" y="5129784"/>
-            <a:ext cx="3017520" cy="777240"/>
-          </a:xfrm>
-          <a:prstGeom prst="rect">
-            <a:avLst/>
-          </a:prstGeom>
-          <a:noFill/>
-          <a:ln/>
-        </p:spPr>
-        <p:txBody>
-          <a:bodyPr wrap="square" lIns="0" tIns="0" rIns="0" bIns="0" rtlCol="0" anchor="ctr"/>
-          <a:lstStyle/>
-          <a:p>
-            <a:pPr indent="0" marL="0">
-              <a:buNone/>
-            </a:pPr>
-            <a:r>
-              <a:rPr lang="en-US" sz="1250" dirty="0">
-                <a:solidFill>
-                  <a:schemeClr val="accent5"/>
-                </a:solidFill>
-              </a:rPr>
-              <a:t>loses in all six leagues tested</a:t>
-            </a:r>
-            <a:endParaRPr lang="en-US" sz="1250" dirty="0"/>
-          </a:p>
-        </p:txBody>
-      </p:sp>
-      <p:sp>
-        <p:nvSpPr>
-          <p:cNvPr id="24" name="neg-7"/>
-          <p:cNvSpPr/>
-          <p:nvPr/>
-        </p:nvSpPr>
-        <p:spPr>
-          <a:xfrm>
-            <a:off x="4297680" y="4599432"/>
-            <a:ext cx="237744" cy="237744"/>
-          </a:xfrm>
-          <a:prstGeom prst="ellipse">
-            <a:avLst/>
-          </a:prstGeom>
-          <a:solidFill>
-            <a:schemeClr val="accent4"/>
-          </a:solidFill>
-          <a:ln/>
-        </p:spPr>
-      </p:sp>
-      <p:sp>
-        <p:nvSpPr>
-          <p:cNvPr id="25" name="Text 23"/>
-          <p:cNvSpPr txBox="1"/>
-          <p:nvPr/>
-        </p:nvSpPr>
-        <p:spPr>
-          <a:xfrm>
-            <a:off x="4681728" y="4526280"/>
-            <a:ext cx="3017520" cy="566928"/>
-          </a:xfrm>
-          <a:prstGeom prst="rect">
-            <a:avLst/>
-          </a:prstGeom>
-          <a:noFill/>
-          <a:ln/>
-        </p:spPr>
-        <p:txBody>
-          <a:bodyPr wrap="square" lIns="0" tIns="0" rIns="0" bIns="0" rtlCol="0" anchor="ctr"/>
-          <a:lstStyle/>
-          <a:p>
-            <a:pPr indent="0" marL="0">
-              <a:buNone/>
-            </a:pPr>
-            <a:r>
-              <a:rPr lang="en-US" sz="1500" b="1" dirty="0">
-                <a:solidFill>
-                  <a:schemeClr val="tx2"/>
-                </a:solidFill>
-              </a:rPr>
-              <a:t>AdaGrad</a:t>
-            </a:r>
-            <a:endParaRPr lang="en-US" sz="1500" dirty="0"/>
-          </a:p>
-        </p:txBody>
-      </p:sp>
-      <p:sp>
-        <p:nvSpPr>
-          <p:cNvPr id="26" name="Text 24"/>
-          <p:cNvSpPr txBox="1"/>
-          <p:nvPr/>
-        </p:nvSpPr>
-        <p:spPr>
-          <a:xfrm>
-            <a:off x="4681728" y="5129784"/>
-            <a:ext cx="3017520" cy="777240"/>
-          </a:xfrm>
-          <a:prstGeom prst="rect">
-            <a:avLst/>
-          </a:prstGeom>
-          <a:noFill/>
-          <a:ln/>
-        </p:spPr>
-        <p:txBody>
-          <a:bodyPr wrap="square" lIns="0" tIns="0" rIns="0" bIns="0" rtlCol="0" anchor="ctr"/>
-          <a:lstStyle/>
-          <a:p>
-            <a:pPr indent="0" marL="0">
-              <a:buNone/>
-            </a:pPr>
-            <a:r>
-              <a:rPr lang="en-US" sz="1250" dirty="0">
-                <a:solidFill>
-                  <a:schemeClr val="accent5"/>
-                </a:solidFill>
-              </a:rPr>
-              <a:t>recovers 20% of the hand-tuned gain at best</a:t>
-            </a:r>
-            <a:endParaRPr lang="en-US" sz="1250" dirty="0"/>
-          </a:p>
-        </p:txBody>
-      </p:sp>
-      <p:sp>
-        <p:nvSpPr>
-          <p:cNvPr id="27" name="neg-8"/>
-          <p:cNvSpPr/>
-          <p:nvPr/>
-        </p:nvSpPr>
-        <p:spPr>
-          <a:xfrm>
-            <a:off x="7955280" y="4599432"/>
-            <a:ext cx="237744" cy="237744"/>
-          </a:xfrm>
-          <a:prstGeom prst="ellipse">
-            <a:avLst/>
-          </a:prstGeom>
-          <a:solidFill>
-            <a:schemeClr val="accent4"/>
-          </a:solidFill>
-          <a:ln/>
-        </p:spPr>
-      </p:sp>
-      <p:sp>
-        <p:nvSpPr>
-          <p:cNvPr id="28" name="Text 26"/>
-          <p:cNvSpPr txBox="1"/>
-          <p:nvPr/>
-        </p:nvSpPr>
-        <p:spPr>
-          <a:xfrm>
-            <a:off x="8339328" y="4526280"/>
-            <a:ext cx="3017520" cy="566928"/>
-          </a:xfrm>
-          <a:prstGeom prst="rect">
-            <a:avLst/>
-          </a:prstGeom>
-          <a:noFill/>
-          <a:ln/>
-        </p:spPr>
-        <p:txBody>
-          <a:bodyPr wrap="square" lIns="0" tIns="0" rIns="0" bIns="0" rtlCol="0" anchor="ctr"/>
-          <a:lstStyle/>
-          <a:p>
-            <a:pPr indent="0" marL="0">
-              <a:buNone/>
-            </a:pPr>
-            <a:r>
-              <a:rPr lang="en-US" sz="1500" b="1" dirty="0">
-                <a:solidFill>
-                  <a:schemeClr val="tx2"/>
-                </a:solidFill>
-              </a:rPr>
-              <a:t>Joint step + calibration sweep</a:t>
-            </a:r>
-            <a:endParaRPr lang="en-US" sz="1500" dirty="0"/>
-          </a:p>
-        </p:txBody>
-      </p:sp>
-      <p:sp>
-        <p:nvSpPr>
-          <p:cNvPr id="29" name="Text 27"/>
-          <p:cNvSpPr txBox="1"/>
-          <p:nvPr/>
-        </p:nvSpPr>
-        <p:spPr>
-          <a:xfrm>
-            <a:off x="8339328" y="5129784"/>
-            <a:ext cx="3017520" cy="777240"/>
-          </a:xfrm>
-          <a:prstGeom prst="rect">
-            <a:avLst/>
-          </a:prstGeom>
-          <a:noFill/>
-          <a:ln/>
-        </p:spPr>
-        <p:txBody>
-          <a:bodyPr wrap="square" lIns="0" tIns="0" rIns="0" bIns="0" rtlCol="0" anchor="ctr"/>
-          <a:lstStyle/>
-          <a:p>
-            <a:pPr indent="0" marL="0">
-              <a:buNone/>
-            </a:pPr>
-            <a:r>
-              <a:rPr lang="en-US" sz="1250" dirty="0">
-                <a:solidFill>
-                  <a:schemeClr val="accent5"/>
-                </a:solidFill>
-              </a:rPr>
-              <a:t>no interaction at all, and train selection then picks a worse step</a:t>
-            </a:r>
-            <a:endParaRPr lang="en-US" sz="1250" dirty="0"/>
-          </a:p>
-        </p:txBody>
-      </p:sp>
-      <p:sp>
-        <p:nvSpPr>
-          <p:cNvPr id="30" name="Text 28"/>
-          <p:cNvSpPr txBox="1"/>
-          <p:nvPr/>
-        </p:nvSpPr>
-        <p:spPr>
-          <a:xfrm>
-            <a:off x="640080" y="5943600"/>
-            <a:ext cx="10881360" cy="640080"/>
-          </a:xfrm>
-          <a:prstGeom prst="rect">
-            <a:avLst/>
-          </a:prstGeom>
-          <a:noFill/>
-          <a:ln/>
-        </p:spPr>
-        <p:txBody>
-          <a:bodyPr wrap="square" rtlCol="0" anchor="ctr"/>
-          <a:lstStyle/>
-          <a:p>
-            <a:pPr indent="0" marL="0">
-              <a:buNone/>
-            </a:pPr>
-            <a:r>
-              <a:rPr lang="en-US" sz="1500" dirty="0">
-                <a:solidFill>
-                  <a:schemeClr val="tx1"/>
-                </a:solidFill>
-              </a:rPr>
-              <a:t>A pattern across them: once the step size is tuned, no further movement of mass over the experts buys anything. The step and the leak control the same quantity.</a:t>
-            </a:r>
-            <a:endParaRPr lang="en-US" sz="1500" dirty="0"/>
-          </a:p>
-        </p:txBody>
-      </p:sp>
-      <p:sp>
-        <p:nvSpPr>
-          <p:cNvPr id="25" name="Slide Number Placeholder 0"/>
-          <p:cNvSpPr>
-            <a:spLocks noGrp="1"/>
-          </p:cNvSpPr>
           <p:nvPr>
-            <p:ph type="sldNum" sz="quarter" idx="4294967295"/>
+            <p:ph idx="101" type="body" hasCustomPrompt="1"/>
           </p:nvPr>
         </p:nvSpPr>
         <p:spPr>
           <a:xfrm>
-            <a:off x="11521440" y="6355080"/>
-            <a:ext cx="800000" cy="300000"/>
-          </a:xfrm>
-          <a:prstGeom prst="rect">
-            <a:avLst/>
-          </a:prstGeom>
-          <a:extLst>
-            <a:ext uri="{C572A759-6A51-4108-AA02-DFA0A04FC94B}">
-              <ma14:wrappingTextBoxFlag xmlns:ma14="http://schemas.microsoft.com/office/mac/drawingml/2011/main" val="0"/>
-            </a:ext>
-          </a:extLst>
-        </p:spPr>
-        <p:txBody>
-          <a:bodyPr/>
-          <a:lstStyle>
-            <a:lvl1pPr>
-              <a:defRPr sz="1100">
-                <a:solidFill>
-                  <a:schemeClr val="accent6"/>
-                </a:solidFill>
-              </a:defRPr>
-            </a:lvl1pPr>
-          </a:lstStyle>
-          <a:p>
-            <a:pPr algn="l"/>
-            <a:fld id="{F7021451-1387-4CA6-816F-3879F97B5CBC}" type="slidenum">
-              <a:rPr b="0" lang="en-US"/>
-              <a:t>26</a:t>
-            </a:fld>
-            <a:endParaRPr lang="en-US"/>
+            <a:off x="914400" y="4114800"/>
+            <a:ext cx="10332720" cy="1645920"/>
+          </a:xfrm>
+          <a:prstGeom prst="rect">
+            <a:avLst/>
+          </a:prstGeom>
+          <a:noFill/>
+          <a:ln/>
+        </p:spPr>
+        <p:txBody>
+          <a:bodyPr wrap="square" rtlCol="0" anchor="t"/>
+          <a:lstStyle/>
+          <a:p>
+            <a:pPr algn="l" indent="0" marL="0">
+              <a:buNone/>
+            </a:pPr>
+            <a:r>
+              <a:rPr lang="en-US" sz="1700" dirty="0">
+                <a:solidFill>
+                  <a:srgbClr val="CBD5E1"/>
+                </a:solidFill>
+              </a:rPr>
+              <a:t>Under the Sleeping Experts reduction the weight vector moves even with a step of ZERO: the projection is re-done onto a simplex of different dimension whenever the awake set changes. A zero-step control separates the two. The number was real; the obvious reading of it was false, and this thesis made that reading before correcting it.</a:t>
+            </a:r>
+            <a:endParaRPr lang="en-US" sz="1700" dirty="0"/>
           </a:p>
         </p:txBody>
       </p:sp>
@@ -12783,13 +12486,13 @@
           <p:cNvPr id="2" name="Text 0"/>
           <p:cNvSpPr/>
           <p:nvPr>
-            <p:ph idx="100" type="body" hasCustomPrompt="1"/>
+            <p:ph idx="100" type="title" hasCustomPrompt="1"/>
           </p:nvPr>
         </p:nvSpPr>
         <p:spPr>
           <a:xfrm>
-            <a:off x="914400" y="2286000"/>
-            <a:ext cx="1828800" cy="1097280"/>
+            <a:off x="640080" y="411480"/>
+            <a:ext cx="10881360" cy="777240"/>
           </a:xfrm>
           <a:prstGeom prst="rect">
             <a:avLst/>
@@ -12805,90 +12508,923 @@
               <a:buNone/>
             </a:pPr>
             <a:r>
-              <a:rPr lang="en-US" sz="6800" b="1" dirty="0">
-                <a:solidFill>
-                  <a:srgbClr val="6FA3D6"/>
-                </a:solidFill>
-              </a:rPr>
-              <a:t>05</a:t>
-            </a:r>
-            <a:endParaRPr lang="en-US" sz="6800" dirty="0"/>
-          </a:p>
-        </p:txBody>
-      </p:sp>
-      <p:sp>
-        <p:nvSpPr>
-          <p:cNvPr id="3" name="Text 0"/>
+              <a:rPr lang="en-US" sz="3000" b="1" dirty="0">
+                <a:solidFill>
+                  <a:schemeClr val="tx2"/>
+                </a:solidFill>
+              </a:rPr>
+              <a:t>Nine ideas tried and rejected</a:t>
+            </a:r>
+            <a:endParaRPr lang="en-US" sz="3000" dirty="0"/>
+          </a:p>
+        </p:txBody>
+      </p:sp>
+      <p:sp>
+        <p:nvSpPr>
+          <p:cNvPr id="3" name="neg-0"/>
           <p:cNvSpPr/>
+          <p:nvPr/>
+        </p:nvSpPr>
+        <p:spPr>
+          <a:xfrm>
+            <a:off x="640080" y="1673352"/>
+            <a:ext cx="237744" cy="237744"/>
+          </a:xfrm>
+          <a:prstGeom prst="ellipse">
+            <a:avLst/>
+          </a:prstGeom>
+          <a:solidFill>
+            <a:schemeClr val="accent4"/>
+          </a:solidFill>
+          <a:ln/>
+        </p:spPr>
+      </p:sp>
+      <p:sp>
+        <p:nvSpPr>
+          <p:cNvPr id="4" name="Text 2"/>
+          <p:cNvSpPr txBox="1"/>
+          <p:nvPr/>
+        </p:nvSpPr>
+        <p:spPr>
+          <a:xfrm>
+            <a:off x="1024128" y="1600200"/>
+            <a:ext cx="3017520" cy="566928"/>
+          </a:xfrm>
+          <a:prstGeom prst="rect">
+            <a:avLst/>
+          </a:prstGeom>
+          <a:noFill/>
+          <a:ln/>
+        </p:spPr>
+        <p:txBody>
+          <a:bodyPr wrap="square" lIns="0" tIns="0" rIns="0" bIns="0" rtlCol="0" anchor="ctr"/>
+          <a:lstStyle/>
+          <a:p>
+            <a:pPr indent="0" marL="0">
+              <a:buNone/>
+            </a:pPr>
+            <a:r>
+              <a:rPr lang="en-US" sz="1500" b="1" dirty="0">
+                <a:solidFill>
+                  <a:schemeClr val="tx2"/>
+                </a:solidFill>
+              </a:rPr>
+              <a:t>Fixed-Share</a:t>
+            </a:r>
+            <a:endParaRPr lang="en-US" sz="1500" dirty="0"/>
+          </a:p>
+        </p:txBody>
+      </p:sp>
+      <p:sp>
+        <p:nvSpPr>
+          <p:cNvPr id="5" name="Text 3"/>
+          <p:cNvSpPr txBox="1"/>
+          <p:nvPr/>
+        </p:nvSpPr>
+        <p:spPr>
+          <a:xfrm>
+            <a:off x="1024128" y="2203704"/>
+            <a:ext cx="3017520" cy="777240"/>
+          </a:xfrm>
+          <a:prstGeom prst="rect">
+            <a:avLst/>
+          </a:prstGeom>
+          <a:noFill/>
+          <a:ln/>
+        </p:spPr>
+        <p:txBody>
+          <a:bodyPr wrap="square" lIns="0" tIns="0" rIns="0" bIns="0" rtlCol="0" anchor="ctr"/>
+          <a:lstStyle/>
+          <a:p>
+            <a:pPr indent="0" marL="0">
+              <a:buNone/>
+            </a:pPr>
+            <a:r>
+              <a:rPr lang="en-US" sz="1250" dirty="0">
+                <a:solidFill>
+                  <a:schemeClr val="accent5"/>
+                </a:solidFill>
+              </a:rPr>
+              <a:t>every α &gt; 0 loses; the step already does the forgetting</a:t>
+            </a:r>
+            <a:endParaRPr lang="en-US" sz="1250" dirty="0"/>
+          </a:p>
+        </p:txBody>
+      </p:sp>
+      <p:sp>
+        <p:nvSpPr>
+          <p:cNvPr id="6" name="neg-1"/>
+          <p:cNvSpPr/>
+          <p:nvPr/>
+        </p:nvSpPr>
+        <p:spPr>
+          <a:xfrm>
+            <a:off x="4297680" y="1673352"/>
+            <a:ext cx="237744" cy="237744"/>
+          </a:xfrm>
+          <a:prstGeom prst="ellipse">
+            <a:avLst/>
+          </a:prstGeom>
+          <a:solidFill>
+            <a:schemeClr val="accent4"/>
+          </a:solidFill>
+          <a:ln/>
+        </p:spPr>
+      </p:sp>
+      <p:sp>
+        <p:nvSpPr>
+          <p:cNvPr id="7" name="Text 5"/>
+          <p:cNvSpPr txBox="1"/>
+          <p:nvPr/>
+        </p:nvSpPr>
+        <p:spPr>
+          <a:xfrm>
+            <a:off x="4681728" y="1600200"/>
+            <a:ext cx="3017520" cy="566928"/>
+          </a:xfrm>
+          <a:prstGeom prst="rect">
+            <a:avLst/>
+          </a:prstGeom>
+          <a:noFill/>
+          <a:ln/>
+        </p:spPr>
+        <p:txBody>
+          <a:bodyPr wrap="square" lIns="0" tIns="0" rIns="0" bIns="0" rtlCol="0" anchor="ctr"/>
+          <a:lstStyle/>
+          <a:p>
+            <a:pPr indent="0" marL="0">
+              <a:buNone/>
+            </a:pPr>
+            <a:r>
+              <a:rPr lang="en-US" sz="1500" b="1" dirty="0">
+                <a:solidFill>
+                  <a:schemeClr val="tx2"/>
+                </a:solidFill>
+              </a:rPr>
+              <a:t>Per-expert step clock</a:t>
+            </a:r>
+            <a:endParaRPr lang="en-US" sz="1500" dirty="0"/>
+          </a:p>
+        </p:txBody>
+      </p:sp>
+      <p:sp>
+        <p:nvSpPr>
+          <p:cNvPr id="8" name="Text 6"/>
+          <p:cNvSpPr txBox="1"/>
+          <p:nvPr/>
+        </p:nvSpPr>
+        <p:spPr>
+          <a:xfrm>
+            <a:off x="4681728" y="2203704"/>
+            <a:ext cx="3017520" cy="777240"/>
+          </a:xfrm>
+          <a:prstGeom prst="rect">
+            <a:avLst/>
+          </a:prstGeom>
+          <a:noFill/>
+          <a:ln/>
+        </p:spPr>
+        <p:txBody>
+          <a:bodyPr wrap="square" lIns="0" tIns="0" rIns="0" bIns="0" rtlCol="0" anchor="ctr"/>
+          <a:lstStyle/>
+          <a:p>
+            <a:pPr indent="0" marL="0">
+              <a:buNone/>
+            </a:pPr>
+            <a:r>
+              <a:rPr lang="en-US" sz="1250" dirty="0">
+                <a:solidFill>
+                  <a:schemeClr val="accent5"/>
+                </a:solidFill>
+              </a:rPr>
+              <a:t>better on train, −0.00073 on the tail: textbook overfitting</a:t>
+            </a:r>
+            <a:endParaRPr lang="en-US" sz="1250" dirty="0"/>
+          </a:p>
+        </p:txBody>
+      </p:sp>
+      <p:sp>
+        <p:nvSpPr>
+          <p:cNvPr id="9" name="neg-2"/>
+          <p:cNvSpPr/>
+          <p:nvPr/>
+        </p:nvSpPr>
+        <p:spPr>
+          <a:xfrm>
+            <a:off x="7955280" y="1673352"/>
+            <a:ext cx="237744" cy="237744"/>
+          </a:xfrm>
+          <a:prstGeom prst="ellipse">
+            <a:avLst/>
+          </a:prstGeom>
+          <a:solidFill>
+            <a:schemeClr val="accent4"/>
+          </a:solidFill>
+          <a:ln/>
+        </p:spPr>
+      </p:sp>
+      <p:sp>
+        <p:nvSpPr>
+          <p:cNvPr id="10" name="Text 8"/>
+          <p:cNvSpPr txBox="1"/>
+          <p:nvPr/>
+        </p:nvSpPr>
+        <p:spPr>
+          <a:xfrm>
+            <a:off x="8339328" y="1600200"/>
+            <a:ext cx="3017520" cy="566928"/>
+          </a:xfrm>
+          <a:prstGeom prst="rect">
+            <a:avLst/>
+          </a:prstGeom>
+          <a:noFill/>
+          <a:ln/>
+        </p:spPr>
+        <p:txBody>
+          <a:bodyPr wrap="square" lIns="0" tIns="0" rIns="0" bIns="0" rtlCol="0" anchor="ctr"/>
+          <a:lstStyle/>
+          <a:p>
+            <a:pPr indent="0" marL="0">
+              <a:buNone/>
+            </a:pPr>
+            <a:r>
+              <a:rPr lang="en-US" sz="1500" b="1" dirty="0">
+                <a:solidFill>
+                  <a:schemeClr val="tx2"/>
+                </a:solidFill>
+              </a:rPr>
+              <a:t>Markov kernels on the weights</a:t>
+            </a:r>
+            <a:endParaRPr lang="en-US" sz="1500" dirty="0"/>
+          </a:p>
+        </p:txBody>
+      </p:sp>
+      <p:sp>
+        <p:nvSpPr>
+          <p:cNvPr id="11" name="Text 9"/>
+          <p:cNvSpPr txBox="1"/>
+          <p:nvPr/>
+        </p:nvSpPr>
+        <p:spPr>
+          <a:xfrm>
+            <a:off x="8339328" y="2203704"/>
+            <a:ext cx="3017520" cy="777240"/>
+          </a:xfrm>
+          <a:prstGeom prst="rect">
+            <a:avLst/>
+          </a:prstGeom>
+          <a:noFill/>
+          <a:ln/>
+        </p:spPr>
+        <p:txBody>
+          <a:bodyPr wrap="square" lIns="0" tIns="0" rIns="0" bIns="0" rtlCol="0" anchor="ctr"/>
+          <a:lstStyle/>
+          <a:p>
+            <a:pPr indent="0" marL="0">
+              <a:buNone/>
+            </a:pPr>
+            <a:r>
+              <a:rPr lang="en-US" sz="1250" dirty="0">
+                <a:solidFill>
+                  <a:schemeClr val="accent5"/>
+                </a:solidFill>
+              </a:rPr>
+              <a:t>every kernel selects α = 0 and ties exactly</a:t>
+            </a:r>
+            <a:endParaRPr lang="en-US" sz="1250" dirty="0"/>
+          </a:p>
+        </p:txBody>
+      </p:sp>
+      <p:sp>
+        <p:nvSpPr>
+          <p:cNvPr id="12" name="neg-3"/>
+          <p:cNvSpPr/>
+          <p:nvPr/>
+        </p:nvSpPr>
+        <p:spPr>
+          <a:xfrm>
+            <a:off x="640080" y="3136392"/>
+            <a:ext cx="237744" cy="237744"/>
+          </a:xfrm>
+          <a:prstGeom prst="ellipse">
+            <a:avLst/>
+          </a:prstGeom>
+          <a:solidFill>
+            <a:schemeClr val="accent4"/>
+          </a:solidFill>
+          <a:ln/>
+        </p:spPr>
+      </p:sp>
+      <p:sp>
+        <p:nvSpPr>
+          <p:cNvPr id="13" name="Text 11"/>
+          <p:cNvSpPr txBox="1"/>
+          <p:nvPr/>
+        </p:nvSpPr>
+        <p:spPr>
+          <a:xfrm>
+            <a:off x="1024128" y="3063240"/>
+            <a:ext cx="3017520" cy="566928"/>
+          </a:xfrm>
+          <a:prstGeom prst="rect">
+            <a:avLst/>
+          </a:prstGeom>
+          <a:noFill/>
+          <a:ln/>
+        </p:spPr>
+        <p:txBody>
+          <a:bodyPr wrap="square" lIns="0" tIns="0" rIns="0" bIns="0" rtlCol="0" anchor="ctr"/>
+          <a:lstStyle/>
+          <a:p>
+            <a:pPr indent="0" marL="0">
+              <a:buNone/>
+            </a:pPr>
+            <a:r>
+              <a:rPr lang="en-US" sz="1500" b="1" dirty="0">
+                <a:solidFill>
+                  <a:schemeClr val="tx2"/>
+                </a:solidFill>
+              </a:rPr>
+              <a:t>Latent market regimes</a:t>
+            </a:r>
+            <a:endParaRPr lang="en-US" sz="1500" dirty="0"/>
+          </a:p>
+        </p:txBody>
+      </p:sp>
+      <p:sp>
+        <p:nvSpPr>
+          <p:cNvPr id="14" name="Text 12"/>
+          <p:cNvSpPr txBox="1"/>
+          <p:nvPr/>
+        </p:nvSpPr>
+        <p:spPr>
+          <a:xfrm>
+            <a:off x="1024128" y="3666744"/>
+            <a:ext cx="3017520" cy="777240"/>
+          </a:xfrm>
+          <a:prstGeom prst="rect">
+            <a:avLst/>
+          </a:prstGeom>
+          <a:noFill/>
+          <a:ln/>
+        </p:spPr>
+        <p:txBody>
+          <a:bodyPr wrap="square" lIns="0" tIns="0" rIns="0" bIns="0" rtlCol="0" anchor="ctr"/>
+          <a:lstStyle/>
+          <a:p>
+            <a:pPr indent="0" marL="0">
+              <a:buNone/>
+            </a:pPr>
+            <a:r>
+              <a:rPr lang="en-US" sz="1250" dirty="0">
+                <a:solidFill>
+                  <a:schemeClr val="accent5"/>
+                </a:solidFill>
+              </a:rPr>
+              <a:t>τ = 0 selected, belief sd 0.0000: the chain provably does nothing</a:t>
+            </a:r>
+            <a:endParaRPr lang="en-US" sz="1250" dirty="0"/>
+          </a:p>
+        </p:txBody>
+      </p:sp>
+      <p:sp>
+        <p:nvSpPr>
+          <p:cNvPr id="15" name="neg-4"/>
+          <p:cNvSpPr/>
+          <p:nvPr/>
+        </p:nvSpPr>
+        <p:spPr>
+          <a:xfrm>
+            <a:off x="4297680" y="3136392"/>
+            <a:ext cx="237744" cy="237744"/>
+          </a:xfrm>
+          <a:prstGeom prst="ellipse">
+            <a:avLst/>
+          </a:prstGeom>
+          <a:solidFill>
+            <a:schemeClr val="accent4"/>
+          </a:solidFill>
+          <a:ln/>
+        </p:spPr>
+      </p:sp>
+      <p:sp>
+        <p:nvSpPr>
+          <p:cNvPr id="16" name="Text 14"/>
+          <p:cNvSpPr txBox="1"/>
+          <p:nvPr/>
+        </p:nvSpPr>
+        <p:spPr>
+          <a:xfrm>
+            <a:off x="4681728" y="3063240"/>
+            <a:ext cx="3017520" cy="566928"/>
+          </a:xfrm>
+          <a:prstGeom prst="rect">
+            <a:avLst/>
+          </a:prstGeom>
+          <a:noFill/>
+          <a:ln/>
+        </p:spPr>
+        <p:txBody>
+          <a:bodyPr wrap="square" lIns="0" tIns="0" rIns="0" bIns="0" rtlCol="0" anchor="ctr"/>
+          <a:lstStyle/>
+          <a:p>
+            <a:pPr indent="0" marL="0">
+              <a:buNone/>
+            </a:pPr>
+            <a:r>
+              <a:rPr lang="en-US" sz="1500" b="1" dirty="0">
+                <a:solidFill>
+                  <a:schemeClr val="tx2"/>
+                </a:solidFill>
+              </a:rPr>
+              <a:t>Bandit, one-point estimator</a:t>
+            </a:r>
+            <a:endParaRPr lang="en-US" sz="1500" dirty="0"/>
+          </a:p>
+        </p:txBody>
+      </p:sp>
+      <p:sp>
+        <p:nvSpPr>
+          <p:cNvPr id="17" name="Text 15"/>
+          <p:cNvSpPr txBox="1"/>
+          <p:nvPr/>
+        </p:nvSpPr>
+        <p:spPr>
+          <a:xfrm>
+            <a:off x="4681728" y="3666744"/>
+            <a:ext cx="3017520" cy="777240"/>
+          </a:xfrm>
+          <a:prstGeom prst="rect">
+            <a:avLst/>
+          </a:prstGeom>
+          <a:noFill/>
+          <a:ln/>
+        </p:spPr>
+        <p:txBody>
+          <a:bodyPr wrap="square" lIns="0" tIns="0" rIns="0" bIns="0" rtlCol="0" anchor="ctr"/>
+          <a:lstStyle/>
+          <a:p>
+            <a:pPr indent="0" marL="0">
+              <a:buNone/>
+            </a:pPr>
+            <a:r>
+              <a:rPr lang="en-US" sz="1250" dirty="0">
+                <a:solidFill>
+                  <a:schemeClr val="accent5"/>
+                </a:solidFill>
+              </a:rPr>
+              <a:t>alignment with the true gradient is +0.0001; the horizon is too short</a:t>
+            </a:r>
+            <a:endParaRPr lang="en-US" sz="1250" dirty="0"/>
+          </a:p>
+        </p:txBody>
+      </p:sp>
+      <p:sp>
+        <p:nvSpPr>
+          <p:cNvPr id="18" name="neg-5"/>
+          <p:cNvSpPr/>
+          <p:nvPr/>
+        </p:nvSpPr>
+        <p:spPr>
+          <a:xfrm>
+            <a:off x="7955280" y="3136392"/>
+            <a:ext cx="237744" cy="237744"/>
+          </a:xfrm>
+          <a:prstGeom prst="ellipse">
+            <a:avLst/>
+          </a:prstGeom>
+          <a:solidFill>
+            <a:schemeClr val="accent4"/>
+          </a:solidFill>
+          <a:ln/>
+        </p:spPr>
+      </p:sp>
+      <p:sp>
+        <p:nvSpPr>
+          <p:cNvPr id="19" name="Text 17"/>
+          <p:cNvSpPr txBox="1"/>
+          <p:nvPr/>
+        </p:nvSpPr>
+        <p:spPr>
+          <a:xfrm>
+            <a:off x="8339328" y="3063240"/>
+            <a:ext cx="3017520" cy="566928"/>
+          </a:xfrm>
+          <a:prstGeom prst="rect">
+            <a:avLst/>
+          </a:prstGeom>
+          <a:noFill/>
+          <a:ln/>
+        </p:spPr>
+        <p:txBody>
+          <a:bodyPr wrap="square" lIns="0" tIns="0" rIns="0" bIns="0" rtlCol="0" anchor="ctr"/>
+          <a:lstStyle/>
+          <a:p>
+            <a:pPr indent="0" marL="0">
+              <a:buNone/>
+            </a:pPr>
+            <a:r>
+              <a:rPr lang="en-US" sz="1500" b="1" dirty="0">
+                <a:solidFill>
+                  <a:schemeClr val="tx2"/>
+                </a:solidFill>
+              </a:rPr>
+              <a:t>Bayesian / MCMC Kelly</a:t>
+            </a:r>
+            <a:endParaRPr lang="en-US" sz="1500" dirty="0"/>
+          </a:p>
+        </p:txBody>
+      </p:sp>
+      <p:sp>
+        <p:nvSpPr>
+          <p:cNvPr id="20" name="Text 18"/>
+          <p:cNvSpPr txBox="1"/>
+          <p:nvPr/>
+        </p:nvSpPr>
+        <p:spPr>
+          <a:xfrm>
+            <a:off x="8339328" y="3666744"/>
+            <a:ext cx="3017520" cy="777240"/>
+          </a:xfrm>
+          <a:prstGeom prst="rect">
+            <a:avLst/>
+          </a:prstGeom>
+          <a:noFill/>
+          <a:ln/>
+        </p:spPr>
+        <p:txBody>
+          <a:bodyPr wrap="square" lIns="0" tIns="0" rIns="0" bIns="0" rtlCol="0" anchor="ctr"/>
+          <a:lstStyle/>
+          <a:p>
+            <a:pPr indent="0" marL="0">
+              <a:buNone/>
+            </a:pPr>
+            <a:r>
+              <a:rPr lang="en-US" sz="1250" dirty="0">
+                <a:solidFill>
+                  <a:schemeClr val="accent5"/>
+                </a:solidFill>
+              </a:rPr>
+              <a:t>6 ties, 2 significant losses, zero wins</a:t>
+            </a:r>
+            <a:endParaRPr lang="en-US" sz="1250" dirty="0"/>
+          </a:p>
+        </p:txBody>
+      </p:sp>
+      <p:sp>
+        <p:nvSpPr>
+          <p:cNvPr id="21" name="neg-6"/>
+          <p:cNvSpPr/>
+          <p:nvPr/>
+        </p:nvSpPr>
+        <p:spPr>
+          <a:xfrm>
+            <a:off x="640080" y="4599432"/>
+            <a:ext cx="237744" cy="237744"/>
+          </a:xfrm>
+          <a:prstGeom prst="ellipse">
+            <a:avLst/>
+          </a:prstGeom>
+          <a:solidFill>
+            <a:schemeClr val="accent4"/>
+          </a:solidFill>
+          <a:ln/>
+        </p:spPr>
+      </p:sp>
+      <p:sp>
+        <p:nvSpPr>
+          <p:cNvPr id="22" name="Text 20"/>
+          <p:cNvSpPr txBox="1"/>
+          <p:nvPr/>
+        </p:nvSpPr>
+        <p:spPr>
+          <a:xfrm>
+            <a:off x="1024128" y="4526280"/>
+            <a:ext cx="3017520" cy="566928"/>
+          </a:xfrm>
+          <a:prstGeom prst="rect">
+            <a:avLst/>
+          </a:prstGeom>
+          <a:noFill/>
+          <a:ln/>
+        </p:spPr>
+        <p:txBody>
+          <a:bodyPr wrap="square" lIns="0" tIns="0" rIns="0" bIns="0" rtlCol="0" anchor="ctr"/>
+          <a:lstStyle/>
+          <a:p>
+            <a:pPr indent="0" marL="0">
+              <a:buNone/>
+            </a:pPr>
+            <a:r>
+              <a:rPr lang="en-US" sz="1500" b="1" dirty="0">
+                <a:solidFill>
+                  <a:schemeClr val="tx2"/>
+                </a:solidFill>
+              </a:rPr>
+              <a:t>Per-league specialisation</a:t>
+            </a:r>
+            <a:endParaRPr lang="en-US" sz="1500" dirty="0"/>
+          </a:p>
+        </p:txBody>
+      </p:sp>
+      <p:sp>
+        <p:nvSpPr>
+          <p:cNvPr id="23" name="Text 21"/>
+          <p:cNvSpPr txBox="1"/>
+          <p:nvPr/>
+        </p:nvSpPr>
+        <p:spPr>
+          <a:xfrm>
+            <a:off x="1024128" y="5129784"/>
+            <a:ext cx="3017520" cy="777240"/>
+          </a:xfrm>
+          <a:prstGeom prst="rect">
+            <a:avLst/>
+          </a:prstGeom>
+          <a:noFill/>
+          <a:ln/>
+        </p:spPr>
+        <p:txBody>
+          <a:bodyPr wrap="square" lIns="0" tIns="0" rIns="0" bIns="0" rtlCol="0" anchor="ctr"/>
+          <a:lstStyle/>
+          <a:p>
+            <a:pPr indent="0" marL="0">
+              <a:buNone/>
+            </a:pPr>
+            <a:r>
+              <a:rPr lang="en-US" sz="1250" dirty="0">
+                <a:solidFill>
+                  <a:schemeClr val="accent5"/>
+                </a:solidFill>
+              </a:rPr>
+              <a:t>loses in all six leagues tested</a:t>
+            </a:r>
+            <a:endParaRPr lang="en-US" sz="1250" dirty="0"/>
+          </a:p>
+        </p:txBody>
+      </p:sp>
+      <p:sp>
+        <p:nvSpPr>
+          <p:cNvPr id="24" name="neg-7"/>
+          <p:cNvSpPr/>
+          <p:nvPr/>
+        </p:nvSpPr>
+        <p:spPr>
+          <a:xfrm>
+            <a:off x="4297680" y="4599432"/>
+            <a:ext cx="237744" cy="237744"/>
+          </a:xfrm>
+          <a:prstGeom prst="ellipse">
+            <a:avLst/>
+          </a:prstGeom>
+          <a:solidFill>
+            <a:schemeClr val="accent4"/>
+          </a:solidFill>
+          <a:ln/>
+        </p:spPr>
+      </p:sp>
+      <p:sp>
+        <p:nvSpPr>
+          <p:cNvPr id="25" name="Text 23"/>
+          <p:cNvSpPr txBox="1"/>
+          <p:nvPr/>
+        </p:nvSpPr>
+        <p:spPr>
+          <a:xfrm>
+            <a:off x="4681728" y="4526280"/>
+            <a:ext cx="3017520" cy="566928"/>
+          </a:xfrm>
+          <a:prstGeom prst="rect">
+            <a:avLst/>
+          </a:prstGeom>
+          <a:noFill/>
+          <a:ln/>
+        </p:spPr>
+        <p:txBody>
+          <a:bodyPr wrap="square" lIns="0" tIns="0" rIns="0" bIns="0" rtlCol="0" anchor="ctr"/>
+          <a:lstStyle/>
+          <a:p>
+            <a:pPr indent="0" marL="0">
+              <a:buNone/>
+            </a:pPr>
+            <a:r>
+              <a:rPr lang="en-US" sz="1500" b="1" dirty="0">
+                <a:solidFill>
+                  <a:schemeClr val="tx2"/>
+                </a:solidFill>
+              </a:rPr>
+              <a:t>AdaGrad</a:t>
+            </a:r>
+            <a:endParaRPr lang="en-US" sz="1500" dirty="0"/>
+          </a:p>
+        </p:txBody>
+      </p:sp>
+      <p:sp>
+        <p:nvSpPr>
+          <p:cNvPr id="26" name="Text 24"/>
+          <p:cNvSpPr txBox="1"/>
+          <p:nvPr/>
+        </p:nvSpPr>
+        <p:spPr>
+          <a:xfrm>
+            <a:off x="4681728" y="5129784"/>
+            <a:ext cx="3017520" cy="777240"/>
+          </a:xfrm>
+          <a:prstGeom prst="rect">
+            <a:avLst/>
+          </a:prstGeom>
+          <a:noFill/>
+          <a:ln/>
+        </p:spPr>
+        <p:txBody>
+          <a:bodyPr wrap="square" lIns="0" tIns="0" rIns="0" bIns="0" rtlCol="0" anchor="ctr"/>
+          <a:lstStyle/>
+          <a:p>
+            <a:pPr indent="0" marL="0">
+              <a:buNone/>
+            </a:pPr>
+            <a:r>
+              <a:rPr lang="en-US" sz="1250" dirty="0">
+                <a:solidFill>
+                  <a:schemeClr val="accent5"/>
+                </a:solidFill>
+              </a:rPr>
+              <a:t>recovers 20% of the hand-tuned gain at best</a:t>
+            </a:r>
+            <a:endParaRPr lang="en-US" sz="1250" dirty="0"/>
+          </a:p>
+        </p:txBody>
+      </p:sp>
+      <p:sp>
+        <p:nvSpPr>
+          <p:cNvPr id="27" name="neg-8"/>
+          <p:cNvSpPr/>
+          <p:nvPr/>
+        </p:nvSpPr>
+        <p:spPr>
+          <a:xfrm>
+            <a:off x="7955280" y="4599432"/>
+            <a:ext cx="237744" cy="237744"/>
+          </a:xfrm>
+          <a:prstGeom prst="ellipse">
+            <a:avLst/>
+          </a:prstGeom>
+          <a:solidFill>
+            <a:schemeClr val="accent4"/>
+          </a:solidFill>
+          <a:ln/>
+        </p:spPr>
+      </p:sp>
+      <p:sp>
+        <p:nvSpPr>
+          <p:cNvPr id="28" name="Text 26"/>
+          <p:cNvSpPr txBox="1"/>
+          <p:nvPr/>
+        </p:nvSpPr>
+        <p:spPr>
+          <a:xfrm>
+            <a:off x="8339328" y="4526280"/>
+            <a:ext cx="3017520" cy="566928"/>
+          </a:xfrm>
+          <a:prstGeom prst="rect">
+            <a:avLst/>
+          </a:prstGeom>
+          <a:noFill/>
+          <a:ln/>
+        </p:spPr>
+        <p:txBody>
+          <a:bodyPr wrap="square" lIns="0" tIns="0" rIns="0" bIns="0" rtlCol="0" anchor="ctr"/>
+          <a:lstStyle/>
+          <a:p>
+            <a:pPr indent="0" marL="0">
+              <a:buNone/>
+            </a:pPr>
+            <a:r>
+              <a:rPr lang="en-US" sz="1500" b="1" dirty="0">
+                <a:solidFill>
+                  <a:schemeClr val="tx2"/>
+                </a:solidFill>
+              </a:rPr>
+              <a:t>Joint step + calibration sweep</a:t>
+            </a:r>
+            <a:endParaRPr lang="en-US" sz="1500" dirty="0"/>
+          </a:p>
+        </p:txBody>
+      </p:sp>
+      <p:sp>
+        <p:nvSpPr>
+          <p:cNvPr id="29" name="Text 27"/>
+          <p:cNvSpPr txBox="1"/>
+          <p:nvPr/>
+        </p:nvSpPr>
+        <p:spPr>
+          <a:xfrm>
+            <a:off x="8339328" y="5129784"/>
+            <a:ext cx="3017520" cy="777240"/>
+          </a:xfrm>
+          <a:prstGeom prst="rect">
+            <a:avLst/>
+          </a:prstGeom>
+          <a:noFill/>
+          <a:ln/>
+        </p:spPr>
+        <p:txBody>
+          <a:bodyPr wrap="square" lIns="0" tIns="0" rIns="0" bIns="0" rtlCol="0" anchor="ctr"/>
+          <a:lstStyle/>
+          <a:p>
+            <a:pPr indent="0" marL="0">
+              <a:buNone/>
+            </a:pPr>
+            <a:r>
+              <a:rPr lang="en-US" sz="1250" dirty="0">
+                <a:solidFill>
+                  <a:schemeClr val="accent5"/>
+                </a:solidFill>
+              </a:rPr>
+              <a:t>no interaction at all, and train selection then picks a worse step</a:t>
+            </a:r>
+            <a:endParaRPr lang="en-US" sz="1250" dirty="0"/>
+          </a:p>
+        </p:txBody>
+      </p:sp>
+      <p:sp>
+        <p:nvSpPr>
+          <p:cNvPr id="30" name="Text 28"/>
+          <p:cNvSpPr txBox="1"/>
+          <p:nvPr/>
+        </p:nvSpPr>
+        <p:spPr>
+          <a:xfrm>
+            <a:off x="640080" y="5943600"/>
+            <a:ext cx="10881360" cy="640080"/>
+          </a:xfrm>
+          <a:prstGeom prst="rect">
+            <a:avLst/>
+          </a:prstGeom>
+          <a:noFill/>
+          <a:ln/>
+        </p:spPr>
+        <p:txBody>
+          <a:bodyPr wrap="square" rtlCol="0" anchor="ctr"/>
+          <a:lstStyle/>
+          <a:p>
+            <a:pPr indent="0" marL="0">
+              <a:buNone/>
+            </a:pPr>
+            <a:r>
+              <a:rPr lang="en-US" sz="1500" dirty="0">
+                <a:solidFill>
+                  <a:schemeClr val="tx1"/>
+                </a:solidFill>
+              </a:rPr>
+              <a:t>A pattern across them: once the step size is tuned, no further movement of mass over the experts buys anything. The step and the leak control the same quantity.</a:t>
+            </a:r>
+            <a:endParaRPr lang="en-US" sz="1500" dirty="0"/>
+          </a:p>
+        </p:txBody>
+      </p:sp>
+      <p:sp>
+        <p:nvSpPr>
+          <p:cNvPr id="25" name="Slide Number Placeholder 0"/>
+          <p:cNvSpPr>
+            <a:spLocks noGrp="1"/>
+          </p:cNvSpPr>
           <p:nvPr>
-            <p:ph idx="101" type="title" hasCustomPrompt="1"/>
+            <p:ph type="sldNum" sz="quarter" idx="4294967295"/>
           </p:nvPr>
         </p:nvSpPr>
         <p:spPr>
           <a:xfrm>
-            <a:off x="2834640" y="2286000"/>
-            <a:ext cx="8412480" cy="1097280"/>
-          </a:xfrm>
-          <a:prstGeom prst="rect">
-            <a:avLst/>
-          </a:prstGeom>
-          <a:noFill/>
-          <a:ln/>
-        </p:spPr>
-        <p:txBody>
-          <a:bodyPr wrap="square" rtlCol="0" anchor="ctr"/>
-          <a:lstStyle/>
-          <a:p>
-            <a:pPr algn="l" indent="0" marL="0">
-              <a:buNone/>
-            </a:pPr>
-            <a:r>
-              <a:rPr lang="en-US" sz="3600" b="1" dirty="0">
-                <a:solidFill>
-                  <a:schemeClr val="bg1"/>
-                </a:solidFill>
-              </a:rPr>
-              <a:t>What the numbers mean</a:t>
-            </a:r>
-            <a:endParaRPr lang="en-US" sz="3600" dirty="0"/>
-          </a:p>
-        </p:txBody>
-      </p:sp>
-      <p:sp>
-        <p:nvSpPr>
-          <p:cNvPr id="4" name="Text 0"/>
-          <p:cNvSpPr/>
-          <p:nvPr>
-            <p:ph idx="102" type="body" hasCustomPrompt="1"/>
-          </p:nvPr>
-        </p:nvSpPr>
-        <p:spPr>
-          <a:xfrm>
-            <a:off x="2834640" y="3474720"/>
-            <a:ext cx="8412480" cy="1097280"/>
-          </a:xfrm>
-          <a:prstGeom prst="rect">
-            <a:avLst/>
-          </a:prstGeom>
-          <a:noFill/>
-          <a:ln/>
-        </p:spPr>
-        <p:txBody>
-          <a:bodyPr wrap="square" rtlCol="0" anchor="t"/>
-          <a:lstStyle/>
-          <a:p>
-            <a:pPr algn="l" indent="0" marL="0">
-              <a:buNone/>
-            </a:pPr>
-            <a:r>
-              <a:rPr lang="en-US" sz="1600" dirty="0">
-                <a:solidFill>
-                  <a:srgbClr val="CBD5E1"/>
-                </a:solidFill>
-              </a:rPr>
-              <a:t>Why the ranking of forecasters turns out to be a ranking of business models</a:t>
-            </a:r>
-            <a:endParaRPr lang="en-US" sz="1600" dirty="0"/>
+            <a:off x="11521440" y="6355080"/>
+            <a:ext cx="800000" cy="300000"/>
+          </a:xfrm>
+          <a:prstGeom prst="rect">
+            <a:avLst/>
+          </a:prstGeom>
+          <a:extLst>
+            <a:ext uri="{C572A759-6A51-4108-AA02-DFA0A04FC94B}">
+              <ma14:wrappingTextBoxFlag xmlns:ma14="http://schemas.microsoft.com/office/mac/drawingml/2011/main" val="0"/>
+            </a:ext>
+          </a:extLst>
+        </p:spPr>
+        <p:txBody>
+          <a:bodyPr/>
+          <a:lstStyle>
+            <a:lvl1pPr>
+              <a:defRPr sz="1100">
+                <a:solidFill>
+                  <a:schemeClr val="accent6"/>
+                </a:solidFill>
+              </a:defRPr>
+            </a:lvl1pPr>
+          </a:lstStyle>
+          <a:p>
+            <a:pPr algn="l"/>
+            <a:fld id="{F7021451-1387-4CA6-816F-3879F97B5CBC}" type="slidenum">
+              <a:rPr b="0" lang="en-US"/>
+              <a:t>27</a:t>
+            </a:fld>
+            <a:endParaRPr lang="en-US"/>
           </a:p>
         </p:txBody>
       </p:sp>
@@ -12922,13 +13458,13 @@
           <p:cNvPr id="2" name="Text 0"/>
           <p:cNvSpPr/>
           <p:nvPr>
-            <p:ph idx="100" type="title" hasCustomPrompt="1"/>
+            <p:ph idx="100" type="body" hasCustomPrompt="1"/>
           </p:nvPr>
         </p:nvSpPr>
         <p:spPr>
           <a:xfrm>
-            <a:off x="640080" y="411480"/>
-            <a:ext cx="10881360" cy="777240"/>
+            <a:off x="914400" y="2286000"/>
+            <a:ext cx="1828800" cy="1097280"/>
           </a:xfrm>
           <a:prstGeom prst="rect">
             <a:avLst/>
@@ -12944,383 +13480,90 @@
               <a:buNone/>
             </a:pPr>
             <a:r>
-              <a:rPr lang="en-US" sz="3000" b="1" dirty="0">
-                <a:solidFill>
-                  <a:schemeClr val="tx2"/>
-                </a:solidFill>
-              </a:rPr>
-              <a:t>The odds are not a property of the match</a:t>
-            </a:r>
-            <a:endParaRPr lang="en-US" sz="3000" dirty="0"/>
-          </a:p>
-        </p:txBody>
-      </p:sp>
-      <p:sp>
-        <p:nvSpPr>
-          <p:cNvPr id="3" name="Text 1"/>
-          <p:cNvSpPr txBox="1"/>
-          <p:nvPr/>
-        </p:nvSpPr>
-        <p:spPr>
-          <a:xfrm>
-            <a:off x="640080" y="1481328"/>
-            <a:ext cx="5852160" cy="457200"/>
-          </a:xfrm>
-          <a:prstGeom prst="rect">
-            <a:avLst/>
-          </a:prstGeom>
-          <a:noFill/>
-          <a:ln/>
-        </p:spPr>
-        <p:txBody>
-          <a:bodyPr wrap="square" lIns="0" tIns="0" rIns="0" bIns="0" rtlCol="0" anchor="ctr"/>
-          <a:lstStyle/>
-          <a:p>
-            <a:pPr indent="0" marL="0">
-              <a:buNone/>
-            </a:pPr>
-            <a:r>
-              <a:rPr lang="en-US" sz="1600" b="1" dirty="0">
-                <a:solidFill>
-                  <a:schemeClr val="accent1"/>
-                </a:solidFill>
-              </a:rPr>
-              <a:t>Remove Pinnacle and the "probability" changes</a:t>
+              <a:rPr lang="en-US" sz="6800" b="1" dirty="0">
+                <a:solidFill>
+                  <a:srgbClr val="6FA3D6"/>
+                </a:solidFill>
+              </a:rPr>
+              <a:t>05</a:t>
+            </a:r>
+            <a:endParaRPr lang="en-US" sz="6800" dirty="0"/>
+          </a:p>
+        </p:txBody>
+      </p:sp>
+      <p:sp>
+        <p:nvSpPr>
+          <p:cNvPr id="3" name="Text 0"/>
+          <p:cNvSpPr/>
+          <p:nvPr>
+            <p:ph idx="101" type="title" hasCustomPrompt="1"/>
+          </p:nvPr>
+        </p:nvSpPr>
+        <p:spPr>
+          <a:xfrm>
+            <a:off x="2834640" y="2286000"/>
+            <a:ext cx="8412480" cy="1097280"/>
+          </a:xfrm>
+          <a:prstGeom prst="rect">
+            <a:avLst/>
+          </a:prstGeom>
+          <a:noFill/>
+          <a:ln/>
+        </p:spPr>
+        <p:txBody>
+          <a:bodyPr wrap="square" rtlCol="0" anchor="ctr"/>
+          <a:lstStyle/>
+          <a:p>
+            <a:pPr algn="l" indent="0" marL="0">
+              <a:buNone/>
+            </a:pPr>
+            <a:r>
+              <a:rPr lang="en-US" sz="3600" b="1" dirty="0">
+                <a:solidFill>
+                  <a:schemeClr val="bg1"/>
+                </a:solidFill>
+              </a:rPr>
+              <a:t>What the numbers mean</a:t>
+            </a:r>
+            <a:endParaRPr lang="en-US" sz="3600" dirty="0"/>
+          </a:p>
+        </p:txBody>
+      </p:sp>
+      <p:sp>
+        <p:nvSpPr>
+          <p:cNvPr id="4" name="Text 0"/>
+          <p:cNvSpPr/>
+          <p:nvPr>
+            <p:ph idx="102" type="body" hasCustomPrompt="1"/>
+          </p:nvPr>
+        </p:nvSpPr>
+        <p:spPr>
+          <a:xfrm>
+            <a:off x="2834640" y="3474720"/>
+            <a:ext cx="8412480" cy="1097280"/>
+          </a:xfrm>
+          <a:prstGeom prst="rect">
+            <a:avLst/>
+          </a:prstGeom>
+          <a:noFill/>
+          <a:ln/>
+        </p:spPr>
+        <p:txBody>
+          <a:bodyPr wrap="square" rtlCol="0" anchor="t"/>
+          <a:lstStyle/>
+          <a:p>
+            <a:pPr algn="l" indent="0" marL="0">
+              <a:buNone/>
+            </a:pPr>
+            <a:r>
+              <a:rPr lang="en-US" sz="1600" dirty="0">
+                <a:solidFill>
+                  <a:srgbClr val="CBD5E1"/>
+                </a:solidFill>
+              </a:rPr>
+              <a:t>Why the ranking of forecasters turns out to be a ranking of business models</a:t>
             </a:r>
             <a:endParaRPr lang="en-US" sz="1600" dirty="0"/>
-          </a:p>
-        </p:txBody>
-      </p:sp>
-      <p:sp>
-        <p:nvSpPr>
-          <p:cNvPr id="4" name="Text 2"/>
-          <p:cNvSpPr txBox="1"/>
-          <p:nvPr/>
-        </p:nvSpPr>
-        <p:spPr>
-          <a:xfrm>
-            <a:off x="6675120" y="1481328"/>
-            <a:ext cx="4846320" cy="822960"/>
-          </a:xfrm>
-          <a:prstGeom prst="rect">
-            <a:avLst/>
-          </a:prstGeom>
-          <a:noFill/>
-          <a:ln/>
-        </p:spPr>
-        <p:txBody>
-          <a:bodyPr wrap="square" lIns="0" tIns="0" rIns="0" bIns="0" rtlCol="0" anchor="ctr"/>
-          <a:lstStyle/>
-          <a:p>
-            <a:pPr indent="0" marL="0">
-              <a:buNone/>
-            </a:pPr>
-            <a:r>
-              <a:rPr lang="en-US" sz="1350" dirty="0">
-                <a:solidFill>
-                  <a:schemeClr val="accent5"/>
-                </a:solidFill>
-              </a:rPr>
-              <a:t>What was measured was not knowledge about football but position in the market.</a:t>
-            </a:r>
-            <a:endParaRPr lang="en-US" sz="1350" dirty="0"/>
-          </a:p>
-        </p:txBody>
-      </p:sp>
-      <p:sp>
-        <p:nvSpPr>
-          <p:cNvPr id="5" name="Text 3"/>
-          <p:cNvSpPr txBox="1"/>
-          <p:nvPr/>
-        </p:nvSpPr>
-        <p:spPr>
-          <a:xfrm>
-            <a:off x="640080" y="2670048"/>
-            <a:ext cx="5852160" cy="457200"/>
-          </a:xfrm>
-          <a:prstGeom prst="rect">
-            <a:avLst/>
-          </a:prstGeom>
-          <a:noFill/>
-          <a:ln/>
-        </p:spPr>
-        <p:txBody>
-          <a:bodyPr wrap="square" lIns="0" tIns="0" rIns="0" bIns="0" rtlCol="0" anchor="ctr"/>
-          <a:lstStyle/>
-          <a:p>
-            <a:pPr indent="0" marL="0">
-              <a:buNone/>
-            </a:pPr>
-            <a:r>
-              <a:rPr lang="en-US" sz="1600" b="1" dirty="0">
-                <a:solidFill>
-                  <a:schemeClr val="accent1"/>
-                </a:solidFill>
-              </a:rPr>
-              <a:t>Pinnacle leads because it does not ban winners</a:t>
-            </a:r>
-            <a:endParaRPr lang="en-US" sz="1600" dirty="0"/>
-          </a:p>
-        </p:txBody>
-      </p:sp>
-      <p:sp>
-        <p:nvSpPr>
-          <p:cNvPr id="6" name="Text 4"/>
-          <p:cNvSpPr txBox="1"/>
-          <p:nvPr/>
-        </p:nvSpPr>
-        <p:spPr>
-          <a:xfrm>
-            <a:off x="6675120" y="2670048"/>
-            <a:ext cx="4846320" cy="822960"/>
-          </a:xfrm>
-          <a:prstGeom prst="rect">
-            <a:avLst/>
-          </a:prstGeom>
-          <a:noFill/>
-          <a:ln/>
-        </p:spPr>
-        <p:txBody>
-          <a:bodyPr wrap="square" lIns="0" tIns="0" rIns="0" bIns="0" rtlCol="0" anchor="ctr"/>
-          <a:lstStyle/>
-          <a:p>
-            <a:pPr indent="0" marL="0">
-              <a:buNone/>
-            </a:pPr>
-            <a:r>
-              <a:rPr lang="en-US" sz="1350" dirty="0">
-                <a:solidFill>
-                  <a:schemeClr val="accent5"/>
-                </a:solidFill>
-              </a:rPr>
-              <a:t>Low margin, and informed bettors are allowed to correct its price instead of being shut out.</a:t>
-            </a:r>
-            <a:endParaRPr lang="en-US" sz="1350" dirty="0"/>
-          </a:p>
-        </p:txBody>
-      </p:sp>
-      <p:sp>
-        <p:nvSpPr>
-          <p:cNvPr id="7" name="Text 5"/>
-          <p:cNvSpPr txBox="1"/>
-          <p:nvPr/>
-        </p:nvSpPr>
-        <p:spPr>
-          <a:xfrm>
-            <a:off x="640080" y="3858768"/>
-            <a:ext cx="5852160" cy="457200"/>
-          </a:xfrm>
-          <a:prstGeom prst="rect">
-            <a:avLst/>
-          </a:prstGeom>
-          <a:noFill/>
-          <a:ln/>
-        </p:spPr>
-        <p:txBody>
-          <a:bodyPr wrap="square" lIns="0" tIns="0" rIns="0" bIns="0" rtlCol="0" anchor="ctr"/>
-          <a:lstStyle/>
-          <a:p>
-            <a:pPr indent="0" marL="0">
-              <a:buNone/>
-            </a:pPr>
-            <a:r>
-              <a:rPr lang="en-US" sz="1600" b="1" dirty="0">
-                <a:solidFill>
-                  <a:schemeClr val="accent1"/>
-                </a:solidFill>
-              </a:rPr>
-              <a:t>The best forecaster is not a bookmaker at all</a:t>
-            </a:r>
-            <a:endParaRPr lang="en-US" sz="1600" dirty="0"/>
-          </a:p>
-        </p:txBody>
-      </p:sp>
-      <p:sp>
-        <p:nvSpPr>
-          <p:cNvPr id="8" name="Text 6"/>
-          <p:cNvSpPr txBox="1"/>
-          <p:nvPr/>
-        </p:nvSpPr>
-        <p:spPr>
-          <a:xfrm>
-            <a:off x="6675120" y="3858768"/>
-            <a:ext cx="4846320" cy="822960"/>
-          </a:xfrm>
-          <a:prstGeom prst="rect">
-            <a:avLst/>
-          </a:prstGeom>
-          <a:noFill/>
-          <a:ln/>
-        </p:spPr>
-        <p:txBody>
-          <a:bodyPr wrap="square" lIns="0" tIns="0" rIns="0" bIns="0" rtlCol="0" anchor="ctr"/>
-          <a:lstStyle/>
-          <a:p>
-            <a:pPr indent="0" marL="0">
-              <a:buNone/>
-            </a:pPr>
-            <a:r>
-              <a:rPr lang="en-US" sz="1350" dirty="0">
-                <a:solidFill>
-                  <a:schemeClr val="accent5"/>
-                </a:solidFill>
-              </a:rPr>
-              <a:t>Betfair Exchange: a market price carrying no operator margin.</a:t>
-            </a:r>
-            <a:endParaRPr lang="en-US" sz="1350" dirty="0"/>
-          </a:p>
-        </p:txBody>
-      </p:sp>
-      <p:sp>
-        <p:nvSpPr>
-          <p:cNvPr id="9" name="Text 7"/>
-          <p:cNvSpPr txBox="1"/>
-          <p:nvPr/>
-        </p:nvSpPr>
-        <p:spPr>
-          <a:xfrm>
-            <a:off x="640080" y="5047488"/>
-            <a:ext cx="5852160" cy="457200"/>
-          </a:xfrm>
-          <a:prstGeom prst="rect">
-            <a:avLst/>
-          </a:prstGeom>
-          <a:noFill/>
-          <a:ln/>
-        </p:spPr>
-        <p:txBody>
-          <a:bodyPr wrap="square" lIns="0" tIns="0" rIns="0" bIns="0" rtlCol="0" anchor="ctr"/>
-          <a:lstStyle/>
-          <a:p>
-            <a:pPr indent="0" marL="0">
-              <a:buNone/>
-            </a:pPr>
-            <a:r>
-              <a:rPr lang="en-US" sz="1600" b="1" dirty="0">
-                <a:solidFill>
-                  <a:schemeClr val="accent2"/>
-                </a:solidFill>
-              </a:rPr>
-              <a:t>The market got dearer, not better</a:t>
-            </a:r>
-            <a:endParaRPr lang="en-US" sz="1600" dirty="0"/>
-          </a:p>
-        </p:txBody>
-      </p:sp>
-      <p:sp>
-        <p:nvSpPr>
-          <p:cNvPr id="10" name="Text 8"/>
-          <p:cNvSpPr txBox="1"/>
-          <p:nvPr/>
-        </p:nvSpPr>
-        <p:spPr>
-          <a:xfrm>
-            <a:off x="6675120" y="5047488"/>
-            <a:ext cx="4846320" cy="822960"/>
-          </a:xfrm>
-          <a:prstGeom prst="rect">
-            <a:avLst/>
-          </a:prstGeom>
-          <a:noFill/>
-          <a:ln/>
-        </p:spPr>
-        <p:txBody>
-          <a:bodyPr wrap="square" lIns="0" tIns="0" rIns="0" bIns="0" rtlCol="0" anchor="ctr"/>
-          <a:lstStyle/>
-          <a:p>
-            <a:pPr indent="0" marL="0">
-              <a:buNone/>
-            </a:pPr>
-            <a:r>
-              <a:rPr lang="en-US" sz="1350" dirty="0">
-                <a:solidFill>
-                  <a:schemeClr val="accent5"/>
-                </a:solidFill>
-              </a:rPr>
-              <a:t>Overround 4.42% → 6.00% (p = 0.0007) while no series shows a significant trend in log-loss.</a:t>
-            </a:r>
-            <a:endParaRPr lang="en-US" sz="1350" dirty="0"/>
-          </a:p>
-        </p:txBody>
-      </p:sp>
-      <p:sp>
-        <p:nvSpPr>
-          <p:cNvPr id="11" name="Text 9"/>
-          <p:cNvSpPr txBox="1"/>
-          <p:nvPr/>
-        </p:nvSpPr>
-        <p:spPr>
-          <a:xfrm>
-            <a:off x="640080" y="5760720"/>
-            <a:ext cx="10881360" cy="731520"/>
-          </a:xfrm>
-          <a:prstGeom prst="rect">
-            <a:avLst/>
-          </a:prstGeom>
-          <a:noFill/>
-          <a:ln/>
-        </p:spPr>
-        <p:txBody>
-          <a:bodyPr wrap="square" rtlCol="0" anchor="ctr"/>
-          <a:lstStyle/>
-          <a:p>
-            <a:pPr indent="0" marL="0">
-              <a:buNone/>
-            </a:pPr>
-            <a:r>
-              <a:rPr lang="en-US" sz="1500" i="1" dirty="0">
-                <a:solidFill>
-                  <a:schemeClr val="tx1"/>
-                </a:solidFill>
-              </a:rPr>
-              <a:t>Shin's parameter z IS the estimated share of informed bettors, a social quantity, entering the method as a nuisance parameter to be removed.</a:t>
-            </a:r>
-            <a:endParaRPr lang="en-US" sz="1500" dirty="0"/>
-          </a:p>
-        </p:txBody>
-      </p:sp>
-      <p:sp>
-        <p:nvSpPr>
-          <p:cNvPr id="25" name="Slide Number Placeholder 0"/>
-          <p:cNvSpPr>
-            <a:spLocks noGrp="1"/>
-          </p:cNvSpPr>
-          <p:nvPr>
-            <p:ph type="sldNum" sz="quarter" idx="4294967295"/>
-          </p:nvPr>
-        </p:nvSpPr>
-        <p:spPr>
-          <a:xfrm>
-            <a:off x="11521440" y="6355080"/>
-            <a:ext cx="800000" cy="300000"/>
-          </a:xfrm>
-          <a:prstGeom prst="rect">
-            <a:avLst/>
-          </a:prstGeom>
-          <a:extLst>
-            <a:ext uri="{C572A759-6A51-4108-AA02-DFA0A04FC94B}">
-              <ma14:wrappingTextBoxFlag xmlns:ma14="http://schemas.microsoft.com/office/mac/drawingml/2011/main" val="0"/>
-            </a:ext>
-          </a:extLst>
-        </p:spPr>
-        <p:txBody>
-          <a:bodyPr/>
-          <a:lstStyle>
-            <a:lvl1pPr>
-              <a:defRPr sz="1100">
-                <a:solidFill>
-                  <a:schemeClr val="accent6"/>
-                </a:solidFill>
-              </a:defRPr>
-            </a:lvl1pPr>
-          </a:lstStyle>
-          <a:p>
-            <a:pPr algn="l"/>
-            <a:fld id="{F7021451-1387-4CA6-816F-3879F97B5CBC}" type="slidenum">
-              <a:rPr b="0" lang="en-US"/>
-              <a:t>28</a:t>
-            </a:fld>
-            <a:endParaRPr lang="en-US"/>
           </a:p>
         </p:txBody>
       </p:sp>
@@ -13359,8 +13602,8 @@
         </p:nvSpPr>
         <p:spPr>
           <a:xfrm>
-            <a:off x="914400" y="1737360"/>
-            <a:ext cx="10332720" cy="2194560"/>
+            <a:off x="640080" y="411480"/>
+            <a:ext cx="10881360" cy="777240"/>
           </a:xfrm>
           <a:prstGeom prst="rect">
             <a:avLst/>
@@ -13376,52 +13619,383 @@
               <a:buNone/>
             </a:pPr>
             <a:r>
-              <a:rPr lang="en-US" sz="3400" b="1" dirty="0">
-                <a:solidFill>
-                  <a:schemeClr val="bg1"/>
-                </a:solidFill>
-              </a:rPr>
-              <a:t>The edge exists where it cannot be used</a:t>
-            </a:r>
-            <a:endParaRPr lang="en-US" sz="3400" dirty="0"/>
-          </a:p>
-        </p:txBody>
-      </p:sp>
-      <p:sp>
-        <p:nvSpPr>
-          <p:cNvPr id="3" name="Text 0"/>
-          <p:cNvSpPr/>
+              <a:rPr lang="en-US" sz="3000" b="1" dirty="0">
+                <a:solidFill>
+                  <a:schemeClr val="tx2"/>
+                </a:solidFill>
+              </a:rPr>
+              <a:t>The odds are not a property of the match</a:t>
+            </a:r>
+            <a:endParaRPr lang="en-US" sz="3000" dirty="0"/>
+          </a:p>
+        </p:txBody>
+      </p:sp>
+      <p:sp>
+        <p:nvSpPr>
+          <p:cNvPr id="3" name="Text 1"/>
+          <p:cNvSpPr txBox="1"/>
+          <p:nvPr/>
+        </p:nvSpPr>
+        <p:spPr>
+          <a:xfrm>
+            <a:off x="640080" y="1481328"/>
+            <a:ext cx="5852160" cy="457200"/>
+          </a:xfrm>
+          <a:prstGeom prst="rect">
+            <a:avLst/>
+          </a:prstGeom>
+          <a:noFill/>
+          <a:ln/>
+        </p:spPr>
+        <p:txBody>
+          <a:bodyPr wrap="square" lIns="0" tIns="0" rIns="0" bIns="0" rtlCol="0" anchor="ctr"/>
+          <a:lstStyle/>
+          <a:p>
+            <a:pPr indent="0" marL="0">
+              <a:buNone/>
+            </a:pPr>
+            <a:r>
+              <a:rPr lang="en-US" sz="1600" b="1" dirty="0">
+                <a:solidFill>
+                  <a:schemeClr val="accent1"/>
+                </a:solidFill>
+              </a:rPr>
+              <a:t>Remove Pinnacle and the "probability" changes</a:t>
+            </a:r>
+            <a:endParaRPr lang="en-US" sz="1600" dirty="0"/>
+          </a:p>
+        </p:txBody>
+      </p:sp>
+      <p:sp>
+        <p:nvSpPr>
+          <p:cNvPr id="4" name="Text 2"/>
+          <p:cNvSpPr txBox="1"/>
+          <p:nvPr/>
+        </p:nvSpPr>
+        <p:spPr>
+          <a:xfrm>
+            <a:off x="6675120" y="1481328"/>
+            <a:ext cx="4846320" cy="822960"/>
+          </a:xfrm>
+          <a:prstGeom prst="rect">
+            <a:avLst/>
+          </a:prstGeom>
+          <a:noFill/>
+          <a:ln/>
+        </p:spPr>
+        <p:txBody>
+          <a:bodyPr wrap="square" lIns="0" tIns="0" rIns="0" bIns="0" rtlCol="0" anchor="ctr"/>
+          <a:lstStyle/>
+          <a:p>
+            <a:pPr indent="0" marL="0">
+              <a:buNone/>
+            </a:pPr>
+            <a:r>
+              <a:rPr lang="en-US" sz="1350" dirty="0">
+                <a:solidFill>
+                  <a:schemeClr val="accent5"/>
+                </a:solidFill>
+              </a:rPr>
+              <a:t>What was measured was not knowledge about football but position in the market.</a:t>
+            </a:r>
+            <a:endParaRPr lang="en-US" sz="1350" dirty="0"/>
+          </a:p>
+        </p:txBody>
+      </p:sp>
+      <p:sp>
+        <p:nvSpPr>
+          <p:cNvPr id="5" name="Text 3"/>
+          <p:cNvSpPr txBox="1"/>
+          <p:nvPr/>
+        </p:nvSpPr>
+        <p:spPr>
+          <a:xfrm>
+            <a:off x="640080" y="2670048"/>
+            <a:ext cx="5852160" cy="457200"/>
+          </a:xfrm>
+          <a:prstGeom prst="rect">
+            <a:avLst/>
+          </a:prstGeom>
+          <a:noFill/>
+          <a:ln/>
+        </p:spPr>
+        <p:txBody>
+          <a:bodyPr wrap="square" lIns="0" tIns="0" rIns="0" bIns="0" rtlCol="0" anchor="ctr"/>
+          <a:lstStyle/>
+          <a:p>
+            <a:pPr indent="0" marL="0">
+              <a:buNone/>
+            </a:pPr>
+            <a:r>
+              <a:rPr lang="en-US" sz="1600" b="1" dirty="0">
+                <a:solidFill>
+                  <a:schemeClr val="accent1"/>
+                </a:solidFill>
+              </a:rPr>
+              <a:t>Pinnacle leads because it does not ban winners</a:t>
+            </a:r>
+            <a:endParaRPr lang="en-US" sz="1600" dirty="0"/>
+          </a:p>
+        </p:txBody>
+      </p:sp>
+      <p:sp>
+        <p:nvSpPr>
+          <p:cNvPr id="6" name="Text 4"/>
+          <p:cNvSpPr txBox="1"/>
+          <p:nvPr/>
+        </p:nvSpPr>
+        <p:spPr>
+          <a:xfrm>
+            <a:off x="6675120" y="2670048"/>
+            <a:ext cx="4846320" cy="822960"/>
+          </a:xfrm>
+          <a:prstGeom prst="rect">
+            <a:avLst/>
+          </a:prstGeom>
+          <a:noFill/>
+          <a:ln/>
+        </p:spPr>
+        <p:txBody>
+          <a:bodyPr wrap="square" lIns="0" tIns="0" rIns="0" bIns="0" rtlCol="0" anchor="ctr"/>
+          <a:lstStyle/>
+          <a:p>
+            <a:pPr indent="0" marL="0">
+              <a:buNone/>
+            </a:pPr>
+            <a:r>
+              <a:rPr lang="en-US" sz="1350" dirty="0">
+                <a:solidFill>
+                  <a:schemeClr val="accent5"/>
+                </a:solidFill>
+              </a:rPr>
+              <a:t>Low margin, and informed bettors are allowed to correct its price instead of being shut out.</a:t>
+            </a:r>
+            <a:endParaRPr lang="en-US" sz="1350" dirty="0"/>
+          </a:p>
+        </p:txBody>
+      </p:sp>
+      <p:sp>
+        <p:nvSpPr>
+          <p:cNvPr id="7" name="Text 5"/>
+          <p:cNvSpPr txBox="1"/>
+          <p:nvPr/>
+        </p:nvSpPr>
+        <p:spPr>
+          <a:xfrm>
+            <a:off x="640080" y="3858768"/>
+            <a:ext cx="5852160" cy="457200"/>
+          </a:xfrm>
+          <a:prstGeom prst="rect">
+            <a:avLst/>
+          </a:prstGeom>
+          <a:noFill/>
+          <a:ln/>
+        </p:spPr>
+        <p:txBody>
+          <a:bodyPr wrap="square" lIns="0" tIns="0" rIns="0" bIns="0" rtlCol="0" anchor="ctr"/>
+          <a:lstStyle/>
+          <a:p>
+            <a:pPr indent="0" marL="0">
+              <a:buNone/>
+            </a:pPr>
+            <a:r>
+              <a:rPr lang="en-US" sz="1600" b="1" dirty="0">
+                <a:solidFill>
+                  <a:schemeClr val="accent1"/>
+                </a:solidFill>
+              </a:rPr>
+              <a:t>In 2025-26 the best forecaster is not a bookmaker</a:t>
+            </a:r>
+            <a:endParaRPr lang="en-US" sz="1600" dirty="0"/>
+          </a:p>
+        </p:txBody>
+      </p:sp>
+      <p:sp>
+        <p:nvSpPr>
+          <p:cNvPr id="8" name="Text 6"/>
+          <p:cNvSpPr txBox="1"/>
+          <p:nvPr/>
+        </p:nvSpPr>
+        <p:spPr>
+          <a:xfrm>
+            <a:off x="6675120" y="3858768"/>
+            <a:ext cx="4846320" cy="822960"/>
+          </a:xfrm>
+          <a:prstGeom prst="rect">
+            <a:avLst/>
+          </a:prstGeom>
+          <a:noFill/>
+          <a:ln/>
+        </p:spPr>
+        <p:txBody>
+          <a:bodyPr wrap="square" lIns="0" tIns="0" rIns="0" bIns="0" rtlCol="0" anchor="ctr"/>
+          <a:lstStyle/>
+          <a:p>
+            <a:pPr indent="0" marL="0">
+              <a:buNone/>
+            </a:pPr>
+            <a:r>
+              <a:rPr lang="en-US" sz="1350" dirty="0">
+                <a:solidFill>
+                  <a:schemeClr val="accent5"/>
+                </a:solidFill>
+              </a:rPr>
+              <a:t>Betfair Exchange, a market price carrying no operator margin; when Pinnacle also quotes, the two cannot be told apart.</a:t>
+            </a:r>
+            <a:endParaRPr lang="en-US" sz="1350" dirty="0"/>
+          </a:p>
+        </p:txBody>
+      </p:sp>
+      <p:sp>
+        <p:nvSpPr>
+          <p:cNvPr id="9" name="Text 7"/>
+          <p:cNvSpPr txBox="1"/>
+          <p:nvPr/>
+        </p:nvSpPr>
+        <p:spPr>
+          <a:xfrm>
+            <a:off x="640080" y="5047488"/>
+            <a:ext cx="5852160" cy="457200"/>
+          </a:xfrm>
+          <a:prstGeom prst="rect">
+            <a:avLst/>
+          </a:prstGeom>
+          <a:noFill/>
+          <a:ln/>
+        </p:spPr>
+        <p:txBody>
+          <a:bodyPr wrap="square" lIns="0" tIns="0" rIns="0" bIns="0" rtlCol="0" anchor="ctr"/>
+          <a:lstStyle/>
+          <a:p>
+            <a:pPr indent="0" marL="0">
+              <a:buNone/>
+            </a:pPr>
+            <a:r>
+              <a:rPr lang="en-US" sz="1600" b="1" dirty="0">
+                <a:solidFill>
+                  <a:schemeClr val="accent2"/>
+                </a:solidFill>
+              </a:rPr>
+              <a:t>The market got dearer, not better</a:t>
+            </a:r>
+            <a:endParaRPr lang="en-US" sz="1600" dirty="0"/>
+          </a:p>
+        </p:txBody>
+      </p:sp>
+      <p:sp>
+        <p:nvSpPr>
+          <p:cNvPr id="10" name="Text 8"/>
+          <p:cNvSpPr txBox="1"/>
+          <p:nvPr/>
+        </p:nvSpPr>
+        <p:spPr>
+          <a:xfrm>
+            <a:off x="6675120" y="5047488"/>
+            <a:ext cx="4846320" cy="822960"/>
+          </a:xfrm>
+          <a:prstGeom prst="rect">
+            <a:avLst/>
+          </a:prstGeom>
+          <a:noFill/>
+          <a:ln/>
+        </p:spPr>
+        <p:txBody>
+          <a:bodyPr wrap="square" lIns="0" tIns="0" rIns="0" bIns="0" rtlCol="0" anchor="ctr"/>
+          <a:lstStyle/>
+          <a:p>
+            <a:pPr indent="0" marL="0">
+              <a:buNone/>
+            </a:pPr>
+            <a:r>
+              <a:rPr lang="en-US" sz="1350" dirty="0">
+                <a:solidFill>
+                  <a:schemeClr val="accent5"/>
+                </a:solidFill>
+              </a:rPr>
+              <a:t>Overround 4.42% → 6.00% (p = 0.0007) while no series shows a significant trend in log-loss.</a:t>
+            </a:r>
+            <a:endParaRPr lang="en-US" sz="1350" dirty="0"/>
+          </a:p>
+        </p:txBody>
+      </p:sp>
+      <p:sp>
+        <p:nvSpPr>
+          <p:cNvPr id="11" name="Text 9"/>
+          <p:cNvSpPr txBox="1"/>
+          <p:nvPr/>
+        </p:nvSpPr>
+        <p:spPr>
+          <a:xfrm>
+            <a:off x="640080" y="5760720"/>
+            <a:ext cx="10881360" cy="731520"/>
+          </a:xfrm>
+          <a:prstGeom prst="rect">
+            <a:avLst/>
+          </a:prstGeom>
+          <a:noFill/>
+          <a:ln/>
+        </p:spPr>
+        <p:txBody>
+          <a:bodyPr wrap="square" rtlCol="0" anchor="ctr"/>
+          <a:lstStyle/>
+          <a:p>
+            <a:pPr indent="0" marL="0">
+              <a:buNone/>
+            </a:pPr>
+            <a:r>
+              <a:rPr lang="en-US" sz="1500" i="1" dirty="0">
+                <a:solidFill>
+                  <a:schemeClr val="tx1"/>
+                </a:solidFill>
+              </a:rPr>
+              <a:t>Shin's parameter z IS the estimated share of informed bettors, a social quantity, entering the method as a nuisance parameter to be removed.</a:t>
+            </a:r>
+            <a:endParaRPr lang="en-US" sz="1500" dirty="0"/>
+          </a:p>
+        </p:txBody>
+      </p:sp>
+      <p:sp>
+        <p:nvSpPr>
+          <p:cNvPr id="25" name="Slide Number Placeholder 0"/>
+          <p:cNvSpPr>
+            <a:spLocks noGrp="1"/>
+          </p:cNvSpPr>
           <p:nvPr>
-            <p:ph idx="101" type="body" hasCustomPrompt="1"/>
+            <p:ph type="sldNum" sz="quarter" idx="4294967295"/>
           </p:nvPr>
         </p:nvSpPr>
         <p:spPr>
           <a:xfrm>
-            <a:off x="914400" y="4114800"/>
-            <a:ext cx="10332720" cy="1645920"/>
-          </a:xfrm>
-          <a:prstGeom prst="rect">
-            <a:avLst/>
-          </a:prstGeom>
-          <a:noFill/>
-          <a:ln/>
-        </p:spPr>
-        <p:txBody>
-          <a:bodyPr wrap="square" rtlCol="0" anchor="t"/>
-          <a:lstStyle/>
-          <a:p>
-            <a:pPr algn="l" indent="0" marL="0">
-              <a:buNone/>
-            </a:pPr>
-            <a:r>
-              <a:rPr lang="en-US" sz="1700" dirty="0">
-                <a:solidFill>
-                  <a:srgbClr val="CBD5E1"/>
-                </a:solidFill>
-              </a:rPr>
-              <a:t>The significant profits are against two recreational-facing houses. Against the one house that does NOT exclude winning players, the simulation loses significantly. The sharp house has the right price because it lets informed money correct it; the soft ones have the wrong price because they drive that money away. Account restrictions are not measured here: the data are prices, not customer outcomes.</a:t>
-            </a:r>
-            <a:endParaRPr lang="en-US" sz="1700" dirty="0"/>
+            <a:off x="11521440" y="6355080"/>
+            <a:ext cx="800000" cy="300000"/>
+          </a:xfrm>
+          <a:prstGeom prst="rect">
+            <a:avLst/>
+          </a:prstGeom>
+          <a:extLst>
+            <a:ext uri="{C572A759-6A51-4108-AA02-DFA0A04FC94B}">
+              <ma14:wrappingTextBoxFlag xmlns:ma14="http://schemas.microsoft.com/office/mac/drawingml/2011/main" val="0"/>
+            </a:ext>
+          </a:extLst>
+        </p:spPr>
+        <p:txBody>
+          <a:bodyPr/>
+          <a:lstStyle>
+            <a:lvl1pPr>
+              <a:defRPr sz="1100">
+                <a:solidFill>
+                  <a:schemeClr val="accent6"/>
+                </a:solidFill>
+              </a:defRPr>
+            </a:lvl1pPr>
+          </a:lstStyle>
+          <a:p>
+            <a:pPr algn="l"/>
+            <a:fld id="{F7021451-1387-4CA6-816F-3879F97B5CBC}" type="slidenum">
+              <a:rPr b="0" lang="en-US"/>
+              <a:t>29</a:t>
+            </a:fld>
+            <a:endParaRPr lang="en-US"/>
           </a:p>
         </p:txBody>
       </p:sp>
@@ -13900,8 +14474,8 @@
         </p:nvSpPr>
         <p:spPr>
           <a:xfrm>
-            <a:off x="640080" y="411480"/>
-            <a:ext cx="10881360" cy="777240"/>
+            <a:off x="914400" y="1737360"/>
+            <a:ext cx="10332720" cy="2194560"/>
           </a:xfrm>
           <a:prstGeom prst="rect">
             <a:avLst/>
@@ -13917,519 +14491,52 @@
               <a:buNone/>
             </a:pPr>
             <a:r>
-              <a:rPr lang="en-US" sz="3000" b="1" dirty="0">
-                <a:solidFill>
-                  <a:schemeClr val="tx2"/>
-                </a:solidFill>
-              </a:rPr>
-              <a:t>Conclusions</a:t>
-            </a:r>
-            <a:endParaRPr lang="en-US" sz="3000" dirty="0"/>
-          </a:p>
-        </p:txBody>
-      </p:sp>
-      <p:sp>
-        <p:nvSpPr>
-          <p:cNvPr id="3" name="cc-0"/>
+              <a:rPr lang="en-US" sz="3400" b="1" dirty="0">
+                <a:solidFill>
+                  <a:schemeClr val="bg1"/>
+                </a:solidFill>
+              </a:rPr>
+              <a:t>The edge exists where it cannot be used</a:t>
+            </a:r>
+            <a:endParaRPr lang="en-US" sz="3400" dirty="0"/>
+          </a:p>
+        </p:txBody>
+      </p:sp>
+      <p:sp>
+        <p:nvSpPr>
+          <p:cNvPr id="3" name="Text 0"/>
           <p:cNvSpPr/>
-          <p:nvPr/>
-        </p:nvSpPr>
-        <p:spPr>
-          <a:xfrm>
-            <a:off x="640080" y="1554480"/>
-            <a:ext cx="256032" cy="256032"/>
-          </a:xfrm>
-          <a:prstGeom prst="ellipse">
-            <a:avLst/>
-          </a:prstGeom>
-          <a:solidFill>
-            <a:schemeClr val="accent3"/>
-          </a:solidFill>
-          <a:ln/>
-        </p:spPr>
-      </p:sp>
-      <p:sp>
-        <p:nvSpPr>
-          <p:cNvPr id="4" name="Text 2"/>
-          <p:cNvSpPr txBox="1"/>
-          <p:nvPr/>
-        </p:nvSpPr>
-        <p:spPr>
-          <a:xfrm>
-            <a:off x="1078992" y="1463040"/>
-            <a:ext cx="3931920" cy="411480"/>
-          </a:xfrm>
-          <a:prstGeom prst="rect">
-            <a:avLst/>
-          </a:prstGeom>
-          <a:noFill/>
-          <a:ln/>
-        </p:spPr>
-        <p:txBody>
-          <a:bodyPr wrap="square" lIns="0" tIns="0" rIns="0" bIns="0" rtlCol="0" anchor="t"/>
-          <a:lstStyle/>
-          <a:p>
-            <a:pPr indent="0" marL="0">
-              <a:buNone/>
-            </a:pPr>
-            <a:r>
-              <a:rPr lang="en-US" sz="1600" b="1" dirty="0">
-                <a:solidFill>
-                  <a:schemeClr val="tx2"/>
-                </a:solidFill>
-              </a:rPr>
-              <a:t>The framework applies</a:t>
-            </a:r>
-            <a:endParaRPr lang="en-US" sz="1600" dirty="0"/>
-          </a:p>
-        </p:txBody>
-      </p:sp>
-      <p:sp>
-        <p:nvSpPr>
-          <p:cNvPr id="5" name="Text 3"/>
-          <p:cNvSpPr txBox="1"/>
-          <p:nvPr/>
-        </p:nvSpPr>
-        <p:spPr>
-          <a:xfrm>
-            <a:off x="5166360" y="1463040"/>
-            <a:ext cx="6355080" cy="777240"/>
-          </a:xfrm>
-          <a:prstGeom prst="rect">
-            <a:avLst/>
-          </a:prstGeom>
-          <a:noFill/>
-          <a:ln/>
-        </p:spPr>
-        <p:txBody>
-          <a:bodyPr wrap="square" lIns="0" tIns="0" rIns="0" bIns="0" rtlCol="0" anchor="t"/>
-          <a:lstStyle/>
-          <a:p>
-            <a:pPr indent="0" marL="0">
-              <a:buNone/>
-            </a:pPr>
-            <a:r>
-              <a:rPr lang="en-US" sz="1350" dirty="0">
-                <a:solidFill>
-                  <a:schemeClr val="accent5"/>
-                </a:solidFill>
-              </a:rPr>
-              <a:t>An online mixture of published odds beats the uniform average and almost every individual bookmaker, with no distributional assumption.</a:t>
-            </a:r>
-            <a:endParaRPr lang="en-US" sz="1350" dirty="0"/>
-          </a:p>
-        </p:txBody>
-      </p:sp>
-      <p:sp>
-        <p:nvSpPr>
-          <p:cNvPr id="6" name="cc-1"/>
-          <p:cNvSpPr/>
-          <p:nvPr/>
-        </p:nvSpPr>
-        <p:spPr>
-          <a:xfrm>
-            <a:off x="640080" y="2496312"/>
-            <a:ext cx="256032" cy="256032"/>
-          </a:xfrm>
-          <a:prstGeom prst="ellipse">
-            <a:avLst/>
-          </a:prstGeom>
-          <a:solidFill>
-            <a:schemeClr val="accent1"/>
-          </a:solidFill>
-          <a:ln/>
-        </p:spPr>
-      </p:sp>
-      <p:sp>
-        <p:nvSpPr>
-          <p:cNvPr id="7" name="Text 5"/>
-          <p:cNvSpPr txBox="1"/>
-          <p:nvPr/>
-        </p:nvSpPr>
-        <p:spPr>
-          <a:xfrm>
-            <a:off x="1078992" y="2404872"/>
-            <a:ext cx="3931920" cy="411480"/>
-          </a:xfrm>
-          <a:prstGeom prst="rect">
-            <a:avLst/>
-          </a:prstGeom>
-          <a:noFill/>
-          <a:ln/>
-        </p:spPr>
-        <p:txBody>
-          <a:bodyPr wrap="square" lIns="0" tIns="0" rIns="0" bIns="0" rtlCol="0" anchor="t"/>
-          <a:lstStyle/>
-          <a:p>
-            <a:pPr indent="0" marL="0">
-              <a:buNone/>
-            </a:pPr>
-            <a:r>
-              <a:rPr lang="en-US" sz="1600" b="1" dirty="0">
-                <a:solidFill>
-                  <a:schemeClr val="tx2"/>
-                </a:solidFill>
-              </a:rPr>
-              <a:t>It reaches the market's edge</a:t>
-            </a:r>
-            <a:endParaRPr lang="en-US" sz="1600" dirty="0"/>
-          </a:p>
-        </p:txBody>
-      </p:sp>
-      <p:sp>
-        <p:nvSpPr>
-          <p:cNvPr id="8" name="Text 6"/>
-          <p:cNvSpPr txBox="1"/>
-          <p:nvPr/>
-        </p:nvSpPr>
-        <p:spPr>
-          <a:xfrm>
-            <a:off x="5166360" y="2404872"/>
-            <a:ext cx="6355080" cy="777240"/>
-          </a:xfrm>
-          <a:prstGeom prst="rect">
-            <a:avLst/>
-          </a:prstGeom>
-          <a:noFill/>
-          <a:ln/>
-        </p:spPr>
-        <p:txBody>
-          <a:bodyPr wrap="square" lIns="0" tIns="0" rIns="0" bIns="0" rtlCol="0" anchor="t"/>
-          <a:lstStyle/>
-          <a:p>
-            <a:pPr indent="0" marL="0">
-              <a:buNone/>
-            </a:pPr>
-            <a:r>
-              <a:rPr lang="en-US" sz="1350" dirty="0">
-                <a:solidFill>
-                  <a:schemeClr val="accent5"/>
-                </a:solidFill>
-              </a:rPr>
-              <a:t>Level with the sharpest bookmaker, but behind an exchange with no operator margin.</a:t>
-            </a:r>
-            <a:endParaRPr lang="en-US" sz="1350" dirty="0"/>
-          </a:p>
-        </p:txBody>
-      </p:sp>
-      <p:sp>
-        <p:nvSpPr>
-          <p:cNvPr id="9" name="cc-2"/>
-          <p:cNvSpPr/>
-          <p:nvPr/>
-        </p:nvSpPr>
-        <p:spPr>
-          <a:xfrm>
-            <a:off x="640080" y="3438144"/>
-            <a:ext cx="256032" cy="256032"/>
-          </a:xfrm>
-          <a:prstGeom prst="ellipse">
-            <a:avLst/>
-          </a:prstGeom>
-          <a:solidFill>
-            <a:schemeClr val="accent4"/>
-          </a:solidFill>
-          <a:ln/>
-        </p:spPr>
-      </p:sp>
-      <p:sp>
-        <p:nvSpPr>
-          <p:cNvPr id="10" name="Text 8"/>
-          <p:cNvSpPr txBox="1"/>
-          <p:nvPr/>
-        </p:nvSpPr>
-        <p:spPr>
-          <a:xfrm>
-            <a:off x="1078992" y="3346704"/>
-            <a:ext cx="3931920" cy="411480"/>
-          </a:xfrm>
-          <a:prstGeom prst="rect">
-            <a:avLst/>
-          </a:prstGeom>
-          <a:noFill/>
-          <a:ln/>
-        </p:spPr>
-        <p:txBody>
-          <a:bodyPr wrap="square" lIns="0" tIns="0" rIns="0" bIns="0" rtlCol="0" anchor="t"/>
-          <a:lstStyle/>
-          <a:p>
-            <a:pPr indent="0" marL="0">
-              <a:buNone/>
-            </a:pPr>
-            <a:r>
-              <a:rPr lang="en-US" sz="1600" b="1" dirty="0">
-                <a:solidFill>
-                  <a:schemeClr val="tx2"/>
-                </a:solidFill>
-              </a:rPr>
-              <a:t>Part of the gain is geometry</a:t>
-            </a:r>
-            <a:endParaRPr lang="en-US" sz="1600" dirty="0"/>
-          </a:p>
-        </p:txBody>
-      </p:sp>
-      <p:sp>
-        <p:nvSpPr>
-          <p:cNvPr id="11" name="Text 9"/>
-          <p:cNvSpPr txBox="1"/>
-          <p:nvPr/>
-        </p:nvSpPr>
-        <p:spPr>
-          <a:xfrm>
-            <a:off x="5166360" y="3346704"/>
-            <a:ext cx="6355080" cy="777240"/>
-          </a:xfrm>
-          <a:prstGeom prst="rect">
-            <a:avLst/>
-          </a:prstGeom>
-          <a:noFill/>
-          <a:ln/>
-        </p:spPr>
-        <p:txBody>
-          <a:bodyPr wrap="square" lIns="0" tIns="0" rIns="0" bIns="0" rtlCol="0" anchor="t"/>
-          <a:lstStyle/>
-          <a:p>
-            <a:pPr indent="0" marL="0">
-              <a:buNone/>
-            </a:pPr>
-            <a:r>
-              <a:rPr lang="en-US" sz="1350" dirty="0">
-                <a:solidFill>
-                  <a:schemeClr val="accent5"/>
-                </a:solidFill>
-              </a:rPr>
-              <a:t>41% of the margin over uniform, isolated with a zero-step control. Future comparisons should carry one.</a:t>
-            </a:r>
-            <a:endParaRPr lang="en-US" sz="1350" dirty="0"/>
-          </a:p>
-        </p:txBody>
-      </p:sp>
-      <p:sp>
-        <p:nvSpPr>
-          <p:cNvPr id="12" name="cc-3"/>
-          <p:cNvSpPr/>
-          <p:nvPr/>
-        </p:nvSpPr>
-        <p:spPr>
-          <a:xfrm>
-            <a:off x="640080" y="4379976"/>
-            <a:ext cx="256032" cy="256032"/>
-          </a:xfrm>
-          <a:prstGeom prst="ellipse">
-            <a:avLst/>
-          </a:prstGeom>
-          <a:solidFill>
-            <a:schemeClr val="accent1"/>
-          </a:solidFill>
-          <a:ln/>
-        </p:spPr>
-      </p:sp>
-      <p:sp>
-        <p:nvSpPr>
-          <p:cNvPr id="13" name="Text 11"/>
-          <p:cNvSpPr txBox="1"/>
-          <p:nvPr/>
-        </p:nvSpPr>
-        <p:spPr>
-          <a:xfrm>
-            <a:off x="1078992" y="4288536"/>
-            <a:ext cx="3931920" cy="411480"/>
-          </a:xfrm>
-          <a:prstGeom prst="rect">
-            <a:avLst/>
-          </a:prstGeom>
-          <a:noFill/>
-          <a:ln/>
-        </p:spPr>
-        <p:txBody>
-          <a:bodyPr wrap="square" lIns="0" tIns="0" rIns="0" bIns="0" rtlCol="0" anchor="t"/>
-          <a:lstStyle/>
-          <a:p>
-            <a:pPr indent="0" marL="0">
-              <a:buNone/>
-            </a:pPr>
-            <a:r>
-              <a:rPr lang="en-US" sz="1600" b="1" dirty="0">
-                <a:solidFill>
-                  <a:schemeClr val="tx2"/>
-                </a:solidFill>
-              </a:rPr>
-              <a:t>Heterogeneity is a precondition</a:t>
-            </a:r>
-            <a:endParaRPr lang="en-US" sz="1600" dirty="0"/>
-          </a:p>
-        </p:txBody>
-      </p:sp>
-      <p:sp>
-        <p:nvSpPr>
-          <p:cNvPr id="14" name="Text 12"/>
-          <p:cNvSpPr txBox="1"/>
-          <p:nvPr/>
-        </p:nvSpPr>
-        <p:spPr>
-          <a:xfrm>
-            <a:off x="5166360" y="4288536"/>
-            <a:ext cx="6355080" cy="777240"/>
-          </a:xfrm>
-          <a:prstGeom prst="rect">
-            <a:avLst/>
-          </a:prstGeom>
-          <a:noFill/>
-          <a:ln/>
-        </p:spPr>
-        <p:txBody>
-          <a:bodyPr wrap="square" lIns="0" tIns="0" rIns="0" bIns="0" rtlCol="0" anchor="t"/>
-          <a:lstStyle/>
-          <a:p>
-            <a:pPr indent="0" marL="0">
-              <a:buNone/>
-            </a:pPr>
-            <a:r>
-              <a:rPr lang="en-US" sz="1350" dirty="0">
-                <a:solidFill>
-                  <a:schemeClr val="accent5"/>
-                </a:solidFill>
-              </a:rPr>
-              <a:t>Learned weighting pays only when the experts are produced by different processes.</a:t>
-            </a:r>
-            <a:endParaRPr lang="en-US" sz="1350" dirty="0"/>
-          </a:p>
-        </p:txBody>
-      </p:sp>
-      <p:sp>
-        <p:nvSpPr>
-          <p:cNvPr id="15" name="cc-4"/>
-          <p:cNvSpPr/>
-          <p:nvPr/>
-        </p:nvSpPr>
-        <p:spPr>
-          <a:xfrm>
-            <a:off x="640080" y="5321808"/>
-            <a:ext cx="256032" cy="256032"/>
-          </a:xfrm>
-          <a:prstGeom prst="ellipse">
-            <a:avLst/>
-          </a:prstGeom>
-          <a:solidFill>
-            <a:schemeClr val="accent2"/>
-          </a:solidFill>
-          <a:ln/>
-        </p:spPr>
-      </p:sp>
-      <p:sp>
-        <p:nvSpPr>
-          <p:cNvPr id="16" name="Text 14"/>
-          <p:cNvSpPr txBox="1"/>
-          <p:nvPr/>
-        </p:nvSpPr>
-        <p:spPr>
-          <a:xfrm>
-            <a:off x="1078992" y="5230368"/>
-            <a:ext cx="3931920" cy="411480"/>
-          </a:xfrm>
-          <a:prstGeom prst="rect">
-            <a:avLst/>
-          </a:prstGeom>
-          <a:noFill/>
-          <a:ln/>
-        </p:spPr>
-        <p:txBody>
-          <a:bodyPr wrap="square" lIns="0" tIns="0" rIns="0" bIns="0" rtlCol="0" anchor="t"/>
-          <a:lstStyle/>
-          <a:p>
-            <a:pPr indent="0" marL="0">
-              <a:buNone/>
-            </a:pPr>
-            <a:r>
-              <a:rPr lang="en-US" sz="1600" b="1" dirty="0">
-                <a:solidFill>
-                  <a:schemeClr val="tx2"/>
-                </a:solidFill>
-              </a:rPr>
-              <a:t>Better prediction is not profit</a:t>
-            </a:r>
-            <a:endParaRPr lang="en-US" sz="1600" dirty="0"/>
-          </a:p>
-        </p:txBody>
-      </p:sp>
-      <p:sp>
-        <p:nvSpPr>
-          <p:cNvPr id="17" name="Text 15"/>
-          <p:cNvSpPr txBox="1"/>
-          <p:nvPr/>
-        </p:nvSpPr>
-        <p:spPr>
-          <a:xfrm>
-            <a:off x="5166360" y="5230368"/>
-            <a:ext cx="6355080" cy="777240"/>
-          </a:xfrm>
-          <a:prstGeom prst="rect">
-            <a:avLst/>
-          </a:prstGeom>
-          <a:noFill/>
-          <a:ln/>
-        </p:spPr>
-        <p:txBody>
-          <a:bodyPr wrap="square" lIns="0" tIns="0" rIns="0" bIns="0" rtlCol="0" anchor="t"/>
-          <a:lstStyle/>
-          <a:p>
-            <a:pPr indent="0" marL="0">
-              <a:buNone/>
-            </a:pPr>
-            <a:r>
-              <a:rPr lang="en-US" sz="1350" dirty="0">
-                <a:solidFill>
-                  <a:schemeClr val="accent5"/>
-                </a:solidFill>
-              </a:rPr>
-              <a:t>The quality gained falls short of the margin, and the edge sits where access is controlled.</a:t>
-            </a:r>
-            <a:endParaRPr lang="en-US" sz="1350" dirty="0"/>
-          </a:p>
-        </p:txBody>
-      </p:sp>
-      <p:sp>
-        <p:nvSpPr>
-          <p:cNvPr id="25" name="Slide Number Placeholder 0"/>
-          <p:cNvSpPr>
-            <a:spLocks noGrp="1"/>
-          </p:cNvSpPr>
           <p:nvPr>
-            <p:ph type="sldNum" sz="quarter" idx="4294967295"/>
+            <p:ph idx="101" type="body" hasCustomPrompt="1"/>
           </p:nvPr>
         </p:nvSpPr>
         <p:spPr>
           <a:xfrm>
-            <a:off x="11521440" y="6355080"/>
-            <a:ext cx="800000" cy="300000"/>
-          </a:xfrm>
-          <a:prstGeom prst="rect">
-            <a:avLst/>
-          </a:prstGeom>
-          <a:extLst>
-            <a:ext uri="{C572A759-6A51-4108-AA02-DFA0A04FC94B}">
-              <ma14:wrappingTextBoxFlag xmlns:ma14="http://schemas.microsoft.com/office/mac/drawingml/2011/main" val="0"/>
-            </a:ext>
-          </a:extLst>
-        </p:spPr>
-        <p:txBody>
-          <a:bodyPr/>
-          <a:lstStyle>
-            <a:lvl1pPr>
-              <a:defRPr sz="1100">
-                <a:solidFill>
-                  <a:schemeClr val="accent6"/>
-                </a:solidFill>
-              </a:defRPr>
-            </a:lvl1pPr>
-          </a:lstStyle>
-          <a:p>
-            <a:pPr algn="l"/>
-            <a:fld id="{F7021451-1387-4CA6-816F-3879F97B5CBC}" type="slidenum">
-              <a:rPr b="0" lang="en-US"/>
-              <a:t>30</a:t>
-            </a:fld>
-            <a:endParaRPr lang="en-US"/>
+            <a:off x="914400" y="4114800"/>
+            <a:ext cx="10332720" cy="1645920"/>
+          </a:xfrm>
+          <a:prstGeom prst="rect">
+            <a:avLst/>
+          </a:prstGeom>
+          <a:noFill/>
+          <a:ln/>
+        </p:spPr>
+        <p:txBody>
+          <a:bodyPr wrap="square" rtlCol="0" anchor="t"/>
+          <a:lstStyle/>
+          <a:p>
+            <a:pPr algn="l" indent="0" marL="0">
+              <a:buNone/>
+            </a:pPr>
+            <a:r>
+              <a:rPr lang="en-US" sz="1700" dirty="0">
+                <a:solidFill>
+                  <a:srgbClr val="CBD5E1"/>
+                </a:solidFill>
+              </a:rPr>
+              <a:t>The significant profits are against two recreational-facing houses. Against the one house that does NOT exclude winning players, the simulation loses significantly. The sharp house has the right price because it lets informed money correct it; the soft ones have the wrong price because they drive that money away. Account restrictions are not measured here: the data are prices, not customer outcomes.</a:t>
+            </a:r>
+            <a:endParaRPr lang="en-US" sz="1700" dirty="0"/>
           </a:p>
         </p:txBody>
       </p:sp>
@@ -14490,7 +14597,7 @@
                   <a:schemeClr val="tx2"/>
                 </a:solidFill>
               </a:rPr>
-              <a:t>Future work</a:t>
+              <a:t>Conclusions</a:t>
             </a:r>
             <a:endParaRPr lang="en-US" sz="3000" dirty="0"/>
           </a:p>
@@ -14498,14 +14605,106 @@
       </p:sp>
       <p:sp>
         <p:nvSpPr>
-          <p:cNvPr id="3" name="circle-1"/>
+          <p:cNvPr id="3" name="cc-0"/>
           <p:cNvSpPr/>
           <p:nvPr/>
         </p:nvSpPr>
         <p:spPr>
           <a:xfrm>
-            <a:off x="640080" y="1600200"/>
-            <a:ext cx="566928" cy="566928"/>
+            <a:off x="640080" y="1554480"/>
+            <a:ext cx="256032" cy="256032"/>
+          </a:xfrm>
+          <a:prstGeom prst="ellipse">
+            <a:avLst/>
+          </a:prstGeom>
+          <a:solidFill>
+            <a:schemeClr val="accent3"/>
+          </a:solidFill>
+          <a:ln/>
+        </p:spPr>
+      </p:sp>
+      <p:sp>
+        <p:nvSpPr>
+          <p:cNvPr id="4" name="Text 2"/>
+          <p:cNvSpPr txBox="1"/>
+          <p:nvPr/>
+        </p:nvSpPr>
+        <p:spPr>
+          <a:xfrm>
+            <a:off x="1078992" y="1463040"/>
+            <a:ext cx="3931920" cy="411480"/>
+          </a:xfrm>
+          <a:prstGeom prst="rect">
+            <a:avLst/>
+          </a:prstGeom>
+          <a:noFill/>
+          <a:ln/>
+        </p:spPr>
+        <p:txBody>
+          <a:bodyPr wrap="square" lIns="0" tIns="0" rIns="0" bIns="0" rtlCol="0" anchor="t"/>
+          <a:lstStyle/>
+          <a:p>
+            <a:pPr indent="0" marL="0">
+              <a:buNone/>
+            </a:pPr>
+            <a:r>
+              <a:rPr lang="en-US" sz="1600" b="1" dirty="0">
+                <a:solidFill>
+                  <a:schemeClr val="tx2"/>
+                </a:solidFill>
+              </a:rPr>
+              <a:t>The framework applies</a:t>
+            </a:r>
+            <a:endParaRPr lang="en-US" sz="1600" dirty="0"/>
+          </a:p>
+        </p:txBody>
+      </p:sp>
+      <p:sp>
+        <p:nvSpPr>
+          <p:cNvPr id="5" name="Text 3"/>
+          <p:cNvSpPr txBox="1"/>
+          <p:nvPr/>
+        </p:nvSpPr>
+        <p:spPr>
+          <a:xfrm>
+            <a:off x="5166360" y="1463040"/>
+            <a:ext cx="6355080" cy="777240"/>
+          </a:xfrm>
+          <a:prstGeom prst="rect">
+            <a:avLst/>
+          </a:prstGeom>
+          <a:noFill/>
+          <a:ln/>
+        </p:spPr>
+        <p:txBody>
+          <a:bodyPr wrap="square" lIns="0" tIns="0" rIns="0" bIns="0" rtlCol="0" anchor="t"/>
+          <a:lstStyle/>
+          <a:p>
+            <a:pPr indent="0" marL="0">
+              <a:buNone/>
+            </a:pPr>
+            <a:r>
+              <a:rPr lang="en-US" sz="1350" dirty="0">
+                <a:solidFill>
+                  <a:schemeClr val="accent5"/>
+                </a:solidFill>
+              </a:rPr>
+              <a:t>An online mixture of published odds beats the uniform average and almost every individual bookmaker, with no distributional assumption.</a:t>
+            </a:r>
+            <a:endParaRPr lang="en-US" sz="1350" dirty="0"/>
+          </a:p>
+        </p:txBody>
+      </p:sp>
+      <p:sp>
+        <p:nvSpPr>
+          <p:cNvPr id="6" name="cc-1"/>
+          <p:cNvSpPr/>
+          <p:nvPr/>
+        </p:nvSpPr>
+        <p:spPr>
+          <a:xfrm>
+            <a:off x="640080" y="2496312"/>
+            <a:ext cx="256032" cy="256032"/>
           </a:xfrm>
           <a:prstGeom prst="ellipse">
             <a:avLst/>
@@ -14518,95 +14717,151 @@
       </p:sp>
       <p:sp>
         <p:nvSpPr>
-          <p:cNvPr id="4" name="Text 2"/>
+          <p:cNvPr id="7" name="Text 5"/>
           <p:cNvSpPr txBox="1"/>
           <p:nvPr/>
         </p:nvSpPr>
         <p:spPr>
           <a:xfrm>
-            <a:off x="640080" y="1600200"/>
-            <a:ext cx="566928" cy="566928"/>
-          </a:xfrm>
-          <a:prstGeom prst="rect">
-            <a:avLst/>
-          </a:prstGeom>
-          <a:noFill/>
-          <a:ln/>
-        </p:spPr>
-        <p:txBody>
-          <a:bodyPr wrap="square" lIns="0" tIns="0" rIns="0" bIns="0" rtlCol="0" anchor="ctr"/>
-          <a:lstStyle/>
-          <a:p>
-            <a:pPr algn="ctr" indent="0" marL="0">
-              <a:buNone/>
-            </a:pPr>
-            <a:r>
-              <a:rPr lang="en-US" sz="2000" b="1" dirty="0">
-                <a:solidFill>
-                  <a:srgbClr val="FFFFFF"/>
-                </a:solidFill>
-              </a:rPr>
-              <a:t>1</a:t>
-            </a:r>
-            <a:endParaRPr lang="en-US" sz="2000" dirty="0"/>
-          </a:p>
-        </p:txBody>
-      </p:sp>
-      <p:sp>
-        <p:nvSpPr>
-          <p:cNvPr id="5" name="Text 3"/>
+            <a:off x="1078992" y="2404872"/>
+            <a:ext cx="3931920" cy="411480"/>
+          </a:xfrm>
+          <a:prstGeom prst="rect">
+            <a:avLst/>
+          </a:prstGeom>
+          <a:noFill/>
+          <a:ln/>
+        </p:spPr>
+        <p:txBody>
+          <a:bodyPr wrap="square" lIns="0" tIns="0" rIns="0" bIns="0" rtlCol="0" anchor="t"/>
+          <a:lstStyle/>
+          <a:p>
+            <a:pPr indent="0" marL="0">
+              <a:buNone/>
+            </a:pPr>
+            <a:r>
+              <a:rPr lang="en-US" sz="1600" b="1" dirty="0">
+                <a:solidFill>
+                  <a:schemeClr val="tx2"/>
+                </a:solidFill>
+              </a:rPr>
+              <a:t>It reaches the market's edge</a:t>
+            </a:r>
+            <a:endParaRPr lang="en-US" sz="1600" dirty="0"/>
+          </a:p>
+        </p:txBody>
+      </p:sp>
+      <p:sp>
+        <p:nvSpPr>
+          <p:cNvPr id="8" name="Text 6"/>
           <p:cNvSpPr txBox="1"/>
           <p:nvPr/>
         </p:nvSpPr>
         <p:spPr>
           <a:xfrm>
-            <a:off x="1508760" y="1554480"/>
-            <a:ext cx="10058400" cy="411480"/>
-          </a:xfrm>
-          <a:prstGeom prst="rect">
-            <a:avLst/>
-          </a:prstGeom>
-          <a:noFill/>
-          <a:ln/>
-        </p:spPr>
-        <p:txBody>
-          <a:bodyPr wrap="square" lIns="0" tIns="0" rIns="0" bIns="0" rtlCol="0" anchor="ctr"/>
+            <a:off x="5166360" y="2404872"/>
+            <a:ext cx="6355080" cy="777240"/>
+          </a:xfrm>
+          <a:prstGeom prst="rect">
+            <a:avLst/>
+          </a:prstGeom>
+          <a:noFill/>
+          <a:ln/>
+        </p:spPr>
+        <p:txBody>
+          <a:bodyPr wrap="square" lIns="0" tIns="0" rIns="0" bIns="0" rtlCol="0" anchor="t"/>
           <a:lstStyle/>
           <a:p>
             <a:pPr indent="0" marL="0">
               <a:buNone/>
             </a:pPr>
             <a:r>
-              <a:rPr lang="en-US" sz="1800" b="1" dirty="0">
+              <a:rPr lang="en-US" sz="1350" dirty="0">
+                <a:solidFill>
+                  <a:schemeClr val="accent5"/>
+                </a:solidFill>
+              </a:rPr>
+              <a:t>Level with the sharpest bookmaker, but behind an exchange with no operator margin.</a:t>
+            </a:r>
+            <a:endParaRPr lang="en-US" sz="1350" dirty="0"/>
+          </a:p>
+        </p:txBody>
+      </p:sp>
+      <p:sp>
+        <p:nvSpPr>
+          <p:cNvPr id="9" name="cc-2"/>
+          <p:cNvSpPr/>
+          <p:nvPr/>
+        </p:nvSpPr>
+        <p:spPr>
+          <a:xfrm>
+            <a:off x="640080" y="3438144"/>
+            <a:ext cx="256032" cy="256032"/>
+          </a:xfrm>
+          <a:prstGeom prst="ellipse">
+            <a:avLst/>
+          </a:prstGeom>
+          <a:solidFill>
+            <a:schemeClr val="accent4"/>
+          </a:solidFill>
+          <a:ln/>
+        </p:spPr>
+      </p:sp>
+      <p:sp>
+        <p:nvSpPr>
+          <p:cNvPr id="10" name="Text 8"/>
+          <p:cNvSpPr txBox="1"/>
+          <p:nvPr/>
+        </p:nvSpPr>
+        <p:spPr>
+          <a:xfrm>
+            <a:off x="1078992" y="3346704"/>
+            <a:ext cx="3931920" cy="411480"/>
+          </a:xfrm>
+          <a:prstGeom prst="rect">
+            <a:avLst/>
+          </a:prstGeom>
+          <a:noFill/>
+          <a:ln/>
+        </p:spPr>
+        <p:txBody>
+          <a:bodyPr wrap="square" lIns="0" tIns="0" rIns="0" bIns="0" rtlCol="0" anchor="t"/>
+          <a:lstStyle/>
+          <a:p>
+            <a:pPr indent="0" marL="0">
+              <a:buNone/>
+            </a:pPr>
+            <a:r>
+              <a:rPr lang="en-US" sz="1600" b="1" dirty="0">
                 <a:solidFill>
                   <a:schemeClr val="tx2"/>
                 </a:solidFill>
               </a:rPr>
-              <a:t>A live odds feed</a:t>
-            </a:r>
-            <a:endParaRPr lang="en-US" sz="1800" dirty="0"/>
-          </a:p>
-        </p:txBody>
-      </p:sp>
-      <p:sp>
-        <p:nvSpPr>
-          <p:cNvPr id="6" name="Text 4"/>
+              <a:t>Part of the gain is geometry</a:t>
+            </a:r>
+            <a:endParaRPr lang="en-US" sz="1600" dirty="0"/>
+          </a:p>
+        </p:txBody>
+      </p:sp>
+      <p:sp>
+        <p:nvSpPr>
+          <p:cNvPr id="11" name="Text 9"/>
           <p:cNvSpPr txBox="1"/>
           <p:nvPr/>
         </p:nvSpPr>
         <p:spPr>
           <a:xfrm>
-            <a:off x="1508760" y="1975104"/>
-            <a:ext cx="10058400" cy="1051560"/>
-          </a:xfrm>
-          <a:prstGeom prst="rect">
-            <a:avLst/>
-          </a:prstGeom>
-          <a:noFill/>
-          <a:ln/>
-        </p:spPr>
-        <p:txBody>
-          <a:bodyPr wrap="square" lIns="0" tIns="0" rIns="0" bIns="0" rtlCol="0" anchor="ctr"/>
+            <a:off x="5166360" y="3346704"/>
+            <a:ext cx="6355080" cy="777240"/>
+          </a:xfrm>
+          <a:prstGeom prst="rect">
+            <a:avLst/>
+          </a:prstGeom>
+          <a:noFill/>
+          <a:ln/>
+        </p:spPr>
+        <p:txBody>
+          <a:bodyPr wrap="square" lIns="0" tIns="0" rIns="0" bIns="0" rtlCol="0" anchor="t"/>
           <a:lstStyle/>
           <a:p>
             <a:pPr indent="0" marL="0">
@@ -14618,7 +14873,7 @@
                   <a:schemeClr val="accent5"/>
                 </a:solidFill>
               </a:rPr>
-              <a:t>Every result here says what the method WOULD have done. The three stages are online and causal, the state is one weight vector plus two scalars, so it runs in real time against a streaming API. That turns "a statistical edge exists" into "an exploitable edge exists", and records the price trajectory rather than two snapshots.</a:t>
+              <a:t>42% of the margin over uniform, isolated with a zero-step control. Future comparisons should carry one.</a:t>
             </a:r>
             <a:endParaRPr lang="en-US" sz="1350" dirty="0"/>
           </a:p>
@@ -14626,14 +14881,14 @@
       </p:sp>
       <p:sp>
         <p:nvSpPr>
-          <p:cNvPr id="7" name="circle-2"/>
+          <p:cNvPr id="12" name="cc-3"/>
           <p:cNvSpPr/>
           <p:nvPr/>
         </p:nvSpPr>
         <p:spPr>
           <a:xfrm>
-            <a:off x="640080" y="3200400"/>
-            <a:ext cx="566928" cy="566928"/>
+            <a:off x="640080" y="4379976"/>
+            <a:ext cx="256032" cy="256032"/>
           </a:xfrm>
           <a:prstGeom prst="ellipse">
             <a:avLst/>
@@ -14646,201 +14901,37 @@
       </p:sp>
       <p:sp>
         <p:nvSpPr>
-          <p:cNvPr id="8" name="Text 6"/>
-          <p:cNvSpPr txBox="1"/>
-          <p:nvPr/>
-        </p:nvSpPr>
-        <p:spPr>
-          <a:xfrm>
-            <a:off x="640080" y="3200400"/>
-            <a:ext cx="566928" cy="566928"/>
-          </a:xfrm>
-          <a:prstGeom prst="rect">
-            <a:avLst/>
-          </a:prstGeom>
-          <a:noFill/>
-          <a:ln/>
-        </p:spPr>
-        <p:txBody>
-          <a:bodyPr wrap="square" lIns="0" tIns="0" rIns="0" bIns="0" rtlCol="0" anchor="ctr"/>
-          <a:lstStyle/>
-          <a:p>
-            <a:pPr algn="ctr" indent="0" marL="0">
-              <a:buNone/>
-            </a:pPr>
-            <a:r>
-              <a:rPr lang="en-US" sz="2000" b="1" dirty="0">
-                <a:solidFill>
-                  <a:srgbClr val="FFFFFF"/>
-                </a:solidFill>
-              </a:rPr>
-              <a:t>2</a:t>
-            </a:r>
-            <a:endParaRPr lang="en-US" sz="2000" dirty="0"/>
-          </a:p>
-        </p:txBody>
-      </p:sp>
-      <p:sp>
-        <p:nvSpPr>
-          <p:cNvPr id="9" name="Text 7"/>
-          <p:cNvSpPr txBox="1"/>
-          <p:nvPr/>
-        </p:nvSpPr>
-        <p:spPr>
-          <a:xfrm>
-            <a:off x="1508760" y="3154680"/>
-            <a:ext cx="10058400" cy="411480"/>
-          </a:xfrm>
-          <a:prstGeom prst="rect">
-            <a:avLst/>
-          </a:prstGeom>
-          <a:noFill/>
-          <a:ln/>
-        </p:spPr>
-        <p:txBody>
-          <a:bodyPr wrap="square" lIns="0" tIns="0" rIns="0" bIns="0" rtlCol="0" anchor="ctr"/>
-          <a:lstStyle/>
-          <a:p>
-            <a:pPr indent="0" marL="0">
-              <a:buNone/>
-            </a:pPr>
-            <a:r>
-              <a:rPr lang="en-US" sz="1800" b="1" dirty="0">
-                <a:solidFill>
-                  <a:schemeClr val="tx2"/>
-                </a:solidFill>
-              </a:rPr>
-              <a:t>A second sport</a:t>
-            </a:r>
-            <a:endParaRPr lang="en-US" sz="1800" dirty="0"/>
-          </a:p>
-        </p:txBody>
-      </p:sp>
-      <p:sp>
-        <p:nvSpPr>
-          <p:cNvPr id="10" name="Text 8"/>
-          <p:cNvSpPr txBox="1"/>
-          <p:nvPr/>
-        </p:nvSpPr>
-        <p:spPr>
-          <a:xfrm>
-            <a:off x="1508760" y="3575304"/>
-            <a:ext cx="10058400" cy="1051560"/>
-          </a:xfrm>
-          <a:prstGeom prst="rect">
-            <a:avLst/>
-          </a:prstGeom>
-          <a:noFill/>
-          <a:ln/>
-        </p:spPr>
-        <p:txBody>
-          <a:bodyPr wrap="square" lIns="0" tIns="0" rIns="0" bIns="0" rtlCol="0" anchor="ctr"/>
-          <a:lstStyle/>
-          <a:p>
-            <a:pPr indent="0" marL="0">
-              <a:buNone/>
-            </a:pPr>
-            <a:r>
-              <a:rPr lang="en-US" sz="1350" dirty="0">
-                <a:solidFill>
-                  <a:schemeClr val="accent5"/>
-                </a:solidFill>
-              </a:rPr>
-              <a:t>Basketball or tennis would show whether the framework generalises. The cost is a data pipeline; the algorithms do not change. A two-outcome sport is of particular interest.</a:t>
-            </a:r>
-            <a:endParaRPr lang="en-US" sz="1350" dirty="0"/>
-          </a:p>
-        </p:txBody>
-      </p:sp>
-      <p:sp>
-        <p:nvSpPr>
-          <p:cNvPr id="11" name="circle-3"/>
-          <p:cNvSpPr/>
-          <p:nvPr/>
-        </p:nvSpPr>
-        <p:spPr>
-          <a:xfrm>
-            <a:off x="640080" y="4800600"/>
-            <a:ext cx="566928" cy="566928"/>
-          </a:xfrm>
-          <a:prstGeom prst="ellipse">
-            <a:avLst/>
-          </a:prstGeom>
-          <a:solidFill>
-            <a:schemeClr val="accent1"/>
-          </a:solidFill>
-          <a:ln/>
-        </p:spPr>
-      </p:sp>
-      <p:sp>
-        <p:nvSpPr>
-          <p:cNvPr id="12" name="Text 10"/>
-          <p:cNvSpPr txBox="1"/>
-          <p:nvPr/>
-        </p:nvSpPr>
-        <p:spPr>
-          <a:xfrm>
-            <a:off x="640080" y="4800600"/>
-            <a:ext cx="566928" cy="566928"/>
-          </a:xfrm>
-          <a:prstGeom prst="rect">
-            <a:avLst/>
-          </a:prstGeom>
-          <a:noFill/>
-          <a:ln/>
-        </p:spPr>
-        <p:txBody>
-          <a:bodyPr wrap="square" lIns="0" tIns="0" rIns="0" bIns="0" rtlCol="0" anchor="ctr"/>
-          <a:lstStyle/>
-          <a:p>
-            <a:pPr algn="ctr" indent="0" marL="0">
-              <a:buNone/>
-            </a:pPr>
-            <a:r>
-              <a:rPr lang="en-US" sz="2000" b="1" dirty="0">
-                <a:solidFill>
-                  <a:srgbClr val="FFFFFF"/>
-                </a:solidFill>
-              </a:rPr>
-              <a:t>3</a:t>
-            </a:r>
-            <a:endParaRPr lang="en-US" sz="2000" dirty="0"/>
-          </a:p>
-        </p:txBody>
-      </p:sp>
-      <p:sp>
-        <p:nvSpPr>
           <p:cNvPr id="13" name="Text 11"/>
           <p:cNvSpPr txBox="1"/>
           <p:nvPr/>
         </p:nvSpPr>
         <p:spPr>
           <a:xfrm>
-            <a:off x="1508760" y="4754880"/>
-            <a:ext cx="10058400" cy="411480"/>
-          </a:xfrm>
-          <a:prstGeom prst="rect">
-            <a:avLst/>
-          </a:prstGeom>
-          <a:noFill/>
-          <a:ln/>
-        </p:spPr>
-        <p:txBody>
-          <a:bodyPr wrap="square" lIns="0" tIns="0" rIns="0" bIns="0" rtlCol="0" anchor="ctr"/>
+            <a:off x="1078992" y="4288536"/>
+            <a:ext cx="3931920" cy="411480"/>
+          </a:xfrm>
+          <a:prstGeom prst="rect">
+            <a:avLst/>
+          </a:prstGeom>
+          <a:noFill/>
+          <a:ln/>
+        </p:spPr>
+        <p:txBody>
+          <a:bodyPr wrap="square" lIns="0" tIns="0" rIns="0" bIns="0" rtlCol="0" anchor="t"/>
           <a:lstStyle/>
           <a:p>
             <a:pPr indent="0" marL="0">
               <a:buNone/>
             </a:pPr>
             <a:r>
-              <a:rPr lang="en-US" sz="1800" b="1" dirty="0">
+              <a:rPr lang="en-US" sz="1600" b="1" dirty="0">
                 <a:solidFill>
                   <a:schemeClr val="tx2"/>
                 </a:solidFill>
               </a:rPr>
-              <a:t>Bayesian Model Averaging as a baseline</a:t>
-            </a:r>
-            <a:endParaRPr lang="en-US" sz="1800" dirty="0"/>
+              <a:t>Heterogeneity is a precondition</a:t>
+            </a:r>
+            <a:endParaRPr lang="en-US" sz="1600" dirty="0"/>
           </a:p>
         </p:txBody>
       </p:sp>
@@ -14852,17 +14943,17 @@
         </p:nvSpPr>
         <p:spPr>
           <a:xfrm>
-            <a:off x="1508760" y="5175504"/>
-            <a:ext cx="10058400" cy="1051560"/>
-          </a:xfrm>
-          <a:prstGeom prst="rect">
-            <a:avLst/>
-          </a:prstGeom>
-          <a:noFill/>
-          <a:ln/>
-        </p:spPr>
-        <p:txBody>
-          <a:bodyPr wrap="square" lIns="0" tIns="0" rIns="0" bIns="0" rtlCol="0" anchor="ctr"/>
+            <a:off x="5166360" y="4288536"/>
+            <a:ext cx="6355080" cy="777240"/>
+          </a:xfrm>
+          <a:prstGeom prst="rect">
+            <a:avLst/>
+          </a:prstGeom>
+          <a:noFill/>
+          <a:ln/>
+        </p:spPr>
+        <p:txBody>
+          <a:bodyPr wrap="square" lIns="0" tIns="0" rIns="0" bIns="0" rtlCol="0" anchor="t"/>
           <a:lstStyle/>
           <a:p>
             <a:pPr indent="0" marL="0">
@@ -14874,7 +14965,99 @@
                   <a:schemeClr val="accent5"/>
                 </a:solidFill>
               </a:rPr>
-              <a:t>An empirical point of comparison against the online algorithms, and more light on why the Aggregating Algorithm underperforms here.</a:t>
+              <a:t>Learned weighting pays only when the experts are produced by different processes.</a:t>
+            </a:r>
+            <a:endParaRPr lang="en-US" sz="1350" dirty="0"/>
+          </a:p>
+        </p:txBody>
+      </p:sp>
+      <p:sp>
+        <p:nvSpPr>
+          <p:cNvPr id="15" name="cc-4"/>
+          <p:cNvSpPr/>
+          <p:nvPr/>
+        </p:nvSpPr>
+        <p:spPr>
+          <a:xfrm>
+            <a:off x="640080" y="5321808"/>
+            <a:ext cx="256032" cy="256032"/>
+          </a:xfrm>
+          <a:prstGeom prst="ellipse">
+            <a:avLst/>
+          </a:prstGeom>
+          <a:solidFill>
+            <a:schemeClr val="accent2"/>
+          </a:solidFill>
+          <a:ln/>
+        </p:spPr>
+      </p:sp>
+      <p:sp>
+        <p:nvSpPr>
+          <p:cNvPr id="16" name="Text 14"/>
+          <p:cNvSpPr txBox="1"/>
+          <p:nvPr/>
+        </p:nvSpPr>
+        <p:spPr>
+          <a:xfrm>
+            <a:off x="1078992" y="5230368"/>
+            <a:ext cx="3931920" cy="411480"/>
+          </a:xfrm>
+          <a:prstGeom prst="rect">
+            <a:avLst/>
+          </a:prstGeom>
+          <a:noFill/>
+          <a:ln/>
+        </p:spPr>
+        <p:txBody>
+          <a:bodyPr wrap="square" lIns="0" tIns="0" rIns="0" bIns="0" rtlCol="0" anchor="t"/>
+          <a:lstStyle/>
+          <a:p>
+            <a:pPr indent="0" marL="0">
+              <a:buNone/>
+            </a:pPr>
+            <a:r>
+              <a:rPr lang="en-US" sz="1600" b="1" dirty="0">
+                <a:solidFill>
+                  <a:schemeClr val="tx2"/>
+                </a:solidFill>
+              </a:rPr>
+              <a:t>Better prediction is not profit</a:t>
+            </a:r>
+            <a:endParaRPr lang="en-US" sz="1600" dirty="0"/>
+          </a:p>
+        </p:txBody>
+      </p:sp>
+      <p:sp>
+        <p:nvSpPr>
+          <p:cNvPr id="17" name="Text 15"/>
+          <p:cNvSpPr txBox="1"/>
+          <p:nvPr/>
+        </p:nvSpPr>
+        <p:spPr>
+          <a:xfrm>
+            <a:off x="5166360" y="5230368"/>
+            <a:ext cx="6355080" cy="777240"/>
+          </a:xfrm>
+          <a:prstGeom prst="rect">
+            <a:avLst/>
+          </a:prstGeom>
+          <a:noFill/>
+          <a:ln/>
+        </p:spPr>
+        <p:txBody>
+          <a:bodyPr wrap="square" lIns="0" tIns="0" rIns="0" bIns="0" rtlCol="0" anchor="t"/>
+          <a:lstStyle/>
+          <a:p>
+            <a:pPr indent="0" marL="0">
+              <a:buNone/>
+            </a:pPr>
+            <a:r>
+              <a:rPr lang="en-US" sz="1350" dirty="0">
+                <a:solidFill>
+                  <a:schemeClr val="accent5"/>
+                </a:solidFill>
+              </a:rPr>
+              <a:t>The quality gained falls short of the margin, and the edge sits where access is controlled.</a:t>
             </a:r>
             <a:endParaRPr lang="en-US" sz="1350" dirty="0"/>
           </a:p>
@@ -14936,6 +15119,498 @@
 <file path=ppt/slides/slide32.xml><?xml version="1.0" encoding="utf-8"?>
 <p:sld xmlns:a="http://schemas.openxmlformats.org/drawingml/2006/main" xmlns:r="http://schemas.openxmlformats.org/officeDocument/2006/relationships" xmlns:p="http://schemas.openxmlformats.org/presentationml/2006/main">
   <p:cSld name="Slide 32">
+    <p:spTree>
+      <p:nvGrpSpPr>
+        <p:cNvPr id="1" name=""/>
+        <p:cNvGrpSpPr/>
+        <p:nvPr/>
+      </p:nvGrpSpPr>
+      <p:grpSpPr>
+        <a:xfrm>
+          <a:off x="0" y="0"/>
+          <a:ext cx="0" cy="0"/>
+          <a:chOff x="0" y="0"/>
+          <a:chExt cx="0" cy="0"/>
+        </a:xfrm>
+      </p:grpSpPr>
+      <p:sp>
+        <p:nvSpPr>
+          <p:cNvPr id="2" name="Text 0"/>
+          <p:cNvSpPr/>
+          <p:nvPr>
+            <p:ph idx="100" type="title" hasCustomPrompt="1"/>
+          </p:nvPr>
+        </p:nvSpPr>
+        <p:spPr>
+          <a:xfrm>
+            <a:off x="640080" y="411480"/>
+            <a:ext cx="10881360" cy="777240"/>
+          </a:xfrm>
+          <a:prstGeom prst="rect">
+            <a:avLst/>
+          </a:prstGeom>
+          <a:noFill/>
+          <a:ln/>
+        </p:spPr>
+        <p:txBody>
+          <a:bodyPr wrap="square" rtlCol="0" anchor="ctr"/>
+          <a:lstStyle/>
+          <a:p>
+            <a:pPr algn="l" indent="0" marL="0">
+              <a:buNone/>
+            </a:pPr>
+            <a:r>
+              <a:rPr lang="en-US" sz="3000" b="1" dirty="0">
+                <a:solidFill>
+                  <a:schemeClr val="tx2"/>
+                </a:solidFill>
+              </a:rPr>
+              <a:t>Future work</a:t>
+            </a:r>
+            <a:endParaRPr lang="en-US" sz="3000" dirty="0"/>
+          </a:p>
+        </p:txBody>
+      </p:sp>
+      <p:sp>
+        <p:nvSpPr>
+          <p:cNvPr id="3" name="circle-1"/>
+          <p:cNvSpPr/>
+          <p:nvPr/>
+        </p:nvSpPr>
+        <p:spPr>
+          <a:xfrm>
+            <a:off x="640080" y="1600200"/>
+            <a:ext cx="566928" cy="566928"/>
+          </a:xfrm>
+          <a:prstGeom prst="ellipse">
+            <a:avLst/>
+          </a:prstGeom>
+          <a:solidFill>
+            <a:schemeClr val="accent1"/>
+          </a:solidFill>
+          <a:ln/>
+        </p:spPr>
+      </p:sp>
+      <p:sp>
+        <p:nvSpPr>
+          <p:cNvPr id="4" name="Text 2"/>
+          <p:cNvSpPr txBox="1"/>
+          <p:nvPr/>
+        </p:nvSpPr>
+        <p:spPr>
+          <a:xfrm>
+            <a:off x="640080" y="1600200"/>
+            <a:ext cx="566928" cy="566928"/>
+          </a:xfrm>
+          <a:prstGeom prst="rect">
+            <a:avLst/>
+          </a:prstGeom>
+          <a:noFill/>
+          <a:ln/>
+        </p:spPr>
+        <p:txBody>
+          <a:bodyPr wrap="square" lIns="0" tIns="0" rIns="0" bIns="0" rtlCol="0" anchor="ctr"/>
+          <a:lstStyle/>
+          <a:p>
+            <a:pPr algn="ctr" indent="0" marL="0">
+              <a:buNone/>
+            </a:pPr>
+            <a:r>
+              <a:rPr lang="en-US" sz="2000" b="1" dirty="0">
+                <a:solidFill>
+                  <a:srgbClr val="FFFFFF"/>
+                </a:solidFill>
+              </a:rPr>
+              <a:t>1</a:t>
+            </a:r>
+            <a:endParaRPr lang="en-US" sz="2000" dirty="0"/>
+          </a:p>
+        </p:txBody>
+      </p:sp>
+      <p:sp>
+        <p:nvSpPr>
+          <p:cNvPr id="5" name="Text 3"/>
+          <p:cNvSpPr txBox="1"/>
+          <p:nvPr/>
+        </p:nvSpPr>
+        <p:spPr>
+          <a:xfrm>
+            <a:off x="1508760" y="1554480"/>
+            <a:ext cx="10058400" cy="411480"/>
+          </a:xfrm>
+          <a:prstGeom prst="rect">
+            <a:avLst/>
+          </a:prstGeom>
+          <a:noFill/>
+          <a:ln/>
+        </p:spPr>
+        <p:txBody>
+          <a:bodyPr wrap="square" lIns="0" tIns="0" rIns="0" bIns="0" rtlCol="0" anchor="ctr"/>
+          <a:lstStyle/>
+          <a:p>
+            <a:pPr indent="0" marL="0">
+              <a:buNone/>
+            </a:pPr>
+            <a:r>
+              <a:rPr lang="en-US" sz="1800" b="1" dirty="0">
+                <a:solidFill>
+                  <a:schemeClr val="tx2"/>
+                </a:solidFill>
+              </a:rPr>
+              <a:t>A live odds feed</a:t>
+            </a:r>
+            <a:endParaRPr lang="en-US" sz="1800" dirty="0"/>
+          </a:p>
+        </p:txBody>
+      </p:sp>
+      <p:sp>
+        <p:nvSpPr>
+          <p:cNvPr id="6" name="Text 4"/>
+          <p:cNvSpPr txBox="1"/>
+          <p:nvPr/>
+        </p:nvSpPr>
+        <p:spPr>
+          <a:xfrm>
+            <a:off x="1508760" y="1975104"/>
+            <a:ext cx="10058400" cy="1051560"/>
+          </a:xfrm>
+          <a:prstGeom prst="rect">
+            <a:avLst/>
+          </a:prstGeom>
+          <a:noFill/>
+          <a:ln/>
+        </p:spPr>
+        <p:txBody>
+          <a:bodyPr wrap="square" lIns="0" tIns="0" rIns="0" bIns="0" rtlCol="0" anchor="ctr"/>
+          <a:lstStyle/>
+          <a:p>
+            <a:pPr indent="0" marL="0">
+              <a:buNone/>
+            </a:pPr>
+            <a:r>
+              <a:rPr lang="en-US" sz="1350" dirty="0">
+                <a:solidFill>
+                  <a:schemeClr val="accent5"/>
+                </a:solidFill>
+              </a:rPr>
+              <a:t>Every result here says what the method WOULD have done. The three stages are online and causal, the state is one weight vector plus two scalars, so it runs in real time against a streaming API. That turns "a statistical edge exists" into "an exploitable edge exists", and records the price trajectory rather than two snapshots.</a:t>
+            </a:r>
+            <a:endParaRPr lang="en-US" sz="1350" dirty="0"/>
+          </a:p>
+        </p:txBody>
+      </p:sp>
+      <p:sp>
+        <p:nvSpPr>
+          <p:cNvPr id="7" name="circle-2"/>
+          <p:cNvSpPr/>
+          <p:nvPr/>
+        </p:nvSpPr>
+        <p:spPr>
+          <a:xfrm>
+            <a:off x="640080" y="3200400"/>
+            <a:ext cx="566928" cy="566928"/>
+          </a:xfrm>
+          <a:prstGeom prst="ellipse">
+            <a:avLst/>
+          </a:prstGeom>
+          <a:solidFill>
+            <a:schemeClr val="accent1"/>
+          </a:solidFill>
+          <a:ln/>
+        </p:spPr>
+      </p:sp>
+      <p:sp>
+        <p:nvSpPr>
+          <p:cNvPr id="8" name="Text 6"/>
+          <p:cNvSpPr txBox="1"/>
+          <p:nvPr/>
+        </p:nvSpPr>
+        <p:spPr>
+          <a:xfrm>
+            <a:off x="640080" y="3200400"/>
+            <a:ext cx="566928" cy="566928"/>
+          </a:xfrm>
+          <a:prstGeom prst="rect">
+            <a:avLst/>
+          </a:prstGeom>
+          <a:noFill/>
+          <a:ln/>
+        </p:spPr>
+        <p:txBody>
+          <a:bodyPr wrap="square" lIns="0" tIns="0" rIns="0" bIns="0" rtlCol="0" anchor="ctr"/>
+          <a:lstStyle/>
+          <a:p>
+            <a:pPr algn="ctr" indent="0" marL="0">
+              <a:buNone/>
+            </a:pPr>
+            <a:r>
+              <a:rPr lang="en-US" sz="2000" b="1" dirty="0">
+                <a:solidFill>
+                  <a:srgbClr val="FFFFFF"/>
+                </a:solidFill>
+              </a:rPr>
+              <a:t>2</a:t>
+            </a:r>
+            <a:endParaRPr lang="en-US" sz="2000" dirty="0"/>
+          </a:p>
+        </p:txBody>
+      </p:sp>
+      <p:sp>
+        <p:nvSpPr>
+          <p:cNvPr id="9" name="Text 7"/>
+          <p:cNvSpPr txBox="1"/>
+          <p:nvPr/>
+        </p:nvSpPr>
+        <p:spPr>
+          <a:xfrm>
+            <a:off x="1508760" y="3154680"/>
+            <a:ext cx="10058400" cy="411480"/>
+          </a:xfrm>
+          <a:prstGeom prst="rect">
+            <a:avLst/>
+          </a:prstGeom>
+          <a:noFill/>
+          <a:ln/>
+        </p:spPr>
+        <p:txBody>
+          <a:bodyPr wrap="square" lIns="0" tIns="0" rIns="0" bIns="0" rtlCol="0" anchor="ctr"/>
+          <a:lstStyle/>
+          <a:p>
+            <a:pPr indent="0" marL="0">
+              <a:buNone/>
+            </a:pPr>
+            <a:r>
+              <a:rPr lang="en-US" sz="1800" b="1" dirty="0">
+                <a:solidFill>
+                  <a:schemeClr val="tx2"/>
+                </a:solidFill>
+              </a:rPr>
+              <a:t>A second sport</a:t>
+            </a:r>
+            <a:endParaRPr lang="en-US" sz="1800" dirty="0"/>
+          </a:p>
+        </p:txBody>
+      </p:sp>
+      <p:sp>
+        <p:nvSpPr>
+          <p:cNvPr id="10" name="Text 8"/>
+          <p:cNvSpPr txBox="1"/>
+          <p:nvPr/>
+        </p:nvSpPr>
+        <p:spPr>
+          <a:xfrm>
+            <a:off x="1508760" y="3575304"/>
+            <a:ext cx="10058400" cy="1051560"/>
+          </a:xfrm>
+          <a:prstGeom prst="rect">
+            <a:avLst/>
+          </a:prstGeom>
+          <a:noFill/>
+          <a:ln/>
+        </p:spPr>
+        <p:txBody>
+          <a:bodyPr wrap="square" lIns="0" tIns="0" rIns="0" bIns="0" rtlCol="0" anchor="ctr"/>
+          <a:lstStyle/>
+          <a:p>
+            <a:pPr indent="0" marL="0">
+              <a:buNone/>
+            </a:pPr>
+            <a:r>
+              <a:rPr lang="en-US" sz="1350" dirty="0">
+                <a:solidFill>
+                  <a:schemeClr val="accent5"/>
+                </a:solidFill>
+              </a:rPr>
+              <a:t>Basketball or tennis would show whether the framework generalises. The cost is a data pipeline; the algorithms do not change. A two-outcome sport is of particular interest.</a:t>
+            </a:r>
+            <a:endParaRPr lang="en-US" sz="1350" dirty="0"/>
+          </a:p>
+        </p:txBody>
+      </p:sp>
+      <p:sp>
+        <p:nvSpPr>
+          <p:cNvPr id="11" name="circle-3"/>
+          <p:cNvSpPr/>
+          <p:nvPr/>
+        </p:nvSpPr>
+        <p:spPr>
+          <a:xfrm>
+            <a:off x="640080" y="4800600"/>
+            <a:ext cx="566928" cy="566928"/>
+          </a:xfrm>
+          <a:prstGeom prst="ellipse">
+            <a:avLst/>
+          </a:prstGeom>
+          <a:solidFill>
+            <a:schemeClr val="accent1"/>
+          </a:solidFill>
+          <a:ln/>
+        </p:spPr>
+      </p:sp>
+      <p:sp>
+        <p:nvSpPr>
+          <p:cNvPr id="12" name="Text 10"/>
+          <p:cNvSpPr txBox="1"/>
+          <p:nvPr/>
+        </p:nvSpPr>
+        <p:spPr>
+          <a:xfrm>
+            <a:off x="640080" y="4800600"/>
+            <a:ext cx="566928" cy="566928"/>
+          </a:xfrm>
+          <a:prstGeom prst="rect">
+            <a:avLst/>
+          </a:prstGeom>
+          <a:noFill/>
+          <a:ln/>
+        </p:spPr>
+        <p:txBody>
+          <a:bodyPr wrap="square" lIns="0" tIns="0" rIns="0" bIns="0" rtlCol="0" anchor="ctr"/>
+          <a:lstStyle/>
+          <a:p>
+            <a:pPr algn="ctr" indent="0" marL="0">
+              <a:buNone/>
+            </a:pPr>
+            <a:r>
+              <a:rPr lang="en-US" sz="2000" b="1" dirty="0">
+                <a:solidFill>
+                  <a:srgbClr val="FFFFFF"/>
+                </a:solidFill>
+              </a:rPr>
+              <a:t>3</a:t>
+            </a:r>
+            <a:endParaRPr lang="en-US" sz="2000" dirty="0"/>
+          </a:p>
+        </p:txBody>
+      </p:sp>
+      <p:sp>
+        <p:nvSpPr>
+          <p:cNvPr id="13" name="Text 11"/>
+          <p:cNvSpPr txBox="1"/>
+          <p:nvPr/>
+        </p:nvSpPr>
+        <p:spPr>
+          <a:xfrm>
+            <a:off x="1508760" y="4754880"/>
+            <a:ext cx="10058400" cy="411480"/>
+          </a:xfrm>
+          <a:prstGeom prst="rect">
+            <a:avLst/>
+          </a:prstGeom>
+          <a:noFill/>
+          <a:ln/>
+        </p:spPr>
+        <p:txBody>
+          <a:bodyPr wrap="square" lIns="0" tIns="0" rIns="0" bIns="0" rtlCol="0" anchor="ctr"/>
+          <a:lstStyle/>
+          <a:p>
+            <a:pPr indent="0" marL="0">
+              <a:buNone/>
+            </a:pPr>
+            <a:r>
+              <a:rPr lang="en-US" sz="1800" b="1" dirty="0">
+                <a:solidFill>
+                  <a:schemeClr val="tx2"/>
+                </a:solidFill>
+              </a:rPr>
+              <a:t>Bayesian Model Averaging as a baseline</a:t>
+            </a:r>
+            <a:endParaRPr lang="en-US" sz="1800" dirty="0"/>
+          </a:p>
+        </p:txBody>
+      </p:sp>
+      <p:sp>
+        <p:nvSpPr>
+          <p:cNvPr id="14" name="Text 12"/>
+          <p:cNvSpPr txBox="1"/>
+          <p:nvPr/>
+        </p:nvSpPr>
+        <p:spPr>
+          <a:xfrm>
+            <a:off x="1508760" y="5175504"/>
+            <a:ext cx="10058400" cy="1051560"/>
+          </a:xfrm>
+          <a:prstGeom prst="rect">
+            <a:avLst/>
+          </a:prstGeom>
+          <a:noFill/>
+          <a:ln/>
+        </p:spPr>
+        <p:txBody>
+          <a:bodyPr wrap="square" lIns="0" tIns="0" rIns="0" bIns="0" rtlCol="0" anchor="ctr"/>
+          <a:lstStyle/>
+          <a:p>
+            <a:pPr indent="0" marL="0">
+              <a:buNone/>
+            </a:pPr>
+            <a:r>
+              <a:rPr lang="en-US" sz="1350" dirty="0">
+                <a:solidFill>
+                  <a:schemeClr val="accent5"/>
+                </a:solidFill>
+              </a:rPr>
+              <a:t>An empirical point of comparison against the online algorithms, and more light on why the Aggregating Algorithm underperforms here.</a:t>
+            </a:r>
+            <a:endParaRPr lang="en-US" sz="1350" dirty="0"/>
+          </a:p>
+        </p:txBody>
+      </p:sp>
+      <p:sp>
+        <p:nvSpPr>
+          <p:cNvPr id="25" name="Slide Number Placeholder 0"/>
+          <p:cNvSpPr>
+            <a:spLocks noGrp="1"/>
+          </p:cNvSpPr>
+          <p:nvPr>
+            <p:ph type="sldNum" sz="quarter" idx="4294967295"/>
+          </p:nvPr>
+        </p:nvSpPr>
+        <p:spPr>
+          <a:xfrm>
+            <a:off x="11521440" y="6355080"/>
+            <a:ext cx="800000" cy="300000"/>
+          </a:xfrm>
+          <a:prstGeom prst="rect">
+            <a:avLst/>
+          </a:prstGeom>
+          <a:extLst>
+            <a:ext uri="{C572A759-6A51-4108-AA02-DFA0A04FC94B}">
+              <ma14:wrappingTextBoxFlag xmlns:ma14="http://schemas.microsoft.com/office/mac/drawingml/2011/main" val="0"/>
+            </a:ext>
+          </a:extLst>
+        </p:spPr>
+        <p:txBody>
+          <a:bodyPr/>
+          <a:lstStyle>
+            <a:lvl1pPr>
+              <a:defRPr sz="1100">
+                <a:solidFill>
+                  <a:schemeClr val="accent6"/>
+                </a:solidFill>
+              </a:defRPr>
+            </a:lvl1pPr>
+          </a:lstStyle>
+          <a:p>
+            <a:pPr algn="l"/>
+            <a:fld id="{F7021451-1387-4CA6-816F-3879F97B5CBC}" type="slidenum">
+              <a:rPr b="0" lang="en-US"/>
+              <a:t>32</a:t>
+            </a:fld>
+            <a:endParaRPr lang="en-US"/>
+          </a:p>
+        </p:txBody>
+      </p:sp>
+    </p:spTree>
+  </p:cSld>
+  <p:clrMapOvr>
+    <a:masterClrMapping/>
+  </p:clrMapOvr>
+</p:sld>
+</file>
+
+<file path=ppt/slides/slide33.xml><?xml version="1.0" encoding="utf-8"?>
+<p:sld xmlns:a="http://schemas.openxmlformats.org/drawingml/2006/main" xmlns:r="http://schemas.openxmlformats.org/officeDocument/2006/relationships" xmlns:p="http://schemas.openxmlformats.org/presentationml/2006/main">
+  <p:cSld name="Slide 33">
     <p:spTree>
       <p:nvGrpSpPr>
         <p:cNvPr id="1" name=""/>
